--- a/docs/洛神O1_路演deck.pptx
+++ b/docs/洛神O1_路演deck.pptx
@@ -16551,6 +16551,894 @@
 </p:sld>
 </file>
 
+<file path=ppt/slides/slide10.xml><?xml version="1.0" encoding="utf-8"?>
+<p:sld xmlns:a="http://schemas.openxmlformats.org/drawingml/2006/main" xmlns:a14="http://schemas.microsoft.com/office/drawing/2010/main" xmlns:a16="http://schemas.microsoft.com/office/drawing/2014/main" xmlns:p="http://schemas.openxmlformats.org/presentationml/2006/main" xmlns:p14="http://schemas.microsoft.com/office/powerpoint/2010/main" xmlns:r="http://schemas.openxmlformats.org/officeDocument/2006/relationships">
+  <p:cSld>
+    <p:spTree>
+      <p:nvGrpSpPr>
+        <p:cNvPr id="1" name="">
+          <a:extLst>
+            <a:ext uri="{FF2B5EF4-FFF2-40B4-BE49-F238E27FC236}">
+              <a16:creationId id="{E648A593-A99C-D2FE-D77C-36E5F2C8FC50}"/>
+            </a:ext>
+          </a:extLst>
+        </p:cNvPr>
+        <p:cNvGrpSpPr/>
+        <p:nvPr/>
+      </p:nvGrpSpPr>
+      <p:grpSpPr>
+        <a:xfrm>
+          <a:off x="0" y="0"/>
+          <a:ext cx="0" cy="0"/>
+          <a:chOff x="0" y="0"/>
+          <a:chExt cx="0" cy="0"/>
+        </a:xfrm>
+      </p:grpSpPr>
+      <p:grpSp>
+        <p:nvGrpSpPr>
+          <p:cNvPr id="2" name="组合 1">
+            <a:extLst>
+              <a:ext uri="{FF2B5EF4-FFF2-40B4-BE49-F238E27FC236}">
+                <a16:creationId id="{9FAC6FDF-E8F2-2C50-CFD5-A9E92A891DEB}"/>
+              </a:ext>
+            </a:extLst>
+          </p:cNvPr>
+          <p:cNvGrpSpPr/>
+          <p:nvPr/>
+        </p:nvGrpSpPr>
+        <p:grpSpPr>
+          <a:xfrm>
+            <a:off x="524797" y="385358"/>
+            <a:ext cx="11208487" cy="141577"/>
+            <a:chOff x="524797" y="385358"/>
+            <a:chExt cx="11208487" cy="141577"/>
+          </a:xfrm>
+        </p:grpSpPr>
+        <p:sp>
+          <p:nvSpPr>
+            <p:cNvPr id="3" name="AutoShape 2">
+              <a:extLst>
+                <a:ext uri="{FF2B5EF4-FFF2-40B4-BE49-F238E27FC236}">
+                  <a16:creationId id="{6632C352-CB58-9269-91D5-FF12D47E0F97}"/>
+                </a:ext>
+              </a:extLst>
+            </p:cNvPr>
+            <p:cNvSpPr/>
+            <p:nvPr/>
+          </p:nvSpPr>
+          <p:spPr>
+            <a:xfrm>
+              <a:off x="524797" y="385358"/>
+              <a:ext cx="3077046" cy="141577"/>
+            </a:xfrm>
+            <a:prstGeom prst="rect">
+              <a:avLst/>
+            </a:prstGeom>
+            <a:noFill/>
+            <a:ln w="16933" cap="flat" cmpd="sng">
+              <a:noFill/>
+              <a:prstDash val="solid"/>
+              <a:round/>
+            </a:ln>
+          </p:spPr>
+          <p:txBody>
+            <a:bodyPr vert="horz" wrap="square" lIns="0" tIns="0" rIns="0" bIns="0" rtlCol="0" anchor="t" anchorCtr="0">
+              <a:spAutoFit/>
+            </a:bodyPr>
+            <a:lstStyle/>
+            <a:p>
+              <a:pPr>
+                <a:lnSpc>
+                  <a:spcPct val="125000"/>
+                </a:lnSpc>
+                <a:defRPr/>
+              </a:pPr>
+              <a:r>
+                <a:rPr lang="en-US" sz="800" dirty="0">
+                  <a:solidFill>
+                    <a:srgbClr val="F7F7F5">
+                      <a:alpha val="50000"/>
+                    </a:srgbClr>
+                  </a:solidFill>
+                  <a:latin typeface="MiSans VF Light" pitchFamily="2" charset="-122"/>
+                  <a:ea typeface="MiSans VF Light" pitchFamily="2" charset="-122"/>
+                  <a:cs typeface="MiSans VF Light" pitchFamily="2" charset="-122"/>
+                  <a:sym typeface="JetBrains Mono"/>
+                </a:rPr>
+                <a:t/>
+              </a:r>
+              <a:r>
+                <a:rPr lang="zh-CN" altLang="en-US" sz="800" dirty="0">
+                  <a:solidFill>
+                    <a:srgbClr val="F7F7F5">
+                      <a:alpha val="50000"/>
+                    </a:srgbClr>
+                  </a:solidFill>
+                  <a:latin typeface="MiSans VF Light" pitchFamily="2" charset="-122"/>
+                  <a:ea typeface="MiSans VF Light" pitchFamily="2" charset="-122"/>
+                  <a:cs typeface="MiSans VF Light" pitchFamily="2" charset="-122"/>
+                  <a:sym typeface="JetBrains Mono"/>
+                </a:rPr>
+                <a:t/>
+              </a:r>
+              <a:r>
+                <a:rPr lang="en-US" altLang="zh-CN" sz="800" dirty="0">
+                  <a:solidFill>
+                    <a:srgbClr val="F7F7F5">
+                      <a:alpha val="50000"/>
+                    </a:srgbClr>
+                  </a:solidFill>
+                  <a:latin typeface="MiSans VF Light" pitchFamily="2" charset="-122"/>
+                  <a:ea typeface="MiSans VF Light" pitchFamily="2" charset="-122"/>
+                  <a:cs typeface="MiSans VF Light" pitchFamily="2" charset="-122"/>
+                  <a:sym typeface="JetBrains Mono"/>
+                </a:rPr>
+                <a:t/>
+              </a:r>
+              <a:endParaRPr lang="en-US" sz="800" dirty="0">
+                <a:solidFill>
+                  <a:srgbClr val="F7F7F5">
+                    <a:alpha val="50000"/>
+                  </a:srgbClr>
+                </a:solidFill>
+                <a:latin typeface="MiSans VF Light" pitchFamily="2" charset="-122"/>
+                <a:ea typeface="MiSans VF Light" pitchFamily="2" charset="-122"/>
+                <a:cs typeface="MiSans VF Light" pitchFamily="2" charset="-122"/>
+                <a:sym typeface="JetBrains Mono"/>
+              </a:endParaRPr>
+            </a:p>
+          </p:txBody>
+        </p:sp>
+        <p:sp>
+          <p:nvSpPr>
+            <p:cNvPr id="4" name="AutoShape 2">
+              <a:extLst>
+                <a:ext uri="{FF2B5EF4-FFF2-40B4-BE49-F238E27FC236}">
+                  <a16:creationId id="{3B04F1DF-1ABD-DF2B-33F8-A8CA3C8F1268}"/>
+                </a:ext>
+              </a:extLst>
+            </p:cNvPr>
+            <p:cNvSpPr/>
+            <p:nvPr/>
+          </p:nvSpPr>
+          <p:spPr>
+            <a:xfrm>
+              <a:off x="5640314" y="385358"/>
+              <a:ext cx="911371" cy="141577"/>
+            </a:xfrm>
+            <a:prstGeom prst="rect">
+              <a:avLst/>
+            </a:prstGeom>
+            <a:noFill/>
+            <a:ln w="16933" cap="flat" cmpd="sng">
+              <a:noFill/>
+              <a:prstDash val="solid"/>
+              <a:round/>
+            </a:ln>
+          </p:spPr>
+          <p:txBody>
+            <a:bodyPr vert="horz" wrap="square" lIns="0" tIns="0" rIns="0" bIns="0" rtlCol="0" anchor="t" anchorCtr="0">
+              <a:spAutoFit/>
+            </a:bodyPr>
+            <a:lstStyle/>
+            <a:p>
+              <a:pPr algn="ctr">
+                <a:lnSpc>
+                  <a:spcPct val="125000"/>
+                </a:lnSpc>
+                <a:defRPr/>
+              </a:pPr>
+              <a:r>
+                <a:rPr lang="en-US" altLang="zh-CN" sz="800" dirty="0">
+                  <a:solidFill>
+                    <a:srgbClr val="F7F7F5">
+                      <a:alpha val="50000"/>
+                    </a:srgbClr>
+                  </a:solidFill>
+                  <a:latin typeface="MiSans VF Light" pitchFamily="2" charset="-122"/>
+                  <a:ea typeface="MiSans VF Light" pitchFamily="2" charset="-122"/>
+                  <a:cs typeface="MiSans VF Light" pitchFamily="2" charset="-122"/>
+                  <a:sym typeface="JetBrains Mono"/>
+                </a:rPr>
+                <a:t>2026</a:t>
+              </a:r>
+              <a:endParaRPr lang="en-US" sz="800" dirty="0">
+                <a:solidFill>
+                  <a:srgbClr val="F7F7F5">
+                    <a:alpha val="50000"/>
+                  </a:srgbClr>
+                </a:solidFill>
+                <a:latin typeface="MiSans VF Light" pitchFamily="2" charset="-122"/>
+                <a:ea typeface="MiSans VF Light" pitchFamily="2" charset="-122"/>
+                <a:cs typeface="MiSans VF Light" pitchFamily="2" charset="-122"/>
+              </a:endParaRPr>
+            </a:p>
+          </p:txBody>
+        </p:sp>
+        <p:sp>
+          <p:nvSpPr>
+            <p:cNvPr id="7" name="AutoShape 2">
+              <a:extLst>
+                <a:ext uri="{FF2B5EF4-FFF2-40B4-BE49-F238E27FC236}">
+                  <a16:creationId id="{4D641233-D71F-5A17-2604-1D9587D88B65}"/>
+                </a:ext>
+              </a:extLst>
+            </p:cNvPr>
+            <p:cNvSpPr/>
+            <p:nvPr/>
+          </p:nvSpPr>
+          <p:spPr>
+            <a:xfrm>
+              <a:off x="8133284" y="385358"/>
+              <a:ext cx="3600000" cy="141577"/>
+            </a:xfrm>
+            <a:prstGeom prst="rect">
+              <a:avLst/>
+            </a:prstGeom>
+            <a:noFill/>
+            <a:ln w="16933" cap="flat" cmpd="sng">
+              <a:noFill/>
+              <a:prstDash val="solid"/>
+              <a:round/>
+            </a:ln>
+          </p:spPr>
+          <p:txBody>
+            <a:bodyPr vert="horz" wrap="square" lIns="0" tIns="0" rIns="0" bIns="0" rtlCol="0" anchor="t" anchorCtr="0">
+              <a:spAutoFit/>
+            </a:bodyPr>
+            <a:lstStyle/>
+            <a:p>
+              <a:pPr algn="r">
+                <a:lnSpc>
+                  <a:spcPct val="125000"/>
+                </a:lnSpc>
+                <a:defRPr/>
+              </a:pPr>
+              <a:r>
+                <a:rPr lang="en-US" sz="800" dirty="0">
+                  <a:solidFill>
+                    <a:srgbClr val="F7F7F5">
+                      <a:alpha val="50000"/>
+                    </a:srgbClr>
+                  </a:solidFill>
+                  <a:latin typeface="MiSans VF Light" pitchFamily="2" charset="-122"/>
+                  <a:ea typeface="MiSans VF Light" pitchFamily="2" charset="-122"/>
+                  <a:cs typeface="MiSans VF Light" pitchFamily="2" charset="-122"/>
+                  <a:sym typeface="JetBrains Mono"/>
+                </a:rPr>
+                <a:t/>
+              </a:r>
+              <a:endParaRPr lang="en-US" sz="800" dirty="0">
+                <a:solidFill>
+                  <a:srgbClr val="F7F7F5">
+                    <a:alpha val="50000"/>
+                  </a:srgbClr>
+                </a:solidFill>
+                <a:latin typeface="MiSans VF Light" pitchFamily="2" charset="-122"/>
+                <a:ea typeface="MiSans VF Light" pitchFamily="2" charset="-122"/>
+                <a:cs typeface="MiSans VF Light" pitchFamily="2" charset="-122"/>
+              </a:endParaRPr>
+            </a:p>
+          </p:txBody>
+        </p:sp>
+      </p:grpSp>
+      <p:sp>
+        <p:nvSpPr>
+          <p:cNvPr id="9" name="AutoShape 2">
+            <a:extLst>
+              <a:ext uri="{FF2B5EF4-FFF2-40B4-BE49-F238E27FC236}">
+                <a16:creationId id="{CB1B5DA2-304D-5777-882F-5473F98F5090}"/>
+              </a:ext>
+            </a:extLst>
+          </p:cNvPr>
+          <p:cNvSpPr/>
+          <p:nvPr/>
+        </p:nvSpPr>
+        <p:spPr>
+          <a:xfrm>
+            <a:off x="524797" y="6295670"/>
+            <a:ext cx="3077046" cy="141577"/>
+          </a:xfrm>
+          <a:prstGeom prst="rect">
+            <a:avLst/>
+          </a:prstGeom>
+          <a:noFill/>
+          <a:ln w="16933" cap="flat" cmpd="sng">
+            <a:noFill/>
+            <a:prstDash val="solid"/>
+            <a:round/>
+          </a:ln>
+        </p:spPr>
+        <p:txBody>
+          <a:bodyPr vert="horz" wrap="square" lIns="0" tIns="0" rIns="0" bIns="0" rtlCol="0" anchor="t" anchorCtr="0">
+            <a:spAutoFit/>
+          </a:bodyPr>
+          <a:lstStyle/>
+          <a:p>
+            <a:pPr>
+              <a:lnSpc>
+                <a:spcPct val="125000"/>
+              </a:lnSpc>
+              <a:defRPr/>
+            </a:pPr>
+            <a:r>
+              <a:rPr lang="en-US" altLang="zh-CN" sz="800" dirty="0">
+                <a:solidFill>
+                  <a:srgbClr val="F7F7F5">
+                    <a:alpha val="50000"/>
+                  </a:srgbClr>
+                </a:solidFill>
+                <a:latin typeface="MiSans VF Light" pitchFamily="2" charset="-122"/>
+                <a:ea typeface="MiSans VF Light" pitchFamily="2" charset="-122"/>
+                <a:cs typeface="MiSans VF Light" pitchFamily="2" charset="-122"/>
+                <a:sym typeface="JetBrains Mono"/>
+              </a:rPr>
+              <a:t/>
+            </a:r>
+            <a:endParaRPr lang="en-US" sz="800" dirty="0">
+              <a:solidFill>
+                <a:srgbClr val="F7F7F5">
+                  <a:alpha val="50000"/>
+                </a:srgbClr>
+              </a:solidFill>
+              <a:latin typeface="MiSans VF Light" pitchFamily="2" charset="-122"/>
+              <a:ea typeface="MiSans VF Light" pitchFamily="2" charset="-122"/>
+              <a:cs typeface="MiSans VF Light" pitchFamily="2" charset="-122"/>
+              <a:sym typeface="JetBrains Mono"/>
+            </a:endParaRPr>
+          </a:p>
+        </p:txBody>
+      </p:sp>
+      <p:sp>
+        <p:nvSpPr>
+          <p:cNvPr id="6" name="AutoShape 5">
+            <a:extLst>
+              <a:ext uri="{FF2B5EF4-FFF2-40B4-BE49-F238E27FC236}">
+                <a16:creationId id="{E89CED06-68D7-42C2-94E3-78AB3BA2CBF2}"/>
+              </a:ext>
+            </a:extLst>
+          </p:cNvPr>
+          <p:cNvSpPr/>
+          <p:nvPr/>
+        </p:nvSpPr>
+        <p:spPr>
+          <a:xfrm>
+            <a:off x="524798" y="1206344"/>
+            <a:ext cx="7331999" cy="615553"/>
+          </a:xfrm>
+          <a:prstGeom prst="rect">
+            <a:avLst/>
+          </a:prstGeom>
+          <a:noFill/>
+          <a:ln w="16933" cap="flat" cmpd="sng">
+            <a:noFill/>
+            <a:prstDash val="solid"/>
+            <a:round/>
+          </a:ln>
+        </p:spPr>
+        <p:txBody>
+          <a:bodyPr vert="horz" wrap="square" lIns="0" tIns="0" rIns="0" bIns="0" rtlCol="0" anchor="t" anchorCtr="0">
+            <a:spAutoFit/>
+          </a:bodyPr>
+          <a:lstStyle/>
+          <a:p>
+            <a:pPr>
+              <a:defRPr/>
+            </a:pPr>
+            <a:r>
+              <a:rPr lang="zh-CN" altLang="en-US" sz="4000" b="1" dirty="0">
+                <a:solidFill>
+                  <a:srgbClr val="F7F7F5"/>
+                </a:solidFill>
+                <a:latin typeface="MiSans VF Bold" pitchFamily="2" charset="-122"/>
+                <a:ea typeface="MiSans VF Bold" pitchFamily="2" charset="-122"/>
+                <a:cs typeface="MiSans VF Bold" pitchFamily="2" charset="-122"/>
+                <a:sym typeface="SimHei"/>
+              </a:rPr>
+              <a:t>APPLICATION</a:t>
+            </a:r>
+            <a:endParaRPr lang="en-US" altLang="zh-CN" sz="4000" b="1" dirty="0">
+              <a:solidFill>
+                <a:srgbClr val="F7F7F5"/>
+              </a:solidFill>
+              <a:latin typeface="MiSans VF Bold" pitchFamily="2" charset="-122"/>
+              <a:ea typeface="MiSans VF Bold" pitchFamily="2" charset="-122"/>
+              <a:cs typeface="MiSans VF Bold" pitchFamily="2" charset="-122"/>
+              <a:sym typeface="SimHei"/>
+            </a:endParaRPr>
+          </a:p>
+        </p:txBody>
+      </p:sp>
+      <p:sp>
+        <p:nvSpPr>
+          <p:cNvPr id="15" name="文本框 14">
+            <a:extLst>
+              <a:ext uri="{FF2B5EF4-FFF2-40B4-BE49-F238E27FC236}">
+                <a16:creationId id="{FC096C41-32D4-6372-4BDA-66DF1C2886E3}"/>
+              </a:ext>
+            </a:extLst>
+          </p:cNvPr>
+          <p:cNvSpPr txBox="1"/>
+          <p:nvPr/>
+        </p:nvSpPr>
+        <p:spPr>
+          <a:xfrm>
+            <a:off x="524796" y="4493086"/>
+            <a:ext cx="3319001" cy="246221"/>
+          </a:xfrm>
+          <a:prstGeom prst="rect">
+            <a:avLst/>
+          </a:prstGeom>
+          <a:noFill/>
+        </p:spPr>
+        <p:txBody>
+          <a:bodyPr wrap="square" lIns="0" tIns="0" rIns="0" bIns="0">
+            <a:spAutoFit/>
+          </a:bodyPr>
+          <a:lstStyle/>
+          <a:p>
+            <a:pPr>
+              <a:spcBef>
+                <a:spcPts val="1200"/>
+              </a:spcBef>
+              <a:defRPr/>
+            </a:pPr>
+            <a:r>
+              <a:rPr lang="zh-CN" altLang="en-US" sz="1600" dirty="0">
+                <a:solidFill>
+                  <a:srgbClr val="F7F7F5"/>
+                </a:solidFill>
+                <a:latin typeface="Didot" panose="02000503000000020003" pitchFamily="2" charset="-79"/>
+                <a:ea typeface="MiSans VF Bold" pitchFamily="2" charset="-122"/>
+                <a:cs typeface="Didot" panose="02000503000000020003" pitchFamily="2" charset="-79"/>
+                <a:sym typeface="SimHei"/>
+              </a:rPr>
+              <a:t>H1 · 关键期是否存在</a:t>
+            </a:r>
+            <a:endParaRPr lang="zh-CN" altLang="en-US" sz="1200" dirty="0">
+              <a:solidFill>
+                <a:srgbClr val="F7F7F5">
+                  <a:alpha val="80000"/>
+                </a:srgbClr>
+              </a:solidFill>
+              <a:latin typeface="MiSans VF Light" pitchFamily="2" charset="-122"/>
+              <a:ea typeface="MiSans VF Light" pitchFamily="2" charset="-122"/>
+              <a:cs typeface="MiSans VF Light" pitchFamily="2" charset="-122"/>
+              <a:sym typeface="SimHei"/>
+            </a:endParaRPr>
+          </a:p>
+        </p:txBody>
+      </p:sp>
+      <p:sp>
+        <p:nvSpPr>
+          <p:cNvPr id="17" name="文本框 16">
+            <a:extLst>
+              <a:ext uri="{FF2B5EF4-FFF2-40B4-BE49-F238E27FC236}">
+                <a16:creationId id="{FC5C973B-0ECD-9FA3-5034-2E7AFF868A79}"/>
+              </a:ext>
+            </a:extLst>
+          </p:cNvPr>
+          <p:cNvSpPr txBox="1"/>
+          <p:nvPr/>
+        </p:nvSpPr>
+        <p:spPr>
+          <a:xfrm>
+            <a:off x="9765793" y="1206343"/>
+            <a:ext cx="1967492" cy="307777"/>
+          </a:xfrm>
+          <a:prstGeom prst="rect">
+            <a:avLst/>
+          </a:prstGeom>
+          <a:noFill/>
+        </p:spPr>
+        <p:txBody>
+          <a:bodyPr wrap="square">
+            <a:spAutoFit/>
+          </a:bodyPr>
+          <a:lstStyle/>
+          <a:p>
+            <a:pPr algn="r">
+              <a:defRPr/>
+            </a:pPr>
+            <a:r>
+              <a:rPr lang="en-US" altLang="zh-CN" b="1" i="1" dirty="0">
+                <a:solidFill>
+                  <a:srgbClr val="FF2B20"/>
+                </a:solidFill>
+                <a:latin typeface="Didot" panose="02000503000000020003" pitchFamily="2" charset="-79"/>
+                <a:ea typeface="MiSans VF Bold" pitchFamily="2" charset="-122"/>
+                <a:cs typeface="Didot" panose="02000503000000020003" pitchFamily="2" charset="-79"/>
+                <a:sym typeface="SimHei"/>
+              </a:rPr>
+              <a:t>BIOLOGY</a:t>
+            </a:r>
+            <a:endParaRPr lang="en-US" altLang="zh-CN" sz="1400" b="1" i="1" u="none" strike="noStrike" dirty="0">
+              <a:solidFill>
+                <a:srgbClr val="FF2B20"/>
+              </a:solidFill>
+              <a:latin typeface="Didot" panose="02000503000000020003" pitchFamily="2" charset="-79"/>
+              <a:ea typeface="MiSans VF Bold" pitchFamily="2" charset="-122"/>
+              <a:cs typeface="Didot" panose="02000503000000020003" pitchFamily="2" charset="-79"/>
+              <a:sym typeface="SimHei"/>
+            </a:endParaRPr>
+          </a:p>
+        </p:txBody>
+      </p:sp>
+      <p:pic>
+        <p:nvPicPr>
+          <p:cNvPr id="5" name="图片 4">
+            <a:extLst>
+              <a:ext uri="{FF2B5EF4-FFF2-40B4-BE49-F238E27FC236}">
+                <a16:creationId id="{8B48226C-70B1-D951-9444-6D64053EAB47}"/>
+              </a:ext>
+            </a:extLst>
+          </p:cNvPr>
+          <p:cNvPicPr>
+            <a:picLocks noChangeAspect="1"/>
+          </p:cNvPicPr>
+          <p:nvPr/>
+        </p:nvPicPr>
+        <p:blipFill>
+          <a:blip r:embed="rId2">
+            <a:extLst>
+              <a:ext uri="{28A0092B-C50C-407E-A947-70E740481C1C}">
+                <a14:useLocalDpi val="0"/>
+              </a:ext>
+            </a:extLst>
+          </a:blip>
+          <a:srcRect t="29311" b="29311"/>
+          <a:stretch>
+            <a:fillRect/>
+          </a:stretch>
+        </p:blipFill>
+        <p:spPr>
+          <a:xfrm>
+            <a:off x="4365276" y="2302349"/>
+            <a:ext cx="3480320" cy="1928758"/>
+          </a:xfrm>
+          <a:prstGeom prst="rect">
+            <a:avLst/>
+          </a:prstGeom>
+        </p:spPr>
+      </p:pic>
+      <p:pic>
+        <p:nvPicPr>
+          <p:cNvPr id="8" name="图片 7">
+            <a:extLst>
+              <a:ext uri="{FF2B5EF4-FFF2-40B4-BE49-F238E27FC236}">
+                <a16:creationId id="{3ECA195B-4BC4-D7A3-7C98-EBC5CD31CE59}"/>
+              </a:ext>
+            </a:extLst>
+          </p:cNvPr>
+          <p:cNvPicPr>
+            <a:picLocks noChangeAspect="1"/>
+          </p:cNvPicPr>
+          <p:nvPr/>
+        </p:nvPicPr>
+        <p:blipFill>
+          <a:blip r:embed="rId3">
+            <a:extLst>
+              <a:ext uri="{28A0092B-C50C-407E-A947-70E740481C1C}">
+                <a14:useLocalDpi val="0"/>
+              </a:ext>
+            </a:extLst>
+          </a:blip>
+          <a:srcRect t="29311" b="29311"/>
+          <a:stretch>
+            <a:fillRect/>
+          </a:stretch>
+        </p:blipFill>
+        <p:spPr>
+          <a:xfrm>
+            <a:off x="524796" y="2295559"/>
+            <a:ext cx="3480320" cy="1928758"/>
+          </a:xfrm>
+          <a:prstGeom prst="rect">
+            <a:avLst/>
+          </a:prstGeom>
+        </p:spPr>
+      </p:pic>
+      <p:pic>
+        <p:nvPicPr>
+          <p:cNvPr id="10" name="图片 9">
+            <a:extLst>
+              <a:ext uri="{FF2B5EF4-FFF2-40B4-BE49-F238E27FC236}">
+                <a16:creationId id="{CBB63147-B931-9E83-B796-0B4E8993A87D}"/>
+              </a:ext>
+            </a:extLst>
+          </p:cNvPr>
+          <p:cNvPicPr>
+            <a:picLocks noChangeAspect="1"/>
+          </p:cNvPicPr>
+          <p:nvPr/>
+        </p:nvPicPr>
+        <p:blipFill>
+          <a:blip r:embed="rId4">
+            <a:extLst>
+              <a:ext uri="{28A0092B-C50C-407E-A947-70E740481C1C}">
+                <a14:useLocalDpi val="0"/>
+              </a:ext>
+            </a:extLst>
+          </a:blip>
+          <a:srcRect t="29311" b="29311"/>
+          <a:stretch>
+            <a:fillRect/>
+          </a:stretch>
+        </p:blipFill>
+        <p:spPr>
+          <a:xfrm>
+            <a:off x="8205756" y="2302349"/>
+            <a:ext cx="3480320" cy="1928758"/>
+          </a:xfrm>
+          <a:prstGeom prst="rect">
+            <a:avLst/>
+          </a:prstGeom>
+        </p:spPr>
+      </p:pic>
+      <p:sp>
+        <p:nvSpPr>
+          <p:cNvPr id="11" name="文本框 10">
+            <a:extLst>
+              <a:ext uri="{FF2B5EF4-FFF2-40B4-BE49-F238E27FC236}">
+                <a16:creationId id="{9A0EA5EB-556D-1411-995F-178F17A06613}"/>
+              </a:ext>
+            </a:extLst>
+          </p:cNvPr>
+          <p:cNvSpPr txBox="1"/>
+          <p:nvPr/>
+        </p:nvSpPr>
+        <p:spPr>
+          <a:xfrm>
+            <a:off x="524796" y="4908953"/>
+            <a:ext cx="3319001" cy="184666"/>
+          </a:xfrm>
+          <a:prstGeom prst="rect">
+            <a:avLst/>
+          </a:prstGeom>
+          <a:noFill/>
+        </p:spPr>
+        <p:txBody>
+          <a:bodyPr wrap="square" lIns="0" tIns="0" rIns="0" bIns="0">
+            <a:spAutoFit/>
+          </a:bodyPr>
+          <a:lstStyle/>
+          <a:p>
+            <a:pPr>
+              <a:spcBef>
+                <a:spcPts val="1200"/>
+              </a:spcBef>
+              <a:defRPr/>
+            </a:pPr>
+            <a:r>
+              <a:rPr lang="zh-CN" altLang="en-US" sz="1200" dirty="0">
+                <a:solidFill>
+                  <a:srgbClr val="F7F7F5">
+                    <a:alpha val="80000"/>
+                  </a:srgbClr>
+                </a:solidFill>
+                <a:latin typeface="MiSans VF Light" pitchFamily="2" charset="-122"/>
+                <a:ea typeface="MiSans VF Light" pitchFamily="2" charset="-122"/>
+                <a:cs typeface="MiSans VF Light" pitchFamily="2" charset="-122"/>
+                <a:sym typeface="SimHei"/>
+              </a:rPr>
+              <a:t>门在第 400 拍关上</a:t>
+            </a:r>
+          </a:p>
+        </p:txBody>
+      </p:sp>
+      <p:sp>
+        <p:nvSpPr>
+          <p:cNvPr id="12" name="文本框 11">
+            <a:extLst>
+              <a:ext uri="{FF2B5EF4-FFF2-40B4-BE49-F238E27FC236}">
+                <a16:creationId id="{3847B955-84CD-7160-E6F7-E14BF0282D8C}"/>
+              </a:ext>
+            </a:extLst>
+          </p:cNvPr>
+          <p:cNvSpPr txBox="1"/>
+          <p:nvPr/>
+        </p:nvSpPr>
+        <p:spPr>
+          <a:xfrm>
+            <a:off x="4362505" y="4493086"/>
+            <a:ext cx="3319001" cy="246221"/>
+          </a:xfrm>
+          <a:prstGeom prst="rect">
+            <a:avLst/>
+          </a:prstGeom>
+          <a:noFill/>
+        </p:spPr>
+        <p:txBody>
+          <a:bodyPr wrap="square" lIns="0" tIns="0" rIns="0" bIns="0">
+            <a:spAutoFit/>
+          </a:bodyPr>
+          <a:lstStyle/>
+          <a:p>
+            <a:pPr>
+              <a:spcBef>
+                <a:spcPts val="1200"/>
+              </a:spcBef>
+              <a:defRPr/>
+            </a:pPr>
+            <a:r>
+              <a:rPr lang="zh-CN" altLang="en-US" sz="1600" dirty="0">
+                <a:solidFill>
+                  <a:srgbClr val="F7F7F5"/>
+                </a:solidFill>
+                <a:latin typeface="Didot" panose="02000503000000020003" pitchFamily="2" charset="-79"/>
+                <a:ea typeface="MiSans VF Bold" pitchFamily="2" charset="-122"/>
+                <a:cs typeface="Didot" panose="02000503000000020003" pitchFamily="2" charset="-79"/>
+                <a:sym typeface="SimHei"/>
+              </a:rPr>
+              <a:t>H2 · 剂量-反应</a:t>
+            </a:r>
+          </a:p>
+        </p:txBody>
+      </p:sp>
+      <p:sp>
+        <p:nvSpPr>
+          <p:cNvPr id="13" name="文本框 12">
+            <a:extLst>
+              <a:ext uri="{FF2B5EF4-FFF2-40B4-BE49-F238E27FC236}">
+                <a16:creationId id="{829845F5-7CC0-75D4-07A3-A234B1960F32}"/>
+              </a:ext>
+            </a:extLst>
+          </p:cNvPr>
+          <p:cNvSpPr txBox="1"/>
+          <p:nvPr/>
+        </p:nvSpPr>
+        <p:spPr>
+          <a:xfrm>
+            <a:off x="4362505" y="4908953"/>
+            <a:ext cx="3319001" cy="184666"/>
+          </a:xfrm>
+          <a:prstGeom prst="rect">
+            <a:avLst/>
+          </a:prstGeom>
+          <a:noFill/>
+        </p:spPr>
+        <p:txBody>
+          <a:bodyPr wrap="square" lIns="0" tIns="0" rIns="0" bIns="0">
+            <a:spAutoFit/>
+          </a:bodyPr>
+          <a:lstStyle/>
+          <a:p>
+            <a:pPr>
+              <a:spcBef>
+                <a:spcPts val="1200"/>
+              </a:spcBef>
+              <a:defRPr/>
+            </a:pPr>
+            <a:r>
+              <a:rPr lang="zh-CN" altLang="en-US" sz="1200" dirty="0">
+                <a:solidFill>
+                  <a:srgbClr val="F7F7F5">
+                    <a:alpha val="80000"/>
+                  </a:srgbClr>
+                </a:solidFill>
+                <a:latin typeface="MiSans VF Light" pitchFamily="2" charset="-122"/>
+                <a:ea typeface="MiSans VF Light" pitchFamily="2" charset="-122"/>
+                <a:cs typeface="MiSans VF Light" pitchFamily="2" charset="-122"/>
+                <a:sym typeface="SimHei"/>
+              </a:rPr>
+              <a:t>50 拍即达最大效应 89.8%，属阈值型而非线性</a:t>
+            </a:r>
+          </a:p>
+        </p:txBody>
+      </p:sp>
+      <p:sp>
+        <p:nvSpPr>
+          <p:cNvPr id="14" name="文本框 13">
+            <a:extLst>
+              <a:ext uri="{FF2B5EF4-FFF2-40B4-BE49-F238E27FC236}">
+                <a16:creationId id="{B5C380DF-0131-3088-39BF-A168647DFD40}"/>
+              </a:ext>
+            </a:extLst>
+          </p:cNvPr>
+          <p:cNvSpPr txBox="1"/>
+          <p:nvPr/>
+        </p:nvSpPr>
+        <p:spPr>
+          <a:xfrm>
+            <a:off x="8200214" y="4493086"/>
+            <a:ext cx="3319001" cy="246221"/>
+          </a:xfrm>
+          <a:prstGeom prst="rect">
+            <a:avLst/>
+          </a:prstGeom>
+          <a:noFill/>
+        </p:spPr>
+        <p:txBody>
+          <a:bodyPr wrap="square" lIns="0" tIns="0" rIns="0" bIns="0">
+            <a:spAutoFit/>
+          </a:bodyPr>
+          <a:lstStyle/>
+          <a:p>
+            <a:pPr>
+              <a:spcBef>
+                <a:spcPts val="1200"/>
+              </a:spcBef>
+              <a:defRPr/>
+            </a:pPr>
+            <a:r>
+              <a:rPr lang="zh-CN" altLang="en-US" sz="1600" dirty="0">
+                <a:solidFill>
+                  <a:srgbClr val="F7F7F5"/>
+                </a:solidFill>
+                <a:latin typeface="Didot" panose="02000503000000020003" pitchFamily="2" charset="-79"/>
+                <a:ea typeface="MiSans VF Bold" pitchFamily="2" charset="-122"/>
+                <a:cs typeface="Didot" panose="02000503000000020003" pitchFamily="2" charset="-79"/>
+                <a:sym typeface="SimHei"/>
+              </a:rPr>
+              <a:t>H3 · 选择压</a:t>
+            </a:r>
+          </a:p>
+        </p:txBody>
+      </p:sp>
+      <p:sp>
+        <p:nvSpPr>
+          <p:cNvPr id="16" name="文本框 15">
+            <a:extLst>
+              <a:ext uri="{FF2B5EF4-FFF2-40B4-BE49-F238E27FC236}">
+                <a16:creationId id="{59211C5B-AA80-DAEA-AAF7-C4B1E4F95193}"/>
+              </a:ext>
+            </a:extLst>
+          </p:cNvPr>
+          <p:cNvSpPr txBox="1"/>
+          <p:nvPr/>
+        </p:nvSpPr>
+        <p:spPr>
+          <a:xfrm>
+            <a:off x="8200214" y="4908953"/>
+            <a:ext cx="3319001" cy="369332"/>
+          </a:xfrm>
+          <a:prstGeom prst="rect">
+            <a:avLst/>
+          </a:prstGeom>
+          <a:noFill/>
+        </p:spPr>
+        <p:txBody>
+          <a:bodyPr wrap="square" lIns="0" tIns="0" rIns="0" bIns="0">
+            <a:spAutoFit/>
+          </a:bodyPr>
+          <a:lstStyle/>
+          <a:p>
+            <a:pPr>
+              <a:spcBef>
+                <a:spcPts val="1200"/>
+              </a:spcBef>
+              <a:defRPr/>
+            </a:pPr>
+            <a:r>
+              <a:rPr lang="zh-CN" altLang="en-US" sz="1200" dirty="0">
+                <a:solidFill>
+                  <a:srgbClr val="F7F7F5">
+                    <a:alpha val="80000"/>
+                  </a:srgbClr>
+                </a:solidFill>
+                <a:latin typeface="MiSans VF Light" pitchFamily="2" charset="-122"/>
+                <a:ea typeface="MiSans VF Light" pitchFamily="2" charset="-122"/>
+                <a:cs typeface="MiSans VF Light" pitchFamily="2" charset="-122"/>
+                <a:sym typeface="SimHei"/>
+              </a:rPr>
+              <a:t>ratio≥1.0 时结构精确归零：稀缺是开关，不是旋钮</a:t>
+            </a:r>
+          </a:p>
+        </p:txBody>
+      </p:sp>
+    </p:spTree>
+    <p:extLst>
+      <p:ext uri="{BB962C8B-B14F-4D97-AF65-F5344CB8AC3E}">
+        <p14:creationId val="166021927"/>
+      </p:ext>
+    </p:extLst>
+  </p:cSld>
+  <p:clrMapOvr>
+    <a:masterClrMapping/>
+  </p:clrMapOvr>
+</p:sld>
+</file>
+
 <file path=ppt/slides/slide11.xml><?xml version="1.0" encoding="utf-8"?>
 <p:sld xmlns:a="http://schemas.openxmlformats.org/drawingml/2006/main" xmlns:a14="http://schemas.microsoft.com/office/drawing/2010/main" xmlns:a16="http://schemas.microsoft.com/office/drawing/2014/main" xmlns:p="http://schemas.openxmlformats.org/presentationml/2006/main" xmlns:p14="http://schemas.microsoft.com/office/powerpoint/2010/main" xmlns:r="http://schemas.openxmlformats.org/officeDocument/2006/relationships">
   <p:cSld>
@@ -17327,1259 +18215,7 @@
 </p:sld>
 </file>
 
-<file path=ppt/slides/slide13.xml><?xml version="1.0" encoding="utf-8"?>
-<p:sld xmlns:a="http://schemas.openxmlformats.org/drawingml/2006/main" xmlns:a16="http://schemas.microsoft.com/office/drawing/2014/main" xmlns:c="http://schemas.openxmlformats.org/drawingml/2006/chart" xmlns:p="http://schemas.openxmlformats.org/presentationml/2006/main" xmlns:p14="http://schemas.microsoft.com/office/powerpoint/2010/main" xmlns:r="http://schemas.openxmlformats.org/officeDocument/2006/relationships">
-  <p:cSld>
-    <p:spTree>
-      <p:nvGrpSpPr>
-        <p:cNvPr id="1" name="">
-          <a:extLst>
-            <a:ext uri="{FF2B5EF4-FFF2-40B4-BE49-F238E27FC236}">
-              <a16:creationId id="{8F5D1BDB-50D1-598D-5CBC-C7F28A2F0ED7}"/>
-            </a:ext>
-          </a:extLst>
-        </p:cNvPr>
-        <p:cNvGrpSpPr/>
-        <p:nvPr/>
-      </p:nvGrpSpPr>
-      <p:grpSpPr>
-        <a:xfrm>
-          <a:off x="0" y="0"/>
-          <a:ext cx="0" cy="0"/>
-          <a:chOff x="0" y="0"/>
-          <a:chExt cx="0" cy="0"/>
-        </a:xfrm>
-      </p:grpSpPr>
-      <p:grpSp>
-        <p:nvGrpSpPr>
-          <p:cNvPr id="2" name="组合 1">
-            <a:extLst>
-              <a:ext uri="{FF2B5EF4-FFF2-40B4-BE49-F238E27FC236}">
-                <a16:creationId id="{96EBE4BF-D6E8-071B-A0D5-AAE1B363E7EE}"/>
-              </a:ext>
-            </a:extLst>
-          </p:cNvPr>
-          <p:cNvGrpSpPr/>
-          <p:nvPr/>
-        </p:nvGrpSpPr>
-        <p:grpSpPr>
-          <a:xfrm>
-            <a:off x="524797" y="385358"/>
-            <a:ext cx="11208487" cy="141577"/>
-            <a:chOff x="524797" y="385358"/>
-            <a:chExt cx="11208487" cy="141577"/>
-          </a:xfrm>
-        </p:grpSpPr>
-        <p:sp>
-          <p:nvSpPr>
-            <p:cNvPr id="3" name="AutoShape 2">
-              <a:extLst>
-                <a:ext uri="{FF2B5EF4-FFF2-40B4-BE49-F238E27FC236}">
-                  <a16:creationId id="{13F7C4F4-58AA-847E-3DCC-D467195FC72F}"/>
-                </a:ext>
-              </a:extLst>
-            </p:cNvPr>
-            <p:cNvSpPr/>
-            <p:nvPr/>
-          </p:nvSpPr>
-          <p:spPr>
-            <a:xfrm>
-              <a:off x="524797" y="385358"/>
-              <a:ext cx="3077046" cy="141577"/>
-            </a:xfrm>
-            <a:prstGeom prst="rect">
-              <a:avLst/>
-            </a:prstGeom>
-            <a:noFill/>
-            <a:ln w="16933" cap="flat" cmpd="sng">
-              <a:noFill/>
-              <a:prstDash val="solid"/>
-              <a:round/>
-            </a:ln>
-          </p:spPr>
-          <p:txBody>
-            <a:bodyPr vert="horz" wrap="square" lIns="0" tIns="0" rIns="0" bIns="0" rtlCol="0" anchor="t" anchorCtr="0">
-              <a:spAutoFit/>
-            </a:bodyPr>
-            <a:lstStyle/>
-            <a:p>
-              <a:pPr>
-                <a:lnSpc>
-                  <a:spcPct val="125000"/>
-                </a:lnSpc>
-                <a:defRPr/>
-              </a:pPr>
-              <a:r>
-                <a:rPr lang="en-US" sz="800" dirty="0">
-                  <a:solidFill>
-                    <a:srgbClr val="F7F7F5">
-                      <a:alpha val="50000"/>
-                    </a:srgbClr>
-                  </a:solidFill>
-                  <a:latin typeface="MiSans VF Light" pitchFamily="2" charset="-122"/>
-                  <a:ea typeface="MiSans VF Light" pitchFamily="2" charset="-122"/>
-                  <a:cs typeface="MiSans VF Light" pitchFamily="2" charset="-122"/>
-                  <a:sym typeface="JetBrains Mono"/>
-                </a:rPr>
-                <a:t/>
-              </a:r>
-              <a:r>
-                <a:rPr lang="zh-CN" altLang="en-US" sz="800" dirty="0">
-                  <a:solidFill>
-                    <a:srgbClr val="F7F7F5">
-                      <a:alpha val="50000"/>
-                    </a:srgbClr>
-                  </a:solidFill>
-                  <a:latin typeface="MiSans VF Light" pitchFamily="2" charset="-122"/>
-                  <a:ea typeface="MiSans VF Light" pitchFamily="2" charset="-122"/>
-                  <a:cs typeface="MiSans VF Light" pitchFamily="2" charset="-122"/>
-                  <a:sym typeface="JetBrains Mono"/>
-                </a:rPr>
-                <a:t/>
-              </a:r>
-              <a:r>
-                <a:rPr lang="en-US" altLang="zh-CN" sz="800" dirty="0">
-                  <a:solidFill>
-                    <a:srgbClr val="F7F7F5">
-                      <a:alpha val="50000"/>
-                    </a:srgbClr>
-                  </a:solidFill>
-                  <a:latin typeface="MiSans VF Light" pitchFamily="2" charset="-122"/>
-                  <a:ea typeface="MiSans VF Light" pitchFamily="2" charset="-122"/>
-                  <a:cs typeface="MiSans VF Light" pitchFamily="2" charset="-122"/>
-                  <a:sym typeface="JetBrains Mono"/>
-                </a:rPr>
-                <a:t/>
-              </a:r>
-              <a:endParaRPr lang="en-US" sz="800" dirty="0">
-                <a:solidFill>
-                  <a:srgbClr val="F7F7F5">
-                    <a:alpha val="50000"/>
-                  </a:srgbClr>
-                </a:solidFill>
-                <a:latin typeface="MiSans VF Light" pitchFamily="2" charset="-122"/>
-                <a:ea typeface="MiSans VF Light" pitchFamily="2" charset="-122"/>
-                <a:cs typeface="MiSans VF Light" pitchFamily="2" charset="-122"/>
-                <a:sym typeface="JetBrains Mono"/>
-              </a:endParaRPr>
-            </a:p>
-          </p:txBody>
-        </p:sp>
-        <p:sp>
-          <p:nvSpPr>
-            <p:cNvPr id="4" name="AutoShape 2">
-              <a:extLst>
-                <a:ext uri="{FF2B5EF4-FFF2-40B4-BE49-F238E27FC236}">
-                  <a16:creationId id="{DEBAD1B9-2C99-5A88-06E8-C1ECA1189455}"/>
-                </a:ext>
-              </a:extLst>
-            </p:cNvPr>
-            <p:cNvSpPr/>
-            <p:nvPr/>
-          </p:nvSpPr>
-          <p:spPr>
-            <a:xfrm>
-              <a:off x="5640314" y="385358"/>
-              <a:ext cx="911371" cy="141577"/>
-            </a:xfrm>
-            <a:prstGeom prst="rect">
-              <a:avLst/>
-            </a:prstGeom>
-            <a:noFill/>
-            <a:ln w="16933" cap="flat" cmpd="sng">
-              <a:noFill/>
-              <a:prstDash val="solid"/>
-              <a:round/>
-            </a:ln>
-          </p:spPr>
-          <p:txBody>
-            <a:bodyPr vert="horz" wrap="square" lIns="0" tIns="0" rIns="0" bIns="0" rtlCol="0" anchor="t" anchorCtr="0">
-              <a:spAutoFit/>
-            </a:bodyPr>
-            <a:lstStyle/>
-            <a:p>
-              <a:pPr algn="ctr">
-                <a:lnSpc>
-                  <a:spcPct val="125000"/>
-                </a:lnSpc>
-                <a:defRPr/>
-              </a:pPr>
-              <a:r>
-                <a:rPr lang="en-US" altLang="zh-CN" sz="800" dirty="0">
-                  <a:solidFill>
-                    <a:srgbClr val="F7F7F5">
-                      <a:alpha val="50000"/>
-                    </a:srgbClr>
-                  </a:solidFill>
-                  <a:latin typeface="MiSans VF Light" pitchFamily="2" charset="-122"/>
-                  <a:ea typeface="MiSans VF Light" pitchFamily="2" charset="-122"/>
-                  <a:cs typeface="MiSans VF Light" pitchFamily="2" charset="-122"/>
-                  <a:sym typeface="JetBrains Mono"/>
-                </a:rPr>
-                <a:t>2026</a:t>
-              </a:r>
-              <a:endParaRPr lang="en-US" sz="800" dirty="0">
-                <a:solidFill>
-                  <a:srgbClr val="F7F7F5">
-                    <a:alpha val="50000"/>
-                  </a:srgbClr>
-                </a:solidFill>
-                <a:latin typeface="MiSans VF Light" pitchFamily="2" charset="-122"/>
-                <a:ea typeface="MiSans VF Light" pitchFamily="2" charset="-122"/>
-                <a:cs typeface="MiSans VF Light" pitchFamily="2" charset="-122"/>
-              </a:endParaRPr>
-            </a:p>
-          </p:txBody>
-        </p:sp>
-        <p:sp>
-          <p:nvSpPr>
-            <p:cNvPr id="7" name="AutoShape 2">
-              <a:extLst>
-                <a:ext uri="{FF2B5EF4-FFF2-40B4-BE49-F238E27FC236}">
-                  <a16:creationId id="{4EC9550B-FCE4-244F-3506-15373811894F}"/>
-                </a:ext>
-              </a:extLst>
-            </p:cNvPr>
-            <p:cNvSpPr/>
-            <p:nvPr/>
-          </p:nvSpPr>
-          <p:spPr>
-            <a:xfrm>
-              <a:off x="8133284" y="385358"/>
-              <a:ext cx="3600000" cy="141577"/>
-            </a:xfrm>
-            <a:prstGeom prst="rect">
-              <a:avLst/>
-            </a:prstGeom>
-            <a:noFill/>
-            <a:ln w="16933" cap="flat" cmpd="sng">
-              <a:noFill/>
-              <a:prstDash val="solid"/>
-              <a:round/>
-            </a:ln>
-          </p:spPr>
-          <p:txBody>
-            <a:bodyPr vert="horz" wrap="square" lIns="0" tIns="0" rIns="0" bIns="0" rtlCol="0" anchor="t" anchorCtr="0">
-              <a:spAutoFit/>
-            </a:bodyPr>
-            <a:lstStyle/>
-            <a:p>
-              <a:pPr algn="r">
-                <a:lnSpc>
-                  <a:spcPct val="125000"/>
-                </a:lnSpc>
-                <a:defRPr/>
-              </a:pPr>
-              <a:r>
-                <a:rPr lang="en-US" sz="800" dirty="0">
-                  <a:solidFill>
-                    <a:srgbClr val="F7F7F5">
-                      <a:alpha val="50000"/>
-                    </a:srgbClr>
-                  </a:solidFill>
-                  <a:latin typeface="MiSans VF Light" pitchFamily="2" charset="-122"/>
-                  <a:ea typeface="MiSans VF Light" pitchFamily="2" charset="-122"/>
-                  <a:cs typeface="MiSans VF Light" pitchFamily="2" charset="-122"/>
-                  <a:sym typeface="JetBrains Mono"/>
-                </a:rPr>
-                <a:t/>
-              </a:r>
-              <a:endParaRPr lang="en-US" sz="800" dirty="0">
-                <a:solidFill>
-                  <a:srgbClr val="F7F7F5">
-                    <a:alpha val="50000"/>
-                  </a:srgbClr>
-                </a:solidFill>
-                <a:latin typeface="MiSans VF Light" pitchFamily="2" charset="-122"/>
-                <a:ea typeface="MiSans VF Light" pitchFamily="2" charset="-122"/>
-                <a:cs typeface="MiSans VF Light" pitchFamily="2" charset="-122"/>
-              </a:endParaRPr>
-            </a:p>
-          </p:txBody>
-        </p:sp>
-      </p:grpSp>
-      <p:sp>
-        <p:nvSpPr>
-          <p:cNvPr id="9" name="AutoShape 2">
-            <a:extLst>
-              <a:ext uri="{FF2B5EF4-FFF2-40B4-BE49-F238E27FC236}">
-                <a16:creationId id="{0801CD8B-952A-2949-1D71-C755253B5DD7}"/>
-              </a:ext>
-            </a:extLst>
-          </p:cNvPr>
-          <p:cNvSpPr/>
-          <p:nvPr/>
-        </p:nvSpPr>
-        <p:spPr>
-          <a:xfrm>
-            <a:off x="524797" y="6295670"/>
-            <a:ext cx="3077046" cy="141577"/>
-          </a:xfrm>
-          <a:prstGeom prst="rect">
-            <a:avLst/>
-          </a:prstGeom>
-          <a:noFill/>
-          <a:ln w="16933" cap="flat" cmpd="sng">
-            <a:noFill/>
-            <a:prstDash val="solid"/>
-            <a:round/>
-          </a:ln>
-        </p:spPr>
-        <p:txBody>
-          <a:bodyPr vert="horz" wrap="square" lIns="0" tIns="0" rIns="0" bIns="0" rtlCol="0" anchor="t" anchorCtr="0">
-            <a:spAutoFit/>
-          </a:bodyPr>
-          <a:lstStyle/>
-          <a:p>
-            <a:pPr>
-              <a:lnSpc>
-                <a:spcPct val="125000"/>
-              </a:lnSpc>
-              <a:defRPr/>
-            </a:pPr>
-            <a:r>
-              <a:rPr lang="en-US" altLang="zh-CN" sz="800" dirty="0">
-                <a:solidFill>
-                  <a:srgbClr val="F7F7F5">
-                    <a:alpha val="50000"/>
-                  </a:srgbClr>
-                </a:solidFill>
-                <a:latin typeface="MiSans VF Light" pitchFamily="2" charset="-122"/>
-                <a:ea typeface="MiSans VF Light" pitchFamily="2" charset="-122"/>
-                <a:cs typeface="MiSans VF Light" pitchFamily="2" charset="-122"/>
-                <a:sym typeface="JetBrains Mono"/>
-              </a:rPr>
-              <a:t/>
-            </a:r>
-            <a:endParaRPr lang="en-US" sz="800" dirty="0">
-              <a:solidFill>
-                <a:srgbClr val="F7F7F5">
-                  <a:alpha val="50000"/>
-                </a:srgbClr>
-              </a:solidFill>
-              <a:latin typeface="MiSans VF Light" pitchFamily="2" charset="-122"/>
-              <a:ea typeface="MiSans VF Light" pitchFamily="2" charset="-122"/>
-              <a:cs typeface="MiSans VF Light" pitchFamily="2" charset="-122"/>
-              <a:sym typeface="JetBrains Mono"/>
-            </a:endParaRPr>
-          </a:p>
-        </p:txBody>
-      </p:sp>
-      <p:sp>
-        <p:nvSpPr>
-          <p:cNvPr id="17" name="文本框 16">
-            <a:extLst>
-              <a:ext uri="{FF2B5EF4-FFF2-40B4-BE49-F238E27FC236}">
-                <a16:creationId id="{BC460A70-9F17-D6EE-663D-F1DB78020284}"/>
-              </a:ext>
-            </a:extLst>
-          </p:cNvPr>
-          <p:cNvSpPr txBox="1"/>
-          <p:nvPr/>
-        </p:nvSpPr>
-        <p:spPr>
-          <a:xfrm>
-            <a:off x="9765793" y="1206343"/>
-            <a:ext cx="1967492" cy="307777"/>
-          </a:xfrm>
-          <a:prstGeom prst="rect">
-            <a:avLst/>
-          </a:prstGeom>
-          <a:noFill/>
-        </p:spPr>
-        <p:txBody>
-          <a:bodyPr wrap="square">
-            <a:spAutoFit/>
-          </a:bodyPr>
-          <a:lstStyle/>
-          <a:p>
-            <a:pPr algn="r">
-              <a:defRPr/>
-            </a:pPr>
-            <a:r>
-              <a:rPr lang="en-US" altLang="zh-CN" b="1" i="1" dirty="0">
-                <a:solidFill>
-                  <a:srgbClr val="FF2B20"/>
-                </a:solidFill>
-                <a:latin typeface="Didot" panose="02000503000000020003" pitchFamily="2" charset="-79"/>
-                <a:ea typeface="MiSans VF Bold" pitchFamily="2" charset="-122"/>
-                <a:cs typeface="Didot" panose="02000503000000020003" pitchFamily="2" charset="-79"/>
-                <a:sym typeface="SimHei"/>
-              </a:rPr>
-              <a:t>FINDING 02</a:t>
-            </a:r>
-            <a:endParaRPr lang="en-US" altLang="zh-CN" sz="1400" b="1" i="1" u="none" strike="noStrike" dirty="0">
-              <a:solidFill>
-                <a:srgbClr val="FF2B20"/>
-              </a:solidFill>
-              <a:latin typeface="Didot" panose="02000503000000020003" pitchFamily="2" charset="-79"/>
-              <a:ea typeface="MiSans VF Bold" pitchFamily="2" charset="-122"/>
-              <a:cs typeface="Didot" panose="02000503000000020003" pitchFamily="2" charset="-79"/>
-              <a:sym typeface="SimHei"/>
-            </a:endParaRPr>
-          </a:p>
-        </p:txBody>
-      </p:sp>
-      <p:sp>
-        <p:nvSpPr>
-          <p:cNvPr id="5" name="AutoShape 5">
-            <a:extLst>
-              <a:ext uri="{FF2B5EF4-FFF2-40B4-BE49-F238E27FC236}">
-                <a16:creationId id="{E1BA5FBA-5836-5D8A-C33E-421550FF18BA}"/>
-              </a:ext>
-            </a:extLst>
-          </p:cNvPr>
-          <p:cNvSpPr/>
-          <p:nvPr/>
-        </p:nvSpPr>
-        <p:spPr>
-          <a:xfrm>
-            <a:off x="524799" y="1206344"/>
-            <a:ext cx="7832392" cy="615553"/>
-          </a:xfrm>
-          <a:prstGeom prst="rect">
-            <a:avLst/>
-          </a:prstGeom>
-          <a:noFill/>
-          <a:ln w="16933" cap="flat" cmpd="sng">
-            <a:noFill/>
-            <a:prstDash val="solid"/>
-            <a:round/>
-          </a:ln>
-        </p:spPr>
-        <p:txBody>
-          <a:bodyPr vert="horz" wrap="square" lIns="0" tIns="0" rIns="0" bIns="0" rtlCol="0" anchor="t" anchorCtr="0">
-            <a:spAutoFit/>
-          </a:bodyPr>
-          <a:lstStyle/>
-          <a:p>
-            <a:pPr>
-              <a:defRPr/>
-            </a:pPr>
-            <a:r>
-              <a:rPr lang="zh-CN" altLang="en-US" sz="4000" b="1" dirty="0">
-                <a:solidFill>
-                  <a:srgbClr val="F7F7F5"/>
-                </a:solidFill>
-                <a:latin typeface="MiSans VF Bold" pitchFamily="2" charset="-122"/>
-                <a:ea typeface="MiSans VF Bold" pitchFamily="2" charset="-122"/>
-                <a:cs typeface="MiSans VF Bold" pitchFamily="2" charset="-122"/>
-                <a:sym typeface="SimHei"/>
-              </a:rPr>
-              <a:t>稀缺与不可逆是焊死的</a:t>
-            </a:r>
-            <a:endParaRPr lang="en-US" altLang="zh-CN" sz="4000" b="1" dirty="0">
-              <a:solidFill>
-                <a:srgbClr val="F7F7F5"/>
-              </a:solidFill>
-              <a:latin typeface="MiSans VF Bold" pitchFamily="2" charset="-122"/>
-              <a:ea typeface="MiSans VF Bold" pitchFamily="2" charset="-122"/>
-              <a:cs typeface="MiSans VF Bold" pitchFamily="2" charset="-122"/>
-              <a:sym typeface="SimHei"/>
-            </a:endParaRPr>
-          </a:p>
-        </p:txBody>
-      </p:sp>
-      <p:sp>
-        <p:nvSpPr>
-          <p:cNvPr id="8" name="文本框 7">
-            <a:extLst>
-              <a:ext uri="{FF2B5EF4-FFF2-40B4-BE49-F238E27FC236}">
-                <a16:creationId id="{8A149F76-CC94-F809-65B6-D65EF3ADEC81}"/>
-              </a:ext>
-            </a:extLst>
-          </p:cNvPr>
-          <p:cNvSpPr txBox="1"/>
-          <p:nvPr/>
-        </p:nvSpPr>
-        <p:spPr>
-          <a:xfrm>
-            <a:off x="524797" y="4189719"/>
-            <a:ext cx="3077045" cy="1754326"/>
-          </a:xfrm>
-          <a:prstGeom prst="rect">
-            <a:avLst/>
-          </a:prstGeom>
-          <a:noFill/>
-        </p:spPr>
-        <p:txBody>
-          <a:bodyPr wrap="square" lIns="0" tIns="0" rIns="0" bIns="0" anchor="b">
-            <a:spAutoFit/>
-          </a:bodyPr>
-          <a:lstStyle/>
-          <a:p>
-            <a:pPr>
-              <a:spcBef>
-                <a:spcPts val="1200"/>
-              </a:spcBef>
-              <a:defRPr/>
-            </a:pPr>
-            <a:r>
-              <a:rPr lang="zh-CN" altLang="en-US" sz="1200" dirty="0">
-                <a:solidFill>
-                  <a:srgbClr val="F7F7F5">
-                    <a:alpha val="80000"/>
-                  </a:srgbClr>
-                </a:solidFill>
-                <a:latin typeface="MiSans VF Light" pitchFamily="2" charset="-122"/>
-                <a:ea typeface="MiSans VF Light" pitchFamily="2" charset="-122"/>
-                <a:cs typeface="MiSans VF Light" pitchFamily="2" charset="-122"/>
-                <a:sym typeface="SimHei"/>
-              </a:rPr>
-              <a:t>撤掉稀缺就永远不饿，疤痕从不形成；撤掉不可逆，结构在撤除瞬间塌回均匀。</a:t>
-            </a:r>
-            <a:endParaRPr lang="en-US" altLang="zh-CN" sz="1200" dirty="0">
-              <a:solidFill>
-                <a:srgbClr val="F7F7F5">
-                  <a:alpha val="80000"/>
-                </a:srgbClr>
-              </a:solidFill>
-              <a:latin typeface="MiSans VF Light" pitchFamily="2" charset="-122"/>
-              <a:ea typeface="MiSans VF Light" pitchFamily="2" charset="-122"/>
-              <a:cs typeface="MiSans VF Light" pitchFamily="2" charset="-122"/>
-              <a:sym typeface="SimHei"/>
-            </a:endParaRPr>
-          </a:p>
-          <a:p>
-            <a:pPr>
-              <a:spcBef>
-                <a:spcPts val="1200"/>
-              </a:spcBef>
-              <a:defRPr/>
-            </a:pPr>
-            <a:r>
-              <a:rPr lang="zh-CN" altLang="en-US" sz="1200" dirty="0">
-                <a:solidFill>
-                  <a:srgbClr val="F7F7F5">
-                    <a:alpha val="80000"/>
-                  </a:srgbClr>
-                </a:solidFill>
-                <a:latin typeface="MiSans VF Light" pitchFamily="2" charset="-122"/>
-                <a:ea typeface="MiSans VF Light" pitchFamily="2" charset="-122"/>
-                <a:cs typeface="MiSans VF Light" pitchFamily="2" charset="-122"/>
-                <a:sym typeface="SimHei"/>
-              </a:rPr>
-              <a:t/>
-            </a:r>
-          </a:p>
-          <a:p>
-            <a:pPr>
-              <a:spcBef>
-                <a:spcPts val="1200"/>
-              </a:spcBef>
-              <a:defRPr/>
-            </a:pPr>
-            <a:r>
-              <a:rPr lang="zh-CN" altLang="en-US" sz="1200" dirty="0">
-                <a:solidFill>
-                  <a:srgbClr val="F7F7F5">
-                    <a:alpha val="80000"/>
-                  </a:srgbClr>
-                </a:solidFill>
-                <a:latin typeface="MiSans VF Light" pitchFamily="2" charset="-122"/>
-                <a:ea typeface="MiSans VF Light" pitchFamily="2" charset="-122"/>
-                <a:cs typeface="MiSans VF Light" pitchFamily="2" charset="-122"/>
-                <a:sym typeface="SimHei"/>
-              </a:rPr>
-              <a:t/>
-            </a:r>
-          </a:p>
-          <a:p>
-            <a:pPr>
-              <a:spcBef>
-                <a:spcPts val="1200"/>
-              </a:spcBef>
-              <a:defRPr/>
-            </a:pPr>
-            <a:r>
-              <a:rPr lang="zh-CN" altLang="en-US" sz="1200" dirty="0">
-                <a:solidFill>
-                  <a:srgbClr val="F7F7F5">
-                    <a:alpha val="80000"/>
-                  </a:srgbClr>
-                </a:solidFill>
-                <a:latin typeface="MiSans VF Light" pitchFamily="2" charset="-122"/>
-                <a:ea typeface="MiSans VF Light" pitchFamily="2" charset="-122"/>
-                <a:cs typeface="MiSans VF Light" pitchFamily="2" charset="-122"/>
-                <a:sym typeface="SimHei"/>
-              </a:rPr>
-              <a:t/>
-            </a:r>
-          </a:p>
-        </p:txBody>
-      </p:sp>
-      <p:graphicFrame>
-        <p:nvGraphicFramePr>
-          <p:cNvPr id="6" name="159">
-            <a:extLst>
-              <a:ext uri="{FF2B5EF4-FFF2-40B4-BE49-F238E27FC236}">
-                <a16:creationId id="{A52B4077-F662-D01B-7578-086FAB2FC4F4}"/>
-              </a:ext>
-            </a:extLst>
-          </p:cNvPr>
-          <p:cNvGraphicFramePr/>
-          <p:nvPr>
-            <p:extLst>
-              <p:ext uri="{D42A27DB-BD31-4B8C-83A1-F6EECF244321}">
-                <p14:modId val="1740418208"/>
-              </p:ext>
-            </p:extLst>
-          </p:nvPr>
-        </p:nvGraphicFramePr>
-        <p:xfrm>
-          <a:off x="5016648" y="2319645"/>
-          <a:ext cx="6716635" cy="3740148"/>
-        </p:xfrm>
-        <a:graphic>
-          <a:graphicData uri="http://schemas.openxmlformats.org/drawingml/2006/chart">
-            <c:chart r:id="rId2"/>
-          </a:graphicData>
-        </a:graphic>
-      </p:graphicFrame>
-    </p:spTree>
-    <p:extLst>
-      <p:ext uri="{BB962C8B-B14F-4D97-AF65-F5344CB8AC3E}">
-        <p14:creationId val="1785801108"/>
-      </p:ext>
-    </p:extLst>
-  </p:cSld>
-  <p:clrMapOvr>
-    <a:masterClrMapping/>
-  </p:clrMapOvr>
-</p:sld>
-</file>
-
-<file path=ppt/slides/slide14.xml><?xml version="1.0" encoding="utf-8"?>
-<p:sld xmlns:a="http://schemas.openxmlformats.org/drawingml/2006/main" xmlns:a16="http://schemas.microsoft.com/office/drawing/2014/main" xmlns:c="http://schemas.openxmlformats.org/drawingml/2006/chart" xmlns:p="http://schemas.openxmlformats.org/presentationml/2006/main" xmlns:p14="http://schemas.microsoft.com/office/powerpoint/2010/main" xmlns:r="http://schemas.openxmlformats.org/officeDocument/2006/relationships">
-  <p:cSld>
-    <p:bg>
-      <p:bgPr>
-        <a:solidFill>
-          <a:schemeClr val="tx1"/>
-        </a:solidFill>
-        <a:effectLst/>
-      </p:bgPr>
-    </p:bg>
-    <p:spTree>
-      <p:nvGrpSpPr>
-        <p:cNvPr id="1" name="">
-          <a:extLst>
-            <a:ext uri="{FF2B5EF4-FFF2-40B4-BE49-F238E27FC236}">
-              <a16:creationId id="{A212CB99-4CD3-B7C0-D0FF-2ADCD87CCB00}"/>
-            </a:ext>
-          </a:extLst>
-        </p:cNvPr>
-        <p:cNvGrpSpPr/>
-        <p:nvPr/>
-      </p:nvGrpSpPr>
-      <p:grpSpPr>
-        <a:xfrm>
-          <a:off x="0" y="0"/>
-          <a:ext cx="0" cy="0"/>
-          <a:chOff x="0" y="0"/>
-          <a:chExt cx="0" cy="0"/>
-        </a:xfrm>
-      </p:grpSpPr>
-      <p:grpSp>
-        <p:nvGrpSpPr>
-          <p:cNvPr id="2" name="组合 1">
-            <a:extLst>
-              <a:ext uri="{FF2B5EF4-FFF2-40B4-BE49-F238E27FC236}">
-                <a16:creationId id="{F96E250E-5D02-34BD-9AC5-3E06ACBDCF59}"/>
-              </a:ext>
-            </a:extLst>
-          </p:cNvPr>
-          <p:cNvGrpSpPr/>
-          <p:nvPr/>
-        </p:nvGrpSpPr>
-        <p:grpSpPr>
-          <a:xfrm>
-            <a:off x="524797" y="385358"/>
-            <a:ext cx="11208487" cy="141577"/>
-            <a:chOff x="524797" y="385358"/>
-            <a:chExt cx="11208487" cy="141577"/>
-          </a:xfrm>
-        </p:grpSpPr>
-        <p:sp>
-          <p:nvSpPr>
-            <p:cNvPr id="3" name="AutoShape 2">
-              <a:extLst>
-                <a:ext uri="{FF2B5EF4-FFF2-40B4-BE49-F238E27FC236}">
-                  <a16:creationId id="{ED4DF19A-246E-507F-9405-7B6814BF47A0}"/>
-                </a:ext>
-              </a:extLst>
-            </p:cNvPr>
-            <p:cNvSpPr/>
-            <p:nvPr/>
-          </p:nvSpPr>
-          <p:spPr>
-            <a:xfrm>
-              <a:off x="524797" y="385358"/>
-              <a:ext cx="3077046" cy="141577"/>
-            </a:xfrm>
-            <a:prstGeom prst="rect">
-              <a:avLst/>
-            </a:prstGeom>
-            <a:noFill/>
-            <a:ln w="16933" cap="flat" cmpd="sng">
-              <a:noFill/>
-              <a:prstDash val="solid"/>
-              <a:round/>
-            </a:ln>
-          </p:spPr>
-          <p:txBody>
-            <a:bodyPr vert="horz" wrap="square" lIns="0" tIns="0" rIns="0" bIns="0" rtlCol="0" anchor="t" anchorCtr="0">
-              <a:spAutoFit/>
-            </a:bodyPr>
-            <a:lstStyle/>
-            <a:p>
-              <a:pPr>
-                <a:lnSpc>
-                  <a:spcPct val="125000"/>
-                </a:lnSpc>
-                <a:defRPr/>
-              </a:pPr>
-              <a:r>
-                <a:rPr lang="en-US" sz="800" dirty="0">
-                  <a:solidFill>
-                    <a:srgbClr val="0B0B0C">
-                      <a:alpha val="50000"/>
-                    </a:srgbClr>
-                  </a:solidFill>
-                  <a:latin typeface="MiSans VF Light" pitchFamily="2" charset="-122"/>
-                  <a:ea typeface="MiSans VF Light" pitchFamily="2" charset="-122"/>
-                  <a:cs typeface="MiSans VF Light" pitchFamily="2" charset="-122"/>
-                  <a:sym typeface="JetBrains Mono"/>
-                </a:rPr>
-                <a:t/>
-              </a:r>
-              <a:r>
-                <a:rPr lang="zh-CN" altLang="en-US" sz="800" dirty="0">
-                  <a:solidFill>
-                    <a:srgbClr val="0B0B0C">
-                      <a:alpha val="50000"/>
-                    </a:srgbClr>
-                  </a:solidFill>
-                  <a:latin typeface="MiSans VF Light" pitchFamily="2" charset="-122"/>
-                  <a:ea typeface="MiSans VF Light" pitchFamily="2" charset="-122"/>
-                  <a:cs typeface="MiSans VF Light" pitchFamily="2" charset="-122"/>
-                  <a:sym typeface="JetBrains Mono"/>
-                </a:rPr>
-                <a:t/>
-              </a:r>
-              <a:r>
-                <a:rPr lang="en-US" altLang="zh-CN" sz="800" dirty="0">
-                  <a:solidFill>
-                    <a:srgbClr val="0B0B0C">
-                      <a:alpha val="50000"/>
-                    </a:srgbClr>
-                  </a:solidFill>
-                  <a:latin typeface="MiSans VF Light" pitchFamily="2" charset="-122"/>
-                  <a:ea typeface="MiSans VF Light" pitchFamily="2" charset="-122"/>
-                  <a:cs typeface="MiSans VF Light" pitchFamily="2" charset="-122"/>
-                  <a:sym typeface="JetBrains Mono"/>
-                </a:rPr>
-                <a:t/>
-              </a:r>
-              <a:endParaRPr lang="en-US" sz="800" dirty="0">
-                <a:solidFill>
-                  <a:srgbClr val="0B0B0C">
-                    <a:alpha val="50000"/>
-                  </a:srgbClr>
-                </a:solidFill>
-                <a:latin typeface="MiSans VF Light" pitchFamily="2" charset="-122"/>
-                <a:ea typeface="MiSans VF Light" pitchFamily="2" charset="-122"/>
-                <a:cs typeface="MiSans VF Light" pitchFamily="2" charset="-122"/>
-                <a:sym typeface="JetBrains Mono"/>
-              </a:endParaRPr>
-            </a:p>
-          </p:txBody>
-        </p:sp>
-        <p:sp>
-          <p:nvSpPr>
-            <p:cNvPr id="4" name="AutoShape 2">
-              <a:extLst>
-                <a:ext uri="{FF2B5EF4-FFF2-40B4-BE49-F238E27FC236}">
-                  <a16:creationId id="{06F2A5F3-2749-AF9C-5AAF-439D9448C6F1}"/>
-                </a:ext>
-              </a:extLst>
-            </p:cNvPr>
-            <p:cNvSpPr/>
-            <p:nvPr/>
-          </p:nvSpPr>
-          <p:spPr>
-            <a:xfrm>
-              <a:off x="5640314" y="385358"/>
-              <a:ext cx="911371" cy="141577"/>
-            </a:xfrm>
-            <a:prstGeom prst="rect">
-              <a:avLst/>
-            </a:prstGeom>
-            <a:noFill/>
-            <a:ln w="16933" cap="flat" cmpd="sng">
-              <a:noFill/>
-              <a:prstDash val="solid"/>
-              <a:round/>
-            </a:ln>
-          </p:spPr>
-          <p:txBody>
-            <a:bodyPr vert="horz" wrap="square" lIns="0" tIns="0" rIns="0" bIns="0" rtlCol="0" anchor="t" anchorCtr="0">
-              <a:spAutoFit/>
-            </a:bodyPr>
-            <a:lstStyle/>
-            <a:p>
-              <a:pPr algn="ctr">
-                <a:lnSpc>
-                  <a:spcPct val="125000"/>
-                </a:lnSpc>
-                <a:defRPr/>
-              </a:pPr>
-              <a:r>
-                <a:rPr lang="en-US" altLang="zh-CN" sz="800" dirty="0">
-                  <a:solidFill>
-                    <a:srgbClr val="0B0B0C">
-                      <a:alpha val="50000"/>
-                    </a:srgbClr>
-                  </a:solidFill>
-                  <a:latin typeface="MiSans VF Light" pitchFamily="2" charset="-122"/>
-                  <a:ea typeface="MiSans VF Light" pitchFamily="2" charset="-122"/>
-                  <a:cs typeface="MiSans VF Light" pitchFamily="2" charset="-122"/>
-                  <a:sym typeface="JetBrains Mono"/>
-                </a:rPr>
-                <a:t>2026</a:t>
-              </a:r>
-              <a:endParaRPr lang="en-US" sz="800" dirty="0">
-                <a:solidFill>
-                  <a:srgbClr val="0B0B0C">
-                    <a:alpha val="50000"/>
-                  </a:srgbClr>
-                </a:solidFill>
-                <a:latin typeface="MiSans VF Light" pitchFamily="2" charset="-122"/>
-                <a:ea typeface="MiSans VF Light" pitchFamily="2" charset="-122"/>
-                <a:cs typeface="MiSans VF Light" pitchFamily="2" charset="-122"/>
-              </a:endParaRPr>
-            </a:p>
-          </p:txBody>
-        </p:sp>
-        <p:sp>
-          <p:nvSpPr>
-            <p:cNvPr id="7" name="AutoShape 2">
-              <a:extLst>
-                <a:ext uri="{FF2B5EF4-FFF2-40B4-BE49-F238E27FC236}">
-                  <a16:creationId id="{ED63379F-3396-A36B-9520-BB0C1BED6BDD}"/>
-                </a:ext>
-              </a:extLst>
-            </p:cNvPr>
-            <p:cNvSpPr/>
-            <p:nvPr/>
-          </p:nvSpPr>
-          <p:spPr>
-            <a:xfrm>
-              <a:off x="8133284" y="385358"/>
-              <a:ext cx="3600000" cy="141577"/>
-            </a:xfrm>
-            <a:prstGeom prst="rect">
-              <a:avLst/>
-            </a:prstGeom>
-            <a:noFill/>
-            <a:ln w="16933" cap="flat" cmpd="sng">
-              <a:noFill/>
-              <a:prstDash val="solid"/>
-              <a:round/>
-            </a:ln>
-          </p:spPr>
-          <p:txBody>
-            <a:bodyPr vert="horz" wrap="square" lIns="0" tIns="0" rIns="0" bIns="0" rtlCol="0" anchor="t" anchorCtr="0">
-              <a:spAutoFit/>
-            </a:bodyPr>
-            <a:lstStyle/>
-            <a:p>
-              <a:pPr algn="r">
-                <a:lnSpc>
-                  <a:spcPct val="125000"/>
-                </a:lnSpc>
-                <a:defRPr/>
-              </a:pPr>
-              <a:r>
-                <a:rPr lang="en-US" sz="800" dirty="0">
-                  <a:solidFill>
-                    <a:srgbClr val="0B0B0C">
-                      <a:alpha val="50000"/>
-                    </a:srgbClr>
-                  </a:solidFill>
-                  <a:latin typeface="MiSans VF Light" pitchFamily="2" charset="-122"/>
-                  <a:ea typeface="MiSans VF Light" pitchFamily="2" charset="-122"/>
-                  <a:cs typeface="MiSans VF Light" pitchFamily="2" charset="-122"/>
-                  <a:sym typeface="JetBrains Mono"/>
-                </a:rPr>
-                <a:t/>
-              </a:r>
-              <a:endParaRPr lang="en-US" sz="800" dirty="0">
-                <a:solidFill>
-                  <a:srgbClr val="0B0B0C">
-                    <a:alpha val="50000"/>
-                  </a:srgbClr>
-                </a:solidFill>
-                <a:latin typeface="MiSans VF Light" pitchFamily="2" charset="-122"/>
-                <a:ea typeface="MiSans VF Light" pitchFamily="2" charset="-122"/>
-                <a:cs typeface="MiSans VF Light" pitchFamily="2" charset="-122"/>
-              </a:endParaRPr>
-            </a:p>
-          </p:txBody>
-        </p:sp>
-      </p:grpSp>
-      <p:sp>
-        <p:nvSpPr>
-          <p:cNvPr id="9" name="AutoShape 2">
-            <a:extLst>
-              <a:ext uri="{FF2B5EF4-FFF2-40B4-BE49-F238E27FC236}">
-                <a16:creationId id="{807EA64E-1BCB-6D94-702D-53897CBE125C}"/>
-              </a:ext>
-            </a:extLst>
-          </p:cNvPr>
-          <p:cNvSpPr/>
-          <p:nvPr/>
-        </p:nvSpPr>
-        <p:spPr>
-          <a:xfrm>
-            <a:off x="524797" y="6295670"/>
-            <a:ext cx="3077046" cy="141577"/>
-          </a:xfrm>
-          <a:prstGeom prst="rect">
-            <a:avLst/>
-          </a:prstGeom>
-          <a:noFill/>
-          <a:ln w="16933" cap="flat" cmpd="sng">
-            <a:noFill/>
-            <a:prstDash val="solid"/>
-            <a:round/>
-          </a:ln>
-        </p:spPr>
-        <p:txBody>
-          <a:bodyPr vert="horz" wrap="square" lIns="0" tIns="0" rIns="0" bIns="0" rtlCol="0" anchor="t" anchorCtr="0">
-            <a:spAutoFit/>
-          </a:bodyPr>
-          <a:lstStyle/>
-          <a:p>
-            <a:pPr>
-              <a:lnSpc>
-                <a:spcPct val="125000"/>
-              </a:lnSpc>
-              <a:defRPr/>
-            </a:pPr>
-            <a:r>
-              <a:rPr lang="en-US" altLang="zh-CN" sz="800" dirty="0">
-                <a:solidFill>
-                  <a:srgbClr val="0B0B0C">
-                    <a:alpha val="50000"/>
-                  </a:srgbClr>
-                </a:solidFill>
-                <a:latin typeface="MiSans VF Light" pitchFamily="2" charset="-122"/>
-                <a:ea typeface="MiSans VF Light" pitchFamily="2" charset="-122"/>
-                <a:cs typeface="MiSans VF Light" pitchFamily="2" charset="-122"/>
-                <a:sym typeface="JetBrains Mono"/>
-              </a:rPr>
-              <a:t/>
-            </a:r>
-            <a:endParaRPr lang="en-US" sz="800" dirty="0">
-              <a:solidFill>
-                <a:srgbClr val="0B0B0C">
-                  <a:alpha val="50000"/>
-                </a:srgbClr>
-              </a:solidFill>
-              <a:latin typeface="MiSans VF Light" pitchFamily="2" charset="-122"/>
-              <a:ea typeface="MiSans VF Light" pitchFamily="2" charset="-122"/>
-              <a:cs typeface="MiSans VF Light" pitchFamily="2" charset="-122"/>
-              <a:sym typeface="JetBrains Mono"/>
-            </a:endParaRPr>
-          </a:p>
-        </p:txBody>
-      </p:sp>
-      <p:sp>
-        <p:nvSpPr>
-          <p:cNvPr id="17" name="文本框 16">
-            <a:extLst>
-              <a:ext uri="{FF2B5EF4-FFF2-40B4-BE49-F238E27FC236}">
-                <a16:creationId id="{C4DEAFCA-42F4-470D-1383-2F8F2FD6F265}"/>
-              </a:ext>
-            </a:extLst>
-          </p:cNvPr>
-          <p:cNvSpPr txBox="1"/>
-          <p:nvPr/>
-        </p:nvSpPr>
-        <p:spPr>
-          <a:xfrm>
-            <a:off x="9765793" y="1206343"/>
-            <a:ext cx="1967492" cy="307777"/>
-          </a:xfrm>
-          <a:prstGeom prst="rect">
-            <a:avLst/>
-          </a:prstGeom>
-          <a:noFill/>
-        </p:spPr>
-        <p:txBody>
-          <a:bodyPr wrap="square">
-            <a:spAutoFit/>
-          </a:bodyPr>
-          <a:lstStyle/>
-          <a:p>
-            <a:pPr algn="r">
-              <a:defRPr/>
-            </a:pPr>
-            <a:r>
-              <a:rPr lang="en-US" altLang="zh-CN" b="1" i="1" dirty="0">
-                <a:solidFill>
-                  <a:srgbClr val="E62B1E"/>
-                </a:solidFill>
-                <a:latin typeface="Didot" panose="02000503000000020003" pitchFamily="2" charset="-79"/>
-                <a:ea typeface="MiSans VF Bold" pitchFamily="2" charset="-122"/>
-                <a:cs typeface="Didot" panose="02000503000000020003" pitchFamily="2" charset="-79"/>
-                <a:sym typeface="SimHei"/>
-              </a:rPr>
-              <a:t>FINDING 03</a:t>
-            </a:r>
-            <a:endParaRPr lang="en-US" altLang="zh-CN" sz="1400" b="1" i="1" u="none" strike="noStrike" dirty="0">
-              <a:solidFill>
-                <a:srgbClr val="E62B1E"/>
-              </a:solidFill>
-              <a:latin typeface="Didot" panose="02000503000000020003" pitchFamily="2" charset="-79"/>
-              <a:ea typeface="MiSans VF Bold" pitchFamily="2" charset="-122"/>
-              <a:cs typeface="Didot" panose="02000503000000020003" pitchFamily="2" charset="-79"/>
-              <a:sym typeface="SimHei"/>
-            </a:endParaRPr>
-          </a:p>
-        </p:txBody>
-      </p:sp>
-      <p:sp>
-        <p:nvSpPr>
-          <p:cNvPr id="5" name="AutoShape 5">
-            <a:extLst>
-              <a:ext uri="{FF2B5EF4-FFF2-40B4-BE49-F238E27FC236}">
-                <a16:creationId id="{CC22604E-A468-41F3-72E3-DDA249189E72}"/>
-              </a:ext>
-            </a:extLst>
-          </p:cNvPr>
-          <p:cNvSpPr/>
-          <p:nvPr/>
-        </p:nvSpPr>
-        <p:spPr>
-          <a:xfrm>
-            <a:off x="524799" y="1206344"/>
-            <a:ext cx="8938178" cy="615553"/>
-          </a:xfrm>
-          <a:prstGeom prst="rect">
-            <a:avLst/>
-          </a:prstGeom>
-          <a:noFill/>
-          <a:ln w="16933" cap="flat" cmpd="sng">
-            <a:noFill/>
-            <a:prstDash val="solid"/>
-            <a:round/>
-          </a:ln>
-        </p:spPr>
-        <p:txBody>
-          <a:bodyPr vert="horz" wrap="square" lIns="0" tIns="0" rIns="0" bIns="0" rtlCol="0" anchor="t" anchorCtr="0">
-            <a:spAutoFit/>
-          </a:bodyPr>
-          <a:lstStyle/>
-          <a:p>
-            <a:pPr>
-              <a:defRPr/>
-            </a:pPr>
-            <a:r>
-              <a:rPr lang="zh-CN" altLang="en-US" sz="4000" b="1" dirty="0">
-                <a:solidFill>
-                  <a:srgbClr val="0B0B0C"/>
-                </a:solidFill>
-                <a:latin typeface="MiSans VF Bold" pitchFamily="2" charset="-122"/>
-                <a:ea typeface="MiSans VF Bold" pitchFamily="2" charset="-122"/>
-                <a:cs typeface="MiSans VF Bold" pitchFamily="2" charset="-122"/>
-                <a:sym typeface="SimHei"/>
-              </a:rPr>
-              <a:t>结构有关键期，早给早撤优于全程</a:t>
-            </a:r>
-            <a:endParaRPr lang="en-US" altLang="zh-CN" sz="4000" b="1" dirty="0">
-              <a:solidFill>
-                <a:srgbClr val="0B0B0C"/>
-              </a:solidFill>
-              <a:latin typeface="MiSans VF Bold" pitchFamily="2" charset="-122"/>
-              <a:ea typeface="MiSans VF Bold" pitchFamily="2" charset="-122"/>
-              <a:cs typeface="MiSans VF Bold" pitchFamily="2" charset="-122"/>
-              <a:sym typeface="SimHei"/>
-            </a:endParaRPr>
-          </a:p>
-        </p:txBody>
-      </p:sp>
-      <p:sp>
-        <p:nvSpPr>
-          <p:cNvPr id="8" name="文本框 7">
-            <a:extLst>
-              <a:ext uri="{FF2B5EF4-FFF2-40B4-BE49-F238E27FC236}">
-                <a16:creationId id="{B146946D-2DB9-28AF-D3CB-159D5B7DC4B1}"/>
-              </a:ext>
-            </a:extLst>
-          </p:cNvPr>
-          <p:cNvSpPr txBox="1"/>
-          <p:nvPr/>
-        </p:nvSpPr>
-        <p:spPr>
-          <a:xfrm>
-            <a:off x="524797" y="4189719"/>
-            <a:ext cx="3077045" cy="1754326"/>
-          </a:xfrm>
-          <a:prstGeom prst="rect">
-            <a:avLst/>
-          </a:prstGeom>
-          <a:noFill/>
-        </p:spPr>
-        <p:txBody>
-          <a:bodyPr wrap="square" lIns="0" tIns="0" rIns="0" bIns="0" anchor="b">
-            <a:spAutoFit/>
-          </a:bodyPr>
-          <a:lstStyle/>
-          <a:p>
-            <a:pPr>
-              <a:spcBef>
-                <a:spcPts val="1200"/>
-              </a:spcBef>
-              <a:defRPr/>
-            </a:pPr>
-            <a:r>
-              <a:rPr lang="zh-CN" altLang="en-US" sz="1200" dirty="0">
-                <a:solidFill>
-                  <a:srgbClr val="0B0B0C">
-                    <a:alpha val="80000"/>
-                  </a:srgbClr>
-                </a:solidFill>
-                <a:latin typeface="MiSans VF Light" pitchFamily="2" charset="-122"/>
-                <a:ea typeface="MiSans VF Light" pitchFamily="2" charset="-122"/>
-                <a:cs typeface="MiSans VF Light" pitchFamily="2" charset="-122"/>
-                <a:sym typeface="SimHei"/>
-              </a:rPr>
-              <a:t>早期 0–150 拍引导后撤除，终态偏度 1.0933，强于全程施加的 0.8502。</a:t>
-            </a:r>
-            <a:endParaRPr lang="en-US" altLang="zh-CN" sz="1200" dirty="0">
-              <a:solidFill>
-                <a:srgbClr val="0B0B0C">
-                  <a:alpha val="80000"/>
-                </a:srgbClr>
-              </a:solidFill>
-              <a:latin typeface="MiSans VF Light" pitchFamily="2" charset="-122"/>
-              <a:ea typeface="MiSans VF Light" pitchFamily="2" charset="-122"/>
-              <a:cs typeface="MiSans VF Light" pitchFamily="2" charset="-122"/>
-              <a:sym typeface="SimHei"/>
-            </a:endParaRPr>
-          </a:p>
-          <a:p>
-            <a:pPr>
-              <a:spcBef>
-                <a:spcPts val="1200"/>
-              </a:spcBef>
-              <a:defRPr/>
-            </a:pPr>
-            <a:r>
-              <a:rPr lang="zh-CN" altLang="en-US" sz="1200" dirty="0">
-                <a:solidFill>
-                  <a:srgbClr val="0B0B0C">
-                    <a:alpha val="80000"/>
-                  </a:srgbClr>
-                </a:solidFill>
-                <a:latin typeface="MiSans VF Light" pitchFamily="2" charset="-122"/>
-                <a:ea typeface="MiSans VF Light" pitchFamily="2" charset="-122"/>
-                <a:cs typeface="MiSans VF Light" pitchFamily="2" charset="-122"/>
-                <a:sym typeface="SimHei"/>
-              </a:rPr>
-              <a:t/>
-            </a:r>
-          </a:p>
-          <a:p>
-            <a:pPr>
-              <a:spcBef>
-                <a:spcPts val="1200"/>
-              </a:spcBef>
-              <a:defRPr/>
-            </a:pPr>
-            <a:r>
-              <a:rPr lang="zh-CN" altLang="en-US" sz="1200" dirty="0">
-                <a:solidFill>
-                  <a:srgbClr val="0B0B0C">
-                    <a:alpha val="80000"/>
-                  </a:srgbClr>
-                </a:solidFill>
-                <a:latin typeface="MiSans VF Light" pitchFamily="2" charset="-122"/>
-                <a:ea typeface="MiSans VF Light" pitchFamily="2" charset="-122"/>
-                <a:cs typeface="MiSans VF Light" pitchFamily="2" charset="-122"/>
-                <a:sym typeface="SimHei"/>
-              </a:rPr>
-              <a:t/>
-            </a:r>
-          </a:p>
-          <a:p>
-            <a:pPr>
-              <a:spcBef>
-                <a:spcPts val="1200"/>
-              </a:spcBef>
-              <a:defRPr/>
-            </a:pPr>
-            <a:r>
-              <a:rPr lang="zh-CN" altLang="en-US" sz="1200" dirty="0">
-                <a:solidFill>
-                  <a:srgbClr val="0B0B0C">
-                    <a:alpha val="80000"/>
-                  </a:srgbClr>
-                </a:solidFill>
-                <a:latin typeface="MiSans VF Light" pitchFamily="2" charset="-122"/>
-                <a:ea typeface="MiSans VF Light" pitchFamily="2" charset="-122"/>
-                <a:cs typeface="MiSans VF Light" pitchFamily="2" charset="-122"/>
-                <a:sym typeface="SimHei"/>
-              </a:rPr>
-              <a:t/>
-            </a:r>
-          </a:p>
-        </p:txBody>
-      </p:sp>
-      <p:graphicFrame>
-        <p:nvGraphicFramePr>
-          <p:cNvPr id="6" name="159">
-            <a:extLst>
-              <a:ext uri="{FF2B5EF4-FFF2-40B4-BE49-F238E27FC236}">
-                <a16:creationId id="{555CAA42-4DEC-8405-036D-0ADC74683881}"/>
-              </a:ext>
-            </a:extLst>
-          </p:cNvPr>
-          <p:cNvGraphicFramePr/>
-          <p:nvPr>
-            <p:extLst>
-              <p:ext uri="{D42A27DB-BD31-4B8C-83A1-F6EECF244321}">
-                <p14:modId val="92227262"/>
-              </p:ext>
-            </p:extLst>
-          </p:nvPr>
-        </p:nvGraphicFramePr>
-        <p:xfrm>
-          <a:off x="5016648" y="2319645"/>
-          <a:ext cx="6716635" cy="3740148"/>
-        </p:xfrm>
-        <a:graphic>
-          <a:graphicData uri="http://schemas.openxmlformats.org/drawingml/2006/chart">
-            <c:chart r:id="rId2"/>
-          </a:graphicData>
-        </a:graphic>
-      </p:graphicFrame>
-    </p:spTree>
-    <p:extLst>
-      <p:ext uri="{BB962C8B-B14F-4D97-AF65-F5344CB8AC3E}">
-        <p14:creationId val="3777681054"/>
-      </p:ext>
-    </p:extLst>
-  </p:cSld>
-  <p:clrMapOvr>
-    <a:masterClrMapping/>
-  </p:clrMapOvr>
-</p:sld>
-</file>
-
-<file path=ppt/slides/slide15.xml><?xml version="1.0" encoding="utf-8"?>
+<file path=ppt/slides/slide12.xml><?xml version="1.0" encoding="utf-8"?>
 <p:sld xmlns:a="http://schemas.openxmlformats.org/drawingml/2006/main" xmlns:a14="http://schemas.microsoft.com/office/drawing/2010/main" xmlns:a16="http://schemas.microsoft.com/office/drawing/2014/main" xmlns:p="http://schemas.openxmlformats.org/presentationml/2006/main" xmlns:p14="http://schemas.microsoft.com/office/powerpoint/2010/main" xmlns:r="http://schemas.openxmlformats.org/officeDocument/2006/relationships">
   <p:cSld>
     <p:spTree>
@@ -19023,7 +18659,7 @@
                 <a:cs typeface="MiSans VF Light" pitchFamily="2" charset="-122"/>
                 <a:sym typeface="SimHei"/>
               </a:rPr>
-              <a:t>141 条带代码可复现的失败模式，53 份含被推翻预注册判据的实验报告。</a:t>
+              <a:t>247 条带代码可复现的失败模式，60 份含被推翻预注册判据的实验报告。</a:t>
             </a:r>
             <a:endParaRPr lang="en-US" altLang="zh-CN" sz="1200" dirty="0">
               <a:solidFill>
@@ -19056,7 +18692,7 @@
                 <a:cs typeface="MiSans VF Light" pitchFamily="2" charset="-122"/>
                 <a:sym typeface="SimHei"/>
               </a:rPr>
-              <a:t>三十秒就能编出一个可信的成功故事，但编不出 141 条带代码的失败记录。</a:t>
+              <a:t>三十秒就能编出一个可信的成功故事，但编不出 247 条带代码的失败记录。</a:t>
             </a:r>
           </a:p>
           <a:p>
@@ -19155,7 +18791,7 @@
 </p:sld>
 </file>
 
-<file path=ppt/slides/slide16.xml><?xml version="1.0" encoding="utf-8"?>
+<file path=ppt/slides/slide13.xml><?xml version="1.0" encoding="utf-8"?>
 <p:sld xmlns:a="http://schemas.openxmlformats.org/drawingml/2006/main" xmlns:a14="http://schemas.microsoft.com/office/drawing/2010/main" xmlns:a16="http://schemas.microsoft.com/office/drawing/2014/main" xmlns:p="http://schemas.openxmlformats.org/presentationml/2006/main" xmlns:p14="http://schemas.microsoft.com/office/powerpoint/2010/main" xmlns:r="http://schemas.openxmlformats.org/officeDocument/2006/relationships">
   <p:cSld>
     <p:spTree>
@@ -19620,15 +19256,15 @@
 </p:sld>
 </file>
 
-<file path=ppt/slides/slide17.xml><?xml version="1.0" encoding="utf-8"?>
-<p:sld xmlns:a="http://schemas.openxmlformats.org/drawingml/2006/main" xmlns:a14="http://schemas.microsoft.com/office/drawing/2010/main" xmlns:a16="http://schemas.microsoft.com/office/drawing/2014/main" xmlns:p="http://schemas.openxmlformats.org/presentationml/2006/main" xmlns:p14="http://schemas.microsoft.com/office/powerpoint/2010/main" xmlns:r="http://schemas.openxmlformats.org/officeDocument/2006/relationships">
+<file path=ppt/slides/slide14.xml><?xml version="1.0" encoding="utf-8"?>
+<p:sld xmlns:a="http://schemas.openxmlformats.org/drawingml/2006/main" xmlns:a16="http://schemas.microsoft.com/office/drawing/2014/main" xmlns:p="http://schemas.openxmlformats.org/presentationml/2006/main" xmlns:p14="http://schemas.microsoft.com/office/powerpoint/2010/main">
   <p:cSld>
     <p:spTree>
       <p:nvGrpSpPr>
         <p:cNvPr id="1" name="">
           <a:extLst>
             <a:ext uri="{FF2B5EF4-FFF2-40B4-BE49-F238E27FC236}">
-              <a16:creationId id="{0733E767-E071-1B3D-EC94-ACFA47081450}"/>
+              <a16:creationId id="{7349FDC5-FDF4-7FD2-780E-5EE89B8A1795}"/>
             </a:ext>
           </a:extLst>
         </p:cNvPr>
@@ -19645,10 +19281,464 @@
       </p:grpSpPr>
       <p:grpSp>
         <p:nvGrpSpPr>
+          <p:cNvPr id="73" name="组合 72">
+            <a:extLst>
+              <a:ext uri="{FF2B5EF4-FFF2-40B4-BE49-F238E27FC236}">
+                <a16:creationId id="{0EA2F5DE-0853-C193-C3CD-9D48178B25EC}"/>
+              </a:ext>
+            </a:extLst>
+          </p:cNvPr>
+          <p:cNvGrpSpPr/>
+          <p:nvPr/>
+        </p:nvGrpSpPr>
+        <p:grpSpPr>
+          <a:xfrm>
+            <a:off x="-239398" y="-1280369"/>
+            <a:ext cx="12667766" cy="9418738"/>
+            <a:chOff x="-239398" y="-1280369"/>
+            <a:chExt cx="12667766" cy="9418738"/>
+          </a:xfrm>
+        </p:grpSpPr>
+        <p:cxnSp>
+          <p:nvCxnSpPr>
+            <p:cNvPr id="33" name="直线连接符 32">
+              <a:extLst>
+                <a:ext uri="{FF2B5EF4-FFF2-40B4-BE49-F238E27FC236}">
+                  <a16:creationId id="{710FF954-B43A-BE19-3FD1-355DCC412BE8}"/>
+                </a:ext>
+              </a:extLst>
+            </p:cNvPr>
+            <p:cNvCxnSpPr>
+              <a:cxnSpLocks/>
+            </p:cNvCxnSpPr>
+            <p:nvPr/>
+          </p:nvCxnSpPr>
+          <p:spPr>
+            <a:xfrm>
+              <a:off x="11945342" y="-1280369"/>
+              <a:ext cx="19544" cy="9418738"/>
+            </a:xfrm>
+            <a:prstGeom prst="line">
+              <a:avLst/>
+            </a:prstGeom>
+            <a:ln w="6350" cmpd="sng">
+              <a:solidFill>
+                <a:srgbClr val="FF5A4D">
+                  <a:alpha val="20000"/>
+                </a:srgbClr>
+              </a:solidFill>
+              <a:prstDash val="solid"/>
+            </a:ln>
+          </p:spPr>
+          <p:style>
+            <a:lnRef idx="1">
+              <a:schemeClr val="accent1"/>
+            </a:lnRef>
+            <a:fillRef idx="0">
+              <a:schemeClr val="accent1"/>
+            </a:fillRef>
+            <a:effectRef idx="0">
+              <a:schemeClr val="accent1"/>
+            </a:effectRef>
+            <a:fontRef idx="minor">
+              <a:schemeClr val="tx1"/>
+            </a:fontRef>
+          </p:style>
+        </p:cxnSp>
+        <p:cxnSp>
+          <p:nvCxnSpPr>
+            <p:cNvPr id="37" name="直线连接符 36">
+              <a:extLst>
+                <a:ext uri="{FF2B5EF4-FFF2-40B4-BE49-F238E27FC236}">
+                  <a16:creationId id="{8A192D3D-B8CF-E04E-52E2-05F76B348CE8}"/>
+                </a:ext>
+              </a:extLst>
+            </p:cNvPr>
+            <p:cNvCxnSpPr>
+              <a:cxnSpLocks/>
+            </p:cNvCxnSpPr>
+            <p:nvPr/>
+          </p:nvCxnSpPr>
+          <p:spPr>
+            <a:xfrm>
+              <a:off x="243628" y="-1280369"/>
+              <a:ext cx="19544" cy="9418738"/>
+            </a:xfrm>
+            <a:prstGeom prst="line">
+              <a:avLst/>
+            </a:prstGeom>
+            <a:ln w="6350" cmpd="sng">
+              <a:solidFill>
+                <a:srgbClr val="FF5A4D">
+                  <a:alpha val="20000"/>
+                </a:srgbClr>
+              </a:solidFill>
+              <a:prstDash val="solid"/>
+            </a:ln>
+          </p:spPr>
+          <p:style>
+            <a:lnRef idx="1">
+              <a:schemeClr val="accent1"/>
+            </a:lnRef>
+            <a:fillRef idx="0">
+              <a:schemeClr val="accent1"/>
+            </a:fillRef>
+            <a:effectRef idx="0">
+              <a:schemeClr val="accent1"/>
+            </a:effectRef>
+            <a:fontRef idx="minor">
+              <a:schemeClr val="tx1"/>
+            </a:fontRef>
+          </p:style>
+        </p:cxnSp>
+        <p:cxnSp>
+          <p:nvCxnSpPr>
+            <p:cNvPr id="38" name="直线连接符 37">
+              <a:extLst>
+                <a:ext uri="{FF2B5EF4-FFF2-40B4-BE49-F238E27FC236}">
+                  <a16:creationId id="{2FB95525-E33D-A777-53F7-D923D18A8264}"/>
+                </a:ext>
+              </a:extLst>
+            </p:cNvPr>
+            <p:cNvCxnSpPr>
+              <a:cxnSpLocks/>
+            </p:cNvCxnSpPr>
+            <p:nvPr/>
+          </p:nvCxnSpPr>
+          <p:spPr>
+            <a:xfrm>
+              <a:off x="524797" y="385358"/>
+              <a:ext cx="0" cy="6082938"/>
+            </a:xfrm>
+            <a:prstGeom prst="line">
+              <a:avLst/>
+            </a:prstGeom>
+            <a:ln w="6350" cmpd="sng">
+              <a:solidFill>
+                <a:srgbClr val="FF5A4D">
+                  <a:alpha val="20000"/>
+                </a:srgbClr>
+              </a:solidFill>
+              <a:prstDash val="solid"/>
+            </a:ln>
+          </p:spPr>
+          <p:style>
+            <a:lnRef idx="1">
+              <a:schemeClr val="accent1"/>
+            </a:lnRef>
+            <a:fillRef idx="0">
+              <a:schemeClr val="accent1"/>
+            </a:fillRef>
+            <a:effectRef idx="0">
+              <a:schemeClr val="accent1"/>
+            </a:effectRef>
+            <a:fontRef idx="minor">
+              <a:schemeClr val="tx1"/>
+            </a:fontRef>
+          </p:style>
+        </p:cxnSp>
+        <p:cxnSp>
+          <p:nvCxnSpPr>
+            <p:cNvPr id="39" name="直线连接符 38">
+              <a:extLst>
+                <a:ext uri="{FF2B5EF4-FFF2-40B4-BE49-F238E27FC236}">
+                  <a16:creationId id="{5490951A-7D22-C497-E212-A791A8FEA45E}"/>
+                </a:ext>
+              </a:extLst>
+            </p:cNvPr>
+            <p:cNvCxnSpPr>
+              <a:cxnSpLocks/>
+            </p:cNvCxnSpPr>
+            <p:nvPr/>
+          </p:nvCxnSpPr>
+          <p:spPr>
+            <a:xfrm flipH="1">
+              <a:off x="-213761" y="6442064"/>
+              <a:ext cx="12642129" cy="26232"/>
+            </a:xfrm>
+            <a:prstGeom prst="line">
+              <a:avLst/>
+            </a:prstGeom>
+            <a:ln w="6350" cmpd="sng">
+              <a:solidFill>
+                <a:srgbClr val="FF5A4D">
+                  <a:alpha val="20000"/>
+                </a:srgbClr>
+              </a:solidFill>
+              <a:prstDash val="solid"/>
+            </a:ln>
+          </p:spPr>
+          <p:style>
+            <a:lnRef idx="1">
+              <a:schemeClr val="accent1"/>
+            </a:lnRef>
+            <a:fillRef idx="0">
+              <a:schemeClr val="accent1"/>
+            </a:fillRef>
+            <a:effectRef idx="0">
+              <a:schemeClr val="accent1"/>
+            </a:effectRef>
+            <a:fontRef idx="minor">
+              <a:schemeClr val="tx1"/>
+            </a:fontRef>
+          </p:style>
+        </p:cxnSp>
+        <p:cxnSp>
+          <p:nvCxnSpPr>
+            <p:cNvPr id="40" name="直线连接符 39">
+              <a:extLst>
+                <a:ext uri="{FF2B5EF4-FFF2-40B4-BE49-F238E27FC236}">
+                  <a16:creationId id="{28A931E2-CCF1-A8EC-F133-DE46BC4603AB}"/>
+                </a:ext>
+              </a:extLst>
+            </p:cNvPr>
+            <p:cNvCxnSpPr>
+              <a:cxnSpLocks/>
+            </p:cNvCxnSpPr>
+            <p:nvPr/>
+          </p:nvCxnSpPr>
+          <p:spPr>
+            <a:xfrm flipH="1">
+              <a:off x="-239398" y="359072"/>
+              <a:ext cx="12667766" cy="26286"/>
+            </a:xfrm>
+            <a:prstGeom prst="line">
+              <a:avLst/>
+            </a:prstGeom>
+            <a:ln w="6350" cmpd="sng">
+              <a:solidFill>
+                <a:srgbClr val="FF5A4D">
+                  <a:alpha val="20000"/>
+                </a:srgbClr>
+              </a:solidFill>
+              <a:prstDash val="solid"/>
+            </a:ln>
+          </p:spPr>
+          <p:style>
+            <a:lnRef idx="1">
+              <a:schemeClr val="accent1"/>
+            </a:lnRef>
+            <a:fillRef idx="0">
+              <a:schemeClr val="accent1"/>
+            </a:fillRef>
+            <a:effectRef idx="0">
+              <a:schemeClr val="accent1"/>
+            </a:effectRef>
+            <a:fontRef idx="minor">
+              <a:schemeClr val="tx1"/>
+            </a:fontRef>
+          </p:style>
+        </p:cxnSp>
+        <p:cxnSp>
+          <p:nvCxnSpPr>
+            <p:cNvPr id="61" name="直线连接符 60">
+              <a:extLst>
+                <a:ext uri="{FF2B5EF4-FFF2-40B4-BE49-F238E27FC236}">
+                  <a16:creationId id="{3DF79375-123D-8DC5-BDDB-E9333B501C76}"/>
+                </a:ext>
+              </a:extLst>
+            </p:cNvPr>
+            <p:cNvCxnSpPr>
+              <a:cxnSpLocks/>
+            </p:cNvCxnSpPr>
+            <p:nvPr/>
+          </p:nvCxnSpPr>
+          <p:spPr>
+            <a:xfrm>
+              <a:off x="6074941" y="-1280369"/>
+              <a:ext cx="19544" cy="9418738"/>
+            </a:xfrm>
+            <a:prstGeom prst="line">
+              <a:avLst/>
+            </a:prstGeom>
+            <a:ln w="6350" cmpd="sng">
+              <a:solidFill>
+                <a:srgbClr val="FF5A4D">
+                  <a:alpha val="20000"/>
+                </a:srgbClr>
+              </a:solidFill>
+              <a:prstDash val="solid"/>
+            </a:ln>
+          </p:spPr>
+          <p:style>
+            <a:lnRef idx="1">
+              <a:schemeClr val="accent1"/>
+            </a:lnRef>
+            <a:fillRef idx="0">
+              <a:schemeClr val="accent1"/>
+            </a:fillRef>
+            <a:effectRef idx="0">
+              <a:schemeClr val="accent1"/>
+            </a:effectRef>
+            <a:fontRef idx="minor">
+              <a:schemeClr val="tx1"/>
+            </a:fontRef>
+          </p:style>
+        </p:cxnSp>
+        <p:cxnSp>
+          <p:nvCxnSpPr>
+            <p:cNvPr id="70" name="直线连接符 69">
+              <a:extLst>
+                <a:ext uri="{FF2B5EF4-FFF2-40B4-BE49-F238E27FC236}">
+                  <a16:creationId id="{A274FC72-51A4-2C18-9663-6EB86BD49650}"/>
+                </a:ext>
+              </a:extLst>
+            </p:cNvPr>
+            <p:cNvCxnSpPr>
+              <a:cxnSpLocks/>
+            </p:cNvCxnSpPr>
+            <p:nvPr/>
+          </p:nvCxnSpPr>
+          <p:spPr>
+            <a:xfrm>
+              <a:off x="11733284" y="359233"/>
+              <a:ext cx="0" cy="6082938"/>
+            </a:xfrm>
+            <a:prstGeom prst="line">
+              <a:avLst/>
+            </a:prstGeom>
+            <a:ln w="6350" cmpd="sng">
+              <a:solidFill>
+                <a:srgbClr val="FF5A4D">
+                  <a:alpha val="20000"/>
+                </a:srgbClr>
+              </a:solidFill>
+              <a:prstDash val="solid"/>
+            </a:ln>
+          </p:spPr>
+          <p:style>
+            <a:lnRef idx="1">
+              <a:schemeClr val="accent1"/>
+            </a:lnRef>
+            <a:fillRef idx="0">
+              <a:schemeClr val="accent1"/>
+            </a:fillRef>
+            <a:effectRef idx="0">
+              <a:schemeClr val="accent1"/>
+            </a:effectRef>
+            <a:fontRef idx="minor">
+              <a:schemeClr val="tx1"/>
+            </a:fontRef>
+          </p:style>
+        </p:cxnSp>
+        <p:cxnSp>
+          <p:nvCxnSpPr>
+            <p:cNvPr id="72" name="直线连接符 71">
+              <a:extLst>
+                <a:ext uri="{FF2B5EF4-FFF2-40B4-BE49-F238E27FC236}">
+                  <a16:creationId id="{C61EC69F-3F8F-B7B4-0417-F2A8DA49E1A4}"/>
+                </a:ext>
+              </a:extLst>
+            </p:cNvPr>
+            <p:cNvCxnSpPr>
+              <a:cxnSpLocks/>
+            </p:cNvCxnSpPr>
+            <p:nvPr/>
+          </p:nvCxnSpPr>
+          <p:spPr>
+            <a:xfrm flipH="1">
+              <a:off x="-239398" y="3426122"/>
+              <a:ext cx="12667766" cy="26286"/>
+            </a:xfrm>
+            <a:prstGeom prst="line">
+              <a:avLst/>
+            </a:prstGeom>
+            <a:ln w="6350" cmpd="sng">
+              <a:solidFill>
+                <a:srgbClr val="FF5A4D">
+                  <a:alpha val="20000"/>
+                </a:srgbClr>
+              </a:solidFill>
+              <a:prstDash val="solid"/>
+            </a:ln>
+          </p:spPr>
+          <p:style>
+            <a:lnRef idx="1">
+              <a:schemeClr val="accent1"/>
+            </a:lnRef>
+            <a:fillRef idx="0">
+              <a:schemeClr val="accent1"/>
+            </a:fillRef>
+            <a:effectRef idx="0">
+              <a:schemeClr val="accent1"/>
+            </a:effectRef>
+            <a:fontRef idx="minor">
+              <a:schemeClr val="tx1"/>
+            </a:fontRef>
+          </p:style>
+        </p:cxnSp>
+      </p:grpSp>
+      <p:sp>
+        <p:nvSpPr>
+          <p:cNvPr id="17" name="AutoShape 2">
+            <a:extLst>
+              <a:ext uri="{FF2B5EF4-FFF2-40B4-BE49-F238E27FC236}">
+                <a16:creationId id="{085295BA-ABF1-D39D-B79C-76D7BB6F58C7}"/>
+              </a:ext>
+            </a:extLst>
+          </p:cNvPr>
+          <p:cNvSpPr/>
+          <p:nvPr/>
+        </p:nvSpPr>
+        <p:spPr>
+          <a:xfrm>
+            <a:off x="524799" y="4577497"/>
+            <a:ext cx="11208479" cy="897682"/>
+          </a:xfrm>
+          <a:prstGeom prst="roundRect">
+            <a:avLst>
+              <a:gd name="adj" fmla="val 0"/>
+            </a:avLst>
+          </a:prstGeom>
+          <a:noFill/>
+          <a:ln w="25400" cap="flat" cmpd="sng">
+            <a:noFill/>
+            <a:prstDash val="solid"/>
+            <a:round/>
+          </a:ln>
+        </p:spPr>
+        <p:txBody>
+          <a:bodyPr vert="horz" wrap="square" lIns="0" tIns="0" rIns="0" bIns="0" rtlCol="0" anchor="b" anchorCtr="0">
+            <a:spAutoFit/>
+          </a:bodyPr>
+          <a:lstStyle/>
+          <a:p>
+            <a:pPr>
+              <a:lnSpc>
+                <a:spcPts val="7000"/>
+              </a:lnSpc>
+              <a:defRPr/>
+            </a:pPr>
+            <a:r>
+              <a:rPr lang="zh-CN" altLang="en-US" sz="6200" b="1" dirty="0">
+                <a:solidFill>
+                  <a:srgbClr val="FF2B20"/>
+                </a:solidFill>
+                <a:latin typeface="MiSans VF Bold" pitchFamily="2" charset="-122"/>
+                <a:ea typeface="MiSans VF Bold" pitchFamily="2" charset="-122"/>
+                <a:cs typeface="MiSans VF Bold" pitchFamily="2" charset="-122"/>
+                <a:sym typeface="ChillYunmoGothicBold"/>
+              </a:rPr>
+              <a:t>谢谢</a:t>
+            </a:r>
+            <a:endParaRPr lang="en-US" altLang="zh-CN" sz="6200" dirty="0">
+              <a:solidFill>
+                <a:srgbClr val="F7F7F5"/>
+              </a:solidFill>
+              <a:latin typeface="MiSans VF ExtraLight" pitchFamily="2" charset="-122"/>
+              <a:ea typeface="MiSans VF ExtraLight" pitchFamily="2" charset="-122"/>
+              <a:cs typeface="MiSans VF ExtraLight" pitchFamily="2" charset="-122"/>
+              <a:sym typeface="ChillYunmoGothicBold"/>
+            </a:endParaRPr>
+          </a:p>
+        </p:txBody>
+      </p:sp>
+      <p:grpSp>
+        <p:nvGrpSpPr>
           <p:cNvPr id="2" name="组合 1">
             <a:extLst>
               <a:ext uri="{FF2B5EF4-FFF2-40B4-BE49-F238E27FC236}">
-                <a16:creationId id="{C3074BD4-4DDE-D321-F1A9-EEF8FF1A076C}"/>
+                <a16:creationId id="{257ACB28-3EED-3F65-E9BE-2B42F329609E}"/>
               </a:ext>
             </a:extLst>
           </p:cNvPr>
@@ -19668,7 +19758,7 @@
             <p:cNvPr id="3" name="AutoShape 2">
               <a:extLst>
                 <a:ext uri="{FF2B5EF4-FFF2-40B4-BE49-F238E27FC236}">
-                  <a16:creationId id="{1B9905FF-442A-A874-54EB-EF8955B48884}"/>
+                  <a16:creationId id="{F431B32F-9C1F-4103-F9F6-2350B5AC7C03}"/>
                 </a:ext>
               </a:extLst>
             </p:cNvPr>
@@ -19705,13 +19795,11 @@
               <a:r>
                 <a:rPr lang="en-US" sz="800" dirty="0">
                   <a:solidFill>
-                    <a:srgbClr val="F7F7F5">
-                      <a:alpha val="50000"/>
-                    </a:srgbClr>
+                    <a:srgbClr val="FF2B20"/>
                   </a:solidFill>
-                  <a:latin typeface="MiSans VF Light" pitchFamily="2" charset="-122"/>
-                  <a:ea typeface="MiSans VF Light" pitchFamily="2" charset="-122"/>
-                  <a:cs typeface="MiSans VF Light" pitchFamily="2" charset="-122"/>
+                  <a:latin typeface="MiSans VF Demibold" pitchFamily="2" charset="-122"/>
+                  <a:ea typeface="MiSans VF Demibold" pitchFamily="2" charset="-122"/>
+                  <a:cs typeface="MiSans VF Demibold" pitchFamily="2" charset="-122"/>
                   <a:sym typeface="JetBrains Mono"/>
                 </a:rPr>
                 <a:t/>
@@ -19719,13 +19807,11 @@
               <a:r>
                 <a:rPr lang="zh-CN" altLang="en-US" sz="800" dirty="0">
                   <a:solidFill>
-                    <a:srgbClr val="F7F7F5">
-                      <a:alpha val="50000"/>
-                    </a:srgbClr>
+                    <a:srgbClr val="FF2B20"/>
                   </a:solidFill>
-                  <a:latin typeface="MiSans VF Light" pitchFamily="2" charset="-122"/>
-                  <a:ea typeface="MiSans VF Light" pitchFamily="2" charset="-122"/>
-                  <a:cs typeface="MiSans VF Light" pitchFamily="2" charset="-122"/>
+                  <a:latin typeface="MiSans VF Demibold" pitchFamily="2" charset="-122"/>
+                  <a:ea typeface="MiSans VF Demibold" pitchFamily="2" charset="-122"/>
+                  <a:cs typeface="MiSans VF Demibold" pitchFamily="2" charset="-122"/>
                   <a:sym typeface="JetBrains Mono"/>
                 </a:rPr>
                 <a:t/>
@@ -19733,26 +19819,22 @@
               <a:r>
                 <a:rPr lang="en-US" altLang="zh-CN" sz="800" dirty="0">
                   <a:solidFill>
-                    <a:srgbClr val="F7F7F5">
-                      <a:alpha val="50000"/>
-                    </a:srgbClr>
+                    <a:srgbClr val="FF2B20"/>
                   </a:solidFill>
-                  <a:latin typeface="MiSans VF Light" pitchFamily="2" charset="-122"/>
-                  <a:ea typeface="MiSans VF Light" pitchFamily="2" charset="-122"/>
-                  <a:cs typeface="MiSans VF Light" pitchFamily="2" charset="-122"/>
+                  <a:latin typeface="MiSans VF Demibold" pitchFamily="2" charset="-122"/>
+                  <a:ea typeface="MiSans VF Demibold" pitchFamily="2" charset="-122"/>
+                  <a:cs typeface="MiSans VF Demibold" pitchFamily="2" charset="-122"/>
                   <a:sym typeface="JetBrains Mono"/>
                 </a:rPr>
                 <a:t/>
               </a:r>
               <a:endParaRPr lang="en-US" sz="800" dirty="0">
                 <a:solidFill>
-                  <a:srgbClr val="F7F7F5">
-                    <a:alpha val="50000"/>
-                  </a:srgbClr>
+                  <a:srgbClr val="FF2B20"/>
                 </a:solidFill>
-                <a:latin typeface="MiSans VF Light" pitchFamily="2" charset="-122"/>
-                <a:ea typeface="MiSans VF Light" pitchFamily="2" charset="-122"/>
-                <a:cs typeface="MiSans VF Light" pitchFamily="2" charset="-122"/>
+                <a:latin typeface="MiSans VF Demibold" pitchFamily="2" charset="-122"/>
+                <a:ea typeface="MiSans VF Demibold" pitchFamily="2" charset="-122"/>
+                <a:cs typeface="MiSans VF Demibold" pitchFamily="2" charset="-122"/>
                 <a:sym typeface="JetBrains Mono"/>
               </a:endParaRPr>
             </a:p>
@@ -19763,7 +19845,7 @@
             <p:cNvPr id="4" name="AutoShape 2">
               <a:extLst>
                 <a:ext uri="{FF2B5EF4-FFF2-40B4-BE49-F238E27FC236}">
-                  <a16:creationId id="{4E0A8210-1F5D-A3C2-8882-FAAD17F19456}"/>
+                  <a16:creationId id="{6DC2AEBD-02CA-4EC1-3D3D-04B1C782DEE1}"/>
                 </a:ext>
               </a:extLst>
             </p:cNvPr>
@@ -19800,36 +19882,32 @@
               <a:r>
                 <a:rPr lang="en-US" altLang="zh-CN" sz="800" dirty="0">
                   <a:solidFill>
-                    <a:srgbClr val="F7F7F5">
-                      <a:alpha val="50000"/>
-                    </a:srgbClr>
+                    <a:srgbClr val="FF2B20"/>
                   </a:solidFill>
-                  <a:latin typeface="MiSans VF Light" pitchFamily="2" charset="-122"/>
-                  <a:ea typeface="MiSans VF Light" pitchFamily="2" charset="-122"/>
-                  <a:cs typeface="MiSans VF Light" pitchFamily="2" charset="-122"/>
+                  <a:latin typeface="MiSans VF Demibold" pitchFamily="2" charset="-122"/>
+                  <a:ea typeface="MiSans VF Demibold" pitchFamily="2" charset="-122"/>
+                  <a:cs typeface="MiSans VF Demibold" pitchFamily="2" charset="-122"/>
                   <a:sym typeface="JetBrains Mono"/>
                 </a:rPr>
                 <a:t>2026</a:t>
               </a:r>
               <a:endParaRPr lang="en-US" sz="800" dirty="0">
                 <a:solidFill>
-                  <a:srgbClr val="F7F7F5">
-                    <a:alpha val="50000"/>
-                  </a:srgbClr>
+                  <a:srgbClr val="FF2B20"/>
                 </a:solidFill>
-                <a:latin typeface="MiSans VF Light" pitchFamily="2" charset="-122"/>
-                <a:ea typeface="MiSans VF Light" pitchFamily="2" charset="-122"/>
-                <a:cs typeface="MiSans VF Light" pitchFamily="2" charset="-122"/>
+                <a:latin typeface="MiSans VF Demibold" pitchFamily="2" charset="-122"/>
+                <a:ea typeface="MiSans VF Demibold" pitchFamily="2" charset="-122"/>
+                <a:cs typeface="MiSans VF Demibold" pitchFamily="2" charset="-122"/>
               </a:endParaRPr>
             </a:p>
           </p:txBody>
         </p:sp>
         <p:sp>
           <p:nvSpPr>
-            <p:cNvPr id="7" name="AutoShape 2">
+            <p:cNvPr id="5" name="AutoShape 2">
               <a:extLst>
                 <a:ext uri="{FF2B5EF4-FFF2-40B4-BE49-F238E27FC236}">
-                  <a16:creationId id="{31A8279E-4031-98DF-4AE0-0FD294CB1063}"/>
+                  <a16:creationId id="{F9DE4BDF-B21D-76D5-1E11-5F37DD1FCEE5}"/>
                 </a:ext>
               </a:extLst>
             </p:cNvPr>
@@ -19866,26 +19944,22 @@
               <a:r>
                 <a:rPr lang="en-US" sz="800" dirty="0">
                   <a:solidFill>
-                    <a:srgbClr val="F7F7F5">
-                      <a:alpha val="50000"/>
-                    </a:srgbClr>
+                    <a:srgbClr val="FF2B20"/>
                   </a:solidFill>
-                  <a:latin typeface="MiSans VF Light" pitchFamily="2" charset="-122"/>
-                  <a:ea typeface="MiSans VF Light" pitchFamily="2" charset="-122"/>
-                  <a:cs typeface="MiSans VF Light" pitchFamily="2" charset="-122"/>
+                  <a:latin typeface="MiSans VF Demibold" pitchFamily="2" charset="-122"/>
+                  <a:ea typeface="MiSans VF Demibold" pitchFamily="2" charset="-122"/>
+                  <a:cs typeface="MiSans VF Demibold" pitchFamily="2" charset="-122"/>
                   <a:sym typeface="JetBrains Mono"/>
                 </a:rPr>
-                <a:t/>
+                <a:t>COVER</a:t>
               </a:r>
               <a:endParaRPr lang="en-US" sz="800" dirty="0">
                 <a:solidFill>
-                  <a:srgbClr val="F7F7F5">
-                    <a:alpha val="50000"/>
-                  </a:srgbClr>
+                  <a:srgbClr val="FF2B20"/>
                 </a:solidFill>
-                <a:latin typeface="MiSans VF Light" pitchFamily="2" charset="-122"/>
-                <a:ea typeface="MiSans VF Light" pitchFamily="2" charset="-122"/>
-                <a:cs typeface="MiSans VF Light" pitchFamily="2" charset="-122"/>
+                <a:latin typeface="MiSans VF Demibold" pitchFamily="2" charset="-122"/>
+                <a:ea typeface="MiSans VF Demibold" pitchFamily="2" charset="-122"/>
+                <a:cs typeface="MiSans VF Demibold" pitchFamily="2" charset="-122"/>
               </a:endParaRPr>
             </a:p>
           </p:txBody>
@@ -19893,10 +19967,10 @@
       </p:grpSp>
       <p:sp>
         <p:nvSpPr>
-          <p:cNvPr id="9" name="AutoShape 2">
+          <p:cNvPr id="6" name="AutoShape 2">
             <a:extLst>
               <a:ext uri="{FF2B5EF4-FFF2-40B4-BE49-F238E27FC236}">
-                <a16:creationId id="{91770C30-0C43-023C-43F7-CBBF6EB7E9F3}"/>
+                <a16:creationId id="{E287DB41-1152-A4A0-E7BC-F8935D74AE4A}"/>
               </a:ext>
             </a:extLst>
           </p:cNvPr>
@@ -19905,516 +19979,100 @@
         </p:nvSpPr>
         <p:spPr>
           <a:xfrm>
-            <a:off x="524797" y="6295670"/>
-            <a:ext cx="3077046" cy="141577"/>
+            <a:off x="524799" y="5504402"/>
+            <a:ext cx="11208479" cy="897682"/>
           </a:xfrm>
-          <a:prstGeom prst="rect">
-            <a:avLst/>
+          <a:prstGeom prst="roundRect">
+            <a:avLst>
+              <a:gd name="adj" fmla="val 0"/>
+            </a:avLst>
           </a:prstGeom>
           <a:noFill/>
-          <a:ln w="16933" cap="flat" cmpd="sng">
+          <a:ln w="25400" cap="flat" cmpd="sng">
             <a:noFill/>
             <a:prstDash val="solid"/>
             <a:round/>
           </a:ln>
         </p:spPr>
         <p:txBody>
-          <a:bodyPr vert="horz" wrap="square" lIns="0" tIns="0" rIns="0" bIns="0" rtlCol="0" anchor="t" anchorCtr="0">
+          <a:bodyPr vert="horz" wrap="square" lIns="0" tIns="0" rIns="0" bIns="0" rtlCol="0" anchor="b" anchorCtr="0">
             <a:spAutoFit/>
           </a:bodyPr>
           <a:lstStyle/>
           <a:p>
             <a:pPr>
               <a:lnSpc>
-                <a:spcPct val="125000"/>
+                <a:spcPts val="7000"/>
               </a:lnSpc>
               <a:defRPr/>
             </a:pPr>
             <a:r>
-              <a:rPr lang="en-US" altLang="zh-CN" sz="800" dirty="0">
+              <a:rPr lang="en-US" altLang="zh-CN" sz="6200" dirty="0">
                 <a:solidFill>
-                  <a:srgbClr val="F7F7F5">
-                    <a:alpha val="50000"/>
-                  </a:srgbClr>
+                  <a:srgbClr val="F7F7F5"/>
                 </a:solidFill>
-                <a:latin typeface="MiSans VF Light" pitchFamily="2" charset="-122"/>
-                <a:ea typeface="MiSans VF Light" pitchFamily="2" charset="-122"/>
-                <a:cs typeface="MiSans VF Light" pitchFamily="2" charset="-122"/>
-                <a:sym typeface="JetBrains Mono"/>
+                <a:latin typeface="MiSans VF ExtraLight" pitchFamily="2" charset="-122"/>
+                <a:ea typeface="MiSans VF ExtraLight" pitchFamily="2" charset="-122"/>
+                <a:cs typeface="MiSans VF ExtraLight" pitchFamily="2" charset="-122"/>
+                <a:sym typeface="ChillYunmoGothicBold"/>
+              </a:rPr>
+              <a:t>THANKS</a:t>
+            </a:r>
+            <a:r>
+              <a:rPr lang="zh-CN" altLang="en-US" sz="6200" dirty="0">
+                <a:solidFill>
+                  <a:srgbClr val="F7F7F5"/>
+                </a:solidFill>
+                <a:latin typeface="MiSans VF ExtraLight" pitchFamily="2" charset="-122"/>
+                <a:ea typeface="MiSans VF ExtraLight" pitchFamily="2" charset="-122"/>
+                <a:cs typeface="MiSans VF ExtraLight" pitchFamily="2" charset="-122"/>
+                <a:sym typeface="ChillYunmoGothicBold"/>
               </a:rPr>
               <a:t/>
             </a:r>
-            <a:endParaRPr lang="en-US" sz="800" dirty="0">
-              <a:solidFill>
-                <a:srgbClr val="F7F7F5">
-                  <a:alpha val="50000"/>
-                </a:srgbClr>
-              </a:solidFill>
-              <a:latin typeface="MiSans VF Light" pitchFamily="2" charset="-122"/>
-              <a:ea typeface="MiSans VF Light" pitchFamily="2" charset="-122"/>
-              <a:cs typeface="MiSans VF Light" pitchFamily="2" charset="-122"/>
-              <a:sym typeface="JetBrains Mono"/>
-            </a:endParaRPr>
-          </a:p>
-        </p:txBody>
-      </p:sp>
-      <p:sp>
-        <p:nvSpPr>
-          <p:cNvPr id="17" name="文本框 16">
-            <a:extLst>
-              <a:ext uri="{FF2B5EF4-FFF2-40B4-BE49-F238E27FC236}">
-                <a16:creationId id="{7ECCDBCC-DA2E-2003-7153-CB77481A82CB}"/>
-              </a:ext>
-            </a:extLst>
-          </p:cNvPr>
-          <p:cNvSpPr txBox="1"/>
-          <p:nvPr/>
-        </p:nvSpPr>
-        <p:spPr>
-          <a:xfrm>
-            <a:off x="9765793" y="1206343"/>
-            <a:ext cx="1967492" cy="307777"/>
-          </a:xfrm>
-          <a:prstGeom prst="rect">
-            <a:avLst/>
-          </a:prstGeom>
-          <a:noFill/>
-        </p:spPr>
-        <p:txBody>
-          <a:bodyPr wrap="square">
-            <a:spAutoFit/>
-          </a:bodyPr>
-          <a:lstStyle/>
-          <a:p>
-            <a:pPr algn="r">
-              <a:defRPr/>
-            </a:pPr>
             <a:r>
-              <a:rPr lang="en-US" altLang="zh-CN" b="1" i="1" dirty="0">
-                <a:solidFill>
-                  <a:srgbClr val="FF2B20"/>
-                </a:solidFill>
-                <a:latin typeface="Didot" panose="02000503000000020003" pitchFamily="2" charset="-79"/>
-                <a:ea typeface="MiSans VF Bold" pitchFamily="2" charset="-122"/>
-                <a:cs typeface="Didot" panose="02000503000000020003" pitchFamily="2" charset="-79"/>
-                <a:sym typeface="SimHei"/>
-              </a:rPr>
-              <a:t>FINDING 01</a:t>
-            </a:r>
-            <a:endParaRPr lang="en-US" altLang="zh-CN" sz="1400" b="1" i="1" u="none" strike="noStrike" dirty="0">
-              <a:solidFill>
-                <a:srgbClr val="FF2B20"/>
-              </a:solidFill>
-              <a:latin typeface="Didot" panose="02000503000000020003" pitchFamily="2" charset="-79"/>
-              <a:ea typeface="MiSans VF Bold" pitchFamily="2" charset="-122"/>
-              <a:cs typeface="Didot" panose="02000503000000020003" pitchFamily="2" charset="-79"/>
-              <a:sym typeface="SimHei"/>
-            </a:endParaRPr>
-          </a:p>
-        </p:txBody>
-      </p:sp>
-      <p:sp>
-        <p:nvSpPr>
-          <p:cNvPr id="5" name="AutoShape 5">
-            <a:extLst>
-              <a:ext uri="{FF2B5EF4-FFF2-40B4-BE49-F238E27FC236}">
-                <a16:creationId id="{996F59E9-3AEC-AC0F-24B7-4432260900C8}"/>
-              </a:ext>
-            </a:extLst>
-          </p:cNvPr>
-          <p:cNvSpPr/>
-          <p:nvPr/>
-        </p:nvSpPr>
-        <p:spPr>
-          <a:xfrm>
-            <a:off x="524798" y="1206344"/>
-            <a:ext cx="9083225" cy="615553"/>
-          </a:xfrm>
-          <a:prstGeom prst="rect">
-            <a:avLst/>
-          </a:prstGeom>
-          <a:noFill/>
-          <a:ln w="16933" cap="flat" cmpd="sng">
-            <a:noFill/>
-            <a:prstDash val="solid"/>
-            <a:round/>
-          </a:ln>
-        </p:spPr>
-        <p:txBody>
-          <a:bodyPr vert="horz" wrap="square" lIns="0" tIns="0" rIns="0" bIns="0" rtlCol="0" anchor="t" anchorCtr="0">
-            <a:spAutoFit/>
-          </a:bodyPr>
-          <a:lstStyle/>
-          <a:p>
-            <a:pPr>
-              <a:defRPr/>
-            </a:pPr>
-            <a:r>
-              <a:rPr lang="zh-CN" altLang="en-US" sz="4000" b="1" dirty="0">
+              <a:rPr lang="en-US" altLang="zh-CN" sz="6200" dirty="0">
                 <a:solidFill>
                   <a:srgbClr val="F7F7F5"/>
                 </a:solidFill>
-                <a:latin typeface="MiSans VF Bold" pitchFamily="2" charset="-122"/>
-                <a:ea typeface="MiSans VF Bold" pitchFamily="2" charset="-122"/>
-                <a:cs typeface="MiSans VF Bold" pitchFamily="2" charset="-122"/>
-                <a:sym typeface="SimHei"/>
-              </a:rPr>
-              <a:t>关掉全部决策模块</a:t>
-            </a:r>
-            <a:r>
-              <a:rPr lang="zh-CN" altLang="en-US" sz="4000" b="1" dirty="0">
-                <a:solidFill>
-                  <a:srgbClr val="FF2B20"/>
-                </a:solidFill>
-                <a:latin typeface="MiSans VF Bold" pitchFamily="2" charset="-122"/>
-                <a:ea typeface="MiSans VF Bold" pitchFamily="2" charset="-122"/>
-                <a:cs typeface="MiSans VF Bold" pitchFamily="2" charset="-122"/>
-                <a:sym typeface="SimHei"/>
+                <a:latin typeface="MiSans VF ExtraLight" pitchFamily="2" charset="-122"/>
+                <a:ea typeface="MiSans VF ExtraLight" pitchFamily="2" charset="-122"/>
+                <a:cs typeface="MiSans VF ExtraLight" pitchFamily="2" charset="-122"/>
+                <a:sym typeface="ChillYunmoGothicBold"/>
               </a:rPr>
               <a:t/>
             </a:r>
-            <a:endParaRPr lang="en-US" altLang="zh-CN" sz="4000" b="1" dirty="0">
-              <a:solidFill>
-                <a:srgbClr val="FF2B20"/>
-              </a:solidFill>
-              <a:latin typeface="MiSans VF Bold" pitchFamily="2" charset="-122"/>
-              <a:ea typeface="MiSans VF Bold" pitchFamily="2" charset="-122"/>
-              <a:cs typeface="MiSans VF Bold" pitchFamily="2" charset="-122"/>
-              <a:sym typeface="SimHei"/>
-            </a:endParaRPr>
-          </a:p>
-        </p:txBody>
-      </p:sp>
-      <p:cxnSp>
-        <p:nvCxnSpPr>
-          <p:cNvPr id="10" name="直线连接符 9">
-            <a:extLst>
-              <a:ext uri="{FF2B5EF4-FFF2-40B4-BE49-F238E27FC236}">
-                <a16:creationId id="{2B827151-4276-74C6-9148-F54B8FA729DD}"/>
-              </a:ext>
-            </a:extLst>
-          </p:cNvPr>
-          <p:cNvCxnSpPr>
-            <a:cxnSpLocks/>
-          </p:cNvCxnSpPr>
-          <p:nvPr/>
-        </p:nvCxnSpPr>
-        <p:spPr>
-          <a:xfrm>
-            <a:off x="524799" y="2161018"/>
-            <a:ext cx="11208485" cy="0"/>
-          </a:xfrm>
-          <a:prstGeom prst="line">
-            <a:avLst/>
-          </a:prstGeom>
-          <a:ln>
-            <a:solidFill>
-              <a:srgbClr val="F7F7F5">
-                <a:alpha val="10000"/>
-              </a:srgbClr>
-            </a:solidFill>
-          </a:ln>
-        </p:spPr>
-        <p:style>
-          <a:lnRef idx="1">
-            <a:schemeClr val="accent1"/>
-          </a:lnRef>
-          <a:fillRef idx="0">
-            <a:schemeClr val="accent1"/>
-          </a:fillRef>
-          <a:effectRef idx="0">
-            <a:schemeClr val="accent1"/>
-          </a:effectRef>
-          <a:fontRef idx="minor">
-            <a:schemeClr val="tx1"/>
-          </a:fontRef>
-        </p:style>
-      </p:cxnSp>
-      <p:cxnSp>
-        <p:nvCxnSpPr>
-          <p:cNvPr id="13" name="直线连接符 12">
-            <a:extLst>
-              <a:ext uri="{FF2B5EF4-FFF2-40B4-BE49-F238E27FC236}">
-                <a16:creationId id="{06CEF79B-BDA5-B5C4-FDCC-21292344526C}"/>
-              </a:ext>
-            </a:extLst>
-          </p:cNvPr>
-          <p:cNvCxnSpPr>
-            <a:cxnSpLocks/>
-          </p:cNvCxnSpPr>
-          <p:nvPr/>
-        </p:nvCxnSpPr>
-        <p:spPr>
-          <a:xfrm>
-            <a:off x="6095999" y="2161018"/>
-            <a:ext cx="0" cy="3724494"/>
-          </a:xfrm>
-          <a:prstGeom prst="line">
-            <a:avLst/>
-          </a:prstGeom>
-          <a:ln>
-            <a:solidFill>
-              <a:srgbClr val="F7F7F5">
-                <a:alpha val="10000"/>
-              </a:srgbClr>
-            </a:solidFill>
-          </a:ln>
-        </p:spPr>
-        <p:style>
-          <a:lnRef idx="1">
-            <a:schemeClr val="accent1"/>
-          </a:lnRef>
-          <a:fillRef idx="0">
-            <a:schemeClr val="accent1"/>
-          </a:fillRef>
-          <a:effectRef idx="0">
-            <a:schemeClr val="accent1"/>
-          </a:effectRef>
-          <a:fontRef idx="minor">
-            <a:schemeClr val="tx1"/>
-          </a:fontRef>
-        </p:style>
-      </p:cxnSp>
-      <p:sp>
-        <p:nvSpPr>
-          <p:cNvPr id="20" name="AutoShape 5">
-            <a:extLst>
-              <a:ext uri="{FF2B5EF4-FFF2-40B4-BE49-F238E27FC236}">
-                <a16:creationId id="{A1DA29C7-D35A-DCF5-C758-3742317B3C92}"/>
-              </a:ext>
-            </a:extLst>
-          </p:cNvPr>
-          <p:cNvSpPr/>
-          <p:nvPr/>
-        </p:nvSpPr>
-        <p:spPr>
-          <a:xfrm>
-            <a:off x="524799" y="2532397"/>
-            <a:ext cx="4495436" cy="307777"/>
-          </a:xfrm>
-          <a:prstGeom prst="rect">
-            <a:avLst/>
-          </a:prstGeom>
-          <a:noFill/>
-          <a:ln w="16933" cap="flat" cmpd="sng">
-            <a:noFill/>
-            <a:prstDash val="solid"/>
-            <a:round/>
-          </a:ln>
-        </p:spPr>
-        <p:txBody>
-          <a:bodyPr vert="horz" wrap="square" lIns="0" tIns="0" rIns="0" bIns="0" rtlCol="0" anchor="t" anchorCtr="0">
-            <a:spAutoFit/>
-          </a:bodyPr>
-          <a:lstStyle/>
-          <a:p>
-            <a:pPr>
-              <a:defRPr/>
-            </a:pPr>
             <a:r>
-              <a:rPr lang="zh-CN" altLang="en-US" sz="2000" b="1" dirty="0">
+              <a:rPr lang="zh-CN" altLang="en-US" sz="6200" dirty="0">
                 <a:solidFill>
                   <a:srgbClr val="F7F7F5"/>
                 </a:solidFill>
-                <a:latin typeface="MiSans VF Bold" pitchFamily="2" charset="-122"/>
-                <a:ea typeface="MiSans VF Bold" pitchFamily="2" charset="-122"/>
-                <a:cs typeface="MiSans VF Bold" pitchFamily="2" charset="-122"/>
-                <a:sym typeface="SimHei"/>
+                <a:latin typeface="MiSans VF ExtraLight" pitchFamily="2" charset="-122"/>
+                <a:ea typeface="MiSans VF ExtraLight" pitchFamily="2" charset="-122"/>
+                <a:cs typeface="MiSans VF ExtraLight" pitchFamily="2" charset="-122"/>
+                <a:sym typeface="ChillYunmoGothicBold"/>
               </a:rPr>
-              <a:t>结构是被逼出来的</a:t>
+              <a:t/>
             </a:r>
-            <a:endParaRPr lang="en-US" altLang="zh-CN" sz="2000" b="1" dirty="0">
-              <a:solidFill>
-                <a:srgbClr val="F7F7F5"/>
-              </a:solidFill>
-              <a:latin typeface="MiSans VF Bold" pitchFamily="2" charset="-122"/>
-              <a:ea typeface="MiSans VF Bold" pitchFamily="2" charset="-122"/>
-              <a:cs typeface="MiSans VF Bold" pitchFamily="2" charset="-122"/>
-              <a:sym typeface="SimHei"/>
-            </a:endParaRPr>
-          </a:p>
-        </p:txBody>
-      </p:sp>
-      <p:sp>
-        <p:nvSpPr>
-          <p:cNvPr id="8" name="文本框 7">
-            <a:extLst>
-              <a:ext uri="{FF2B5EF4-FFF2-40B4-BE49-F238E27FC236}">
-                <a16:creationId id="{6806E61F-5B4C-BBCF-690B-EACCC44F7FD3}"/>
-              </a:ext>
-            </a:extLst>
-          </p:cNvPr>
-          <p:cNvSpPr txBox="1"/>
-          <p:nvPr/>
-        </p:nvSpPr>
-        <p:spPr>
-          <a:xfrm>
-            <a:off x="524798" y="3211552"/>
-            <a:ext cx="5115516" cy="1754326"/>
-          </a:xfrm>
-          <a:prstGeom prst="rect">
-            <a:avLst/>
-          </a:prstGeom>
-          <a:noFill/>
-        </p:spPr>
-        <p:txBody>
-          <a:bodyPr wrap="square" lIns="0" tIns="0" rIns="0" bIns="0" anchor="t" anchorCtr="0">
-            <a:spAutoFit/>
-          </a:bodyPr>
-          <a:lstStyle/>
-          <a:p>
-            <a:pPr>
-              <a:spcBef>
-                <a:spcPts val="1200"/>
-              </a:spcBef>
-              <a:defRPr/>
-            </a:pPr>
             <a:r>
-              <a:rPr lang="zh-CN" altLang="en-US" sz="1200" dirty="0">
+              <a:rPr lang="en-US" altLang="zh-CN" sz="6200" dirty="0">
                 <a:solidFill>
-                  <a:srgbClr val="F7F7F5">
-                    <a:alpha val="80000"/>
-                  </a:srgbClr>
+                  <a:srgbClr val="F7F7F5"/>
                 </a:solidFill>
-                <a:latin typeface="MiSans VF Light" pitchFamily="2" charset="-122"/>
-                <a:ea typeface="MiSans VF Light" pitchFamily="2" charset="-122"/>
-                <a:cs typeface="MiSans VF Light" pitchFamily="2" charset="-122"/>
-                <a:sym typeface="SimHei"/>
-              </a:rPr>
-              <a:t>寻找、显著性、到达预测、外部 KPI 全部保持默认 0，系统中不存在任何决策模块。</a:t>
-            </a:r>
-            <a:endParaRPr lang="en-US" altLang="zh-CN" sz="1200" dirty="0">
-              <a:solidFill>
-                <a:srgbClr val="F7F7F5">
-                  <a:alpha val="80000"/>
-                </a:srgbClr>
-              </a:solidFill>
-              <a:latin typeface="MiSans VF Light" pitchFamily="2" charset="-122"/>
-              <a:ea typeface="MiSans VF Light" pitchFamily="2" charset="-122"/>
-              <a:cs typeface="MiSans VF Light" pitchFamily="2" charset="-122"/>
-              <a:sym typeface="SimHei"/>
-            </a:endParaRPr>
-          </a:p>
-          <a:p>
-            <a:pPr>
-              <a:spcBef>
-                <a:spcPts val="1200"/>
-              </a:spcBef>
-              <a:defRPr/>
-            </a:pPr>
-            <a:r>
-              <a:rPr lang="zh-CN" altLang="en-US" sz="1200" dirty="0">
-                <a:solidFill>
-                  <a:srgbClr val="F7F7F5">
-                    <a:alpha val="80000"/>
-                  </a:srgbClr>
-                </a:solidFill>
-                <a:latin typeface="MiSans VF Light" pitchFamily="2" charset="-122"/>
-                <a:ea typeface="MiSans VF Light" pitchFamily="2" charset="-122"/>
-                <a:cs typeface="MiSans VF Light" pitchFamily="2" charset="-122"/>
-                <a:sym typeface="SimHei"/>
-              </a:rPr>
-              <a:t>前 300 拍分别饿通道 3 与通道 5，此后条件完全相同：饿过它 → 0.00004，没饿过 → 0.1495。</a:t>
-            </a:r>
-          </a:p>
-          <a:p>
-            <a:pPr>
-              <a:spcBef>
-                <a:spcPts val="1200"/>
-              </a:spcBef>
-              <a:defRPr/>
-            </a:pPr>
-            <a:r>
-              <a:rPr lang="zh-CN" altLang="en-US" sz="1200" dirty="0">
-                <a:solidFill>
-                  <a:srgbClr val="F7F7F5">
-                    <a:alpha val="80000"/>
-                  </a:srgbClr>
-                </a:solidFill>
-                <a:latin typeface="MiSans VF Light" pitchFamily="2" charset="-122"/>
-                <a:ea typeface="MiSans VF Light" pitchFamily="2" charset="-122"/>
-                <a:cs typeface="MiSans VF Light" pitchFamily="2" charset="-122"/>
-                <a:sym typeface="SimHei"/>
-              </a:rPr>
-              <a:t>Δ = −0.1494 ± 0.0311，8/8 seeds 符号一致。记忆不在任何模块里，它在不可逆结构容量里。</a:t>
-            </a:r>
-            <a:endParaRPr lang="en-US" altLang="zh-CN" sz="1200" dirty="0">
-              <a:solidFill>
-                <a:srgbClr val="F7F7F5">
-                  <a:alpha val="80000"/>
-                </a:srgbClr>
-              </a:solidFill>
-              <a:latin typeface="MiSans VF Light" pitchFamily="2" charset="-122"/>
-              <a:ea typeface="MiSans VF Light" pitchFamily="2" charset="-122"/>
-              <a:cs typeface="MiSans VF Light" pitchFamily="2" charset="-122"/>
-              <a:sym typeface="SimHei"/>
-            </a:endParaRPr>
-          </a:p>
-          <a:p>
-            <a:pPr>
-              <a:spcBef>
-                <a:spcPts val="1200"/>
-              </a:spcBef>
-              <a:defRPr/>
-            </a:pPr>
-            <a:r>
-              <a:rPr lang="zh-CN" altLang="en-US" sz="1200" dirty="0">
-                <a:solidFill>
-                  <a:srgbClr val="F7F7F5">
-                    <a:alpha val="80000"/>
-                  </a:srgbClr>
-                </a:solidFill>
-                <a:latin typeface="MiSans VF Light" pitchFamily="2" charset="-122"/>
-                <a:ea typeface="MiSans VF Light" pitchFamily="2" charset="-122"/>
-                <a:cs typeface="MiSans VF Light" pitchFamily="2" charset="-122"/>
-                <a:sym typeface="SimHei"/>
+                <a:latin typeface="MiSans VF ExtraLight" pitchFamily="2" charset="-122"/>
+                <a:ea typeface="MiSans VF ExtraLight" pitchFamily="2" charset="-122"/>
+                <a:cs typeface="MiSans VF ExtraLight" pitchFamily="2" charset="-122"/>
+                <a:sym typeface="ChillYunmoGothicBold"/>
               </a:rPr>
               <a:t/>
             </a:r>
           </a:p>
         </p:txBody>
       </p:sp>
-      <p:pic>
-        <p:nvPicPr>
-          <p:cNvPr id="6" name="图片 5">
-            <a:extLst>
-              <a:ext uri="{FF2B5EF4-FFF2-40B4-BE49-F238E27FC236}">
-                <a16:creationId id="{897C9662-B38C-B5DE-1E8A-7267CAA45413}"/>
-              </a:ext>
-            </a:extLst>
-          </p:cNvPr>
-          <p:cNvPicPr>
-            <a:picLocks noChangeAspect="1"/>
-          </p:cNvPicPr>
-          <p:nvPr/>
-        </p:nvPicPr>
-        <p:blipFill>
-          <a:blip r:embed="rId2">
-            <a:extLst>
-              <a:ext uri="{28A0092B-C50C-407E-A947-70E740481C1C}">
-                <a14:useLocalDpi val="0"/>
-              </a:ext>
-            </a:extLst>
-          </a:blip>
-          <a:srcRect t="20000" b="20000"/>
-          <a:stretch>
-            <a:fillRect/>
-          </a:stretch>
-        </p:blipFill>
-        <p:spPr>
-          <a:xfrm>
-            <a:off x="6387950" y="2432835"/>
-            <a:ext cx="5278739" cy="3167243"/>
-          </a:xfrm>
-          <a:prstGeom prst="rect">
-            <a:avLst/>
-          </a:prstGeom>
-        </p:spPr>
-      </p:pic>
     </p:spTree>
     <p:extLst>
       <p:ext uri="{BB962C8B-B14F-4D97-AF65-F5344CB8AC3E}">
-        <p14:creationId val="2159064439"/>
+        <p14:creationId val="711464613"/>
       </p:ext>
     </p:extLst>
   </p:cSld>
@@ -21854,2173 +21512,6 @@
 </p:sld>
 </file>
 
-<file path=ppt/slides/slide21.xml><?xml version="1.0" encoding="utf-8"?>
-<p:sld xmlns:a="http://schemas.openxmlformats.org/drawingml/2006/main" xmlns:a16="http://schemas.microsoft.com/office/drawing/2014/main" xmlns:p="http://schemas.openxmlformats.org/presentationml/2006/main" xmlns:p14="http://schemas.microsoft.com/office/powerpoint/2010/main">
-  <p:cSld>
-    <p:spTree>
-      <p:nvGrpSpPr>
-        <p:cNvPr id="1" name="">
-          <a:extLst>
-            <a:ext uri="{FF2B5EF4-FFF2-40B4-BE49-F238E27FC236}">
-              <a16:creationId id="{E9A56D42-03E7-1A8B-E125-C51771EBD336}"/>
-            </a:ext>
-          </a:extLst>
-        </p:cNvPr>
-        <p:cNvGrpSpPr/>
-        <p:nvPr/>
-      </p:nvGrpSpPr>
-      <p:grpSpPr>
-        <a:xfrm>
-          <a:off x="0" y="0"/>
-          <a:ext cx="0" cy="0"/>
-          <a:chOff x="0" y="0"/>
-          <a:chExt cx="0" cy="0"/>
-        </a:xfrm>
-      </p:grpSpPr>
-      <p:grpSp>
-        <p:nvGrpSpPr>
-          <p:cNvPr id="2" name="组合 1">
-            <a:extLst>
-              <a:ext uri="{FF2B5EF4-FFF2-40B4-BE49-F238E27FC236}">
-                <a16:creationId id="{5C622ECD-500A-0C92-D1CE-930651CD7945}"/>
-              </a:ext>
-            </a:extLst>
-          </p:cNvPr>
-          <p:cNvGrpSpPr/>
-          <p:nvPr/>
-        </p:nvGrpSpPr>
-        <p:grpSpPr>
-          <a:xfrm>
-            <a:off x="524797" y="385358"/>
-            <a:ext cx="11208487" cy="141577"/>
-            <a:chOff x="524797" y="385358"/>
-            <a:chExt cx="11208487" cy="141577"/>
-          </a:xfrm>
-        </p:grpSpPr>
-        <p:sp>
-          <p:nvSpPr>
-            <p:cNvPr id="3" name="AutoShape 2">
-              <a:extLst>
-                <a:ext uri="{FF2B5EF4-FFF2-40B4-BE49-F238E27FC236}">
-                  <a16:creationId id="{131AEA49-1E70-E022-B818-12E045065410}"/>
-                </a:ext>
-              </a:extLst>
-            </p:cNvPr>
-            <p:cNvSpPr/>
-            <p:nvPr/>
-          </p:nvSpPr>
-          <p:spPr>
-            <a:xfrm>
-              <a:off x="524797" y="385358"/>
-              <a:ext cx="3077046" cy="141577"/>
-            </a:xfrm>
-            <a:prstGeom prst="rect">
-              <a:avLst/>
-            </a:prstGeom>
-            <a:noFill/>
-            <a:ln w="16933" cap="flat" cmpd="sng">
-              <a:noFill/>
-              <a:prstDash val="solid"/>
-              <a:round/>
-            </a:ln>
-          </p:spPr>
-          <p:txBody>
-            <a:bodyPr vert="horz" wrap="square" lIns="0" tIns="0" rIns="0" bIns="0" rtlCol="0" anchor="t" anchorCtr="0">
-              <a:spAutoFit/>
-            </a:bodyPr>
-            <a:lstStyle/>
-            <a:p>
-              <a:pPr>
-                <a:lnSpc>
-                  <a:spcPct val="125000"/>
-                </a:lnSpc>
-                <a:defRPr/>
-              </a:pPr>
-              <a:r>
-                <a:rPr lang="en-US" sz="800" dirty="0">
-                  <a:solidFill>
-                    <a:srgbClr val="F7F7F5">
-                      <a:alpha val="50000"/>
-                    </a:srgbClr>
-                  </a:solidFill>
-                  <a:latin typeface="MiSans VF Light" pitchFamily="2" charset="-122"/>
-                  <a:ea typeface="MiSans VF Light" pitchFamily="2" charset="-122"/>
-                  <a:cs typeface="MiSans VF Light" pitchFamily="2" charset="-122"/>
-                  <a:sym typeface="JetBrains Mono"/>
-                </a:rPr>
-                <a:t/>
-              </a:r>
-              <a:r>
-                <a:rPr lang="zh-CN" altLang="en-US" sz="800" dirty="0">
-                  <a:solidFill>
-                    <a:srgbClr val="F7F7F5">
-                      <a:alpha val="50000"/>
-                    </a:srgbClr>
-                  </a:solidFill>
-                  <a:latin typeface="MiSans VF Light" pitchFamily="2" charset="-122"/>
-                  <a:ea typeface="MiSans VF Light" pitchFamily="2" charset="-122"/>
-                  <a:cs typeface="MiSans VF Light" pitchFamily="2" charset="-122"/>
-                  <a:sym typeface="JetBrains Mono"/>
-                </a:rPr>
-                <a:t/>
-              </a:r>
-              <a:r>
-                <a:rPr lang="en-US" altLang="zh-CN" sz="800" dirty="0">
-                  <a:solidFill>
-                    <a:srgbClr val="F7F7F5">
-                      <a:alpha val="50000"/>
-                    </a:srgbClr>
-                  </a:solidFill>
-                  <a:latin typeface="MiSans VF Light" pitchFamily="2" charset="-122"/>
-                  <a:ea typeface="MiSans VF Light" pitchFamily="2" charset="-122"/>
-                  <a:cs typeface="MiSans VF Light" pitchFamily="2" charset="-122"/>
-                  <a:sym typeface="JetBrains Mono"/>
-                </a:rPr>
-                <a:t/>
-              </a:r>
-              <a:endParaRPr lang="en-US" sz="800" dirty="0">
-                <a:solidFill>
-                  <a:srgbClr val="F7F7F5">
-                    <a:alpha val="50000"/>
-                  </a:srgbClr>
-                </a:solidFill>
-                <a:latin typeface="MiSans VF Light" pitchFamily="2" charset="-122"/>
-                <a:ea typeface="MiSans VF Light" pitchFamily="2" charset="-122"/>
-                <a:cs typeface="MiSans VF Light" pitchFamily="2" charset="-122"/>
-                <a:sym typeface="JetBrains Mono"/>
-              </a:endParaRPr>
-            </a:p>
-          </p:txBody>
-        </p:sp>
-        <p:sp>
-          <p:nvSpPr>
-            <p:cNvPr id="4" name="AutoShape 2">
-              <a:extLst>
-                <a:ext uri="{FF2B5EF4-FFF2-40B4-BE49-F238E27FC236}">
-                  <a16:creationId id="{CB5D33EF-1846-9B1B-AF27-5A9FF9179169}"/>
-                </a:ext>
-              </a:extLst>
-            </p:cNvPr>
-            <p:cNvSpPr/>
-            <p:nvPr/>
-          </p:nvSpPr>
-          <p:spPr>
-            <a:xfrm>
-              <a:off x="5640314" y="385358"/>
-              <a:ext cx="911371" cy="141577"/>
-            </a:xfrm>
-            <a:prstGeom prst="rect">
-              <a:avLst/>
-            </a:prstGeom>
-            <a:noFill/>
-            <a:ln w="16933" cap="flat" cmpd="sng">
-              <a:noFill/>
-              <a:prstDash val="solid"/>
-              <a:round/>
-            </a:ln>
-          </p:spPr>
-          <p:txBody>
-            <a:bodyPr vert="horz" wrap="square" lIns="0" tIns="0" rIns="0" bIns="0" rtlCol="0" anchor="t" anchorCtr="0">
-              <a:spAutoFit/>
-            </a:bodyPr>
-            <a:lstStyle/>
-            <a:p>
-              <a:pPr algn="ctr">
-                <a:lnSpc>
-                  <a:spcPct val="125000"/>
-                </a:lnSpc>
-                <a:defRPr/>
-              </a:pPr>
-              <a:r>
-                <a:rPr lang="en-US" altLang="zh-CN" sz="800" dirty="0">
-                  <a:solidFill>
-                    <a:srgbClr val="F7F7F5">
-                      <a:alpha val="50000"/>
-                    </a:srgbClr>
-                  </a:solidFill>
-                  <a:latin typeface="MiSans VF Light" pitchFamily="2" charset="-122"/>
-                  <a:ea typeface="MiSans VF Light" pitchFamily="2" charset="-122"/>
-                  <a:cs typeface="MiSans VF Light" pitchFamily="2" charset="-122"/>
-                  <a:sym typeface="JetBrains Mono"/>
-                </a:rPr>
-                <a:t>2026</a:t>
-              </a:r>
-              <a:endParaRPr lang="en-US" sz="800" dirty="0">
-                <a:solidFill>
-                  <a:srgbClr val="F7F7F5">
-                    <a:alpha val="50000"/>
-                  </a:srgbClr>
-                </a:solidFill>
-                <a:latin typeface="MiSans VF Light" pitchFamily="2" charset="-122"/>
-                <a:ea typeface="MiSans VF Light" pitchFamily="2" charset="-122"/>
-                <a:cs typeface="MiSans VF Light" pitchFamily="2" charset="-122"/>
-              </a:endParaRPr>
-            </a:p>
-          </p:txBody>
-        </p:sp>
-        <p:sp>
-          <p:nvSpPr>
-            <p:cNvPr id="7" name="AutoShape 2">
-              <a:extLst>
-                <a:ext uri="{FF2B5EF4-FFF2-40B4-BE49-F238E27FC236}">
-                  <a16:creationId id="{A96BF789-A9EC-FF1D-6EE0-3AD83C004375}"/>
-                </a:ext>
-              </a:extLst>
-            </p:cNvPr>
-            <p:cNvSpPr/>
-            <p:nvPr/>
-          </p:nvSpPr>
-          <p:spPr>
-            <a:xfrm>
-              <a:off x="8133284" y="385358"/>
-              <a:ext cx="3600000" cy="141577"/>
-            </a:xfrm>
-            <a:prstGeom prst="rect">
-              <a:avLst/>
-            </a:prstGeom>
-            <a:noFill/>
-            <a:ln w="16933" cap="flat" cmpd="sng">
-              <a:noFill/>
-              <a:prstDash val="solid"/>
-              <a:round/>
-            </a:ln>
-          </p:spPr>
-          <p:txBody>
-            <a:bodyPr vert="horz" wrap="square" lIns="0" tIns="0" rIns="0" bIns="0" rtlCol="0" anchor="t" anchorCtr="0">
-              <a:spAutoFit/>
-            </a:bodyPr>
-            <a:lstStyle/>
-            <a:p>
-              <a:pPr algn="r">
-                <a:lnSpc>
-                  <a:spcPct val="125000"/>
-                </a:lnSpc>
-                <a:defRPr/>
-              </a:pPr>
-              <a:r>
-                <a:rPr lang="en-US" sz="800" dirty="0">
-                  <a:solidFill>
-                    <a:srgbClr val="F7F7F5">
-                      <a:alpha val="50000"/>
-                    </a:srgbClr>
-                  </a:solidFill>
-                  <a:latin typeface="MiSans VF Light" pitchFamily="2" charset="-122"/>
-                  <a:ea typeface="MiSans VF Light" pitchFamily="2" charset="-122"/>
-                  <a:cs typeface="MiSans VF Light" pitchFamily="2" charset="-122"/>
-                  <a:sym typeface="JetBrains Mono"/>
-                </a:rPr>
-                <a:t/>
-              </a:r>
-              <a:endParaRPr lang="en-US" sz="800" dirty="0">
-                <a:solidFill>
-                  <a:srgbClr val="F7F7F5">
-                    <a:alpha val="50000"/>
-                  </a:srgbClr>
-                </a:solidFill>
-                <a:latin typeface="MiSans VF Light" pitchFamily="2" charset="-122"/>
-                <a:ea typeface="MiSans VF Light" pitchFamily="2" charset="-122"/>
-                <a:cs typeface="MiSans VF Light" pitchFamily="2" charset="-122"/>
-              </a:endParaRPr>
-            </a:p>
-          </p:txBody>
-        </p:sp>
-      </p:grpSp>
-      <p:sp>
-        <p:nvSpPr>
-          <p:cNvPr id="9" name="AutoShape 2">
-            <a:extLst>
-              <a:ext uri="{FF2B5EF4-FFF2-40B4-BE49-F238E27FC236}">
-                <a16:creationId id="{08F5986F-E04F-2B27-65E9-C8DBB67314B8}"/>
-              </a:ext>
-            </a:extLst>
-          </p:cNvPr>
-          <p:cNvSpPr/>
-          <p:nvPr/>
-        </p:nvSpPr>
-        <p:spPr>
-          <a:xfrm>
-            <a:off x="524797" y="6295670"/>
-            <a:ext cx="3077046" cy="141577"/>
-          </a:xfrm>
-          <a:prstGeom prst="rect">
-            <a:avLst/>
-          </a:prstGeom>
-          <a:noFill/>
-          <a:ln w="16933" cap="flat" cmpd="sng">
-            <a:noFill/>
-            <a:prstDash val="solid"/>
-            <a:round/>
-          </a:ln>
-        </p:spPr>
-        <p:txBody>
-          <a:bodyPr vert="horz" wrap="square" lIns="0" tIns="0" rIns="0" bIns="0" rtlCol="0" anchor="t" anchorCtr="0">
-            <a:spAutoFit/>
-          </a:bodyPr>
-          <a:lstStyle/>
-          <a:p>
-            <a:pPr>
-              <a:lnSpc>
-                <a:spcPct val="125000"/>
-              </a:lnSpc>
-              <a:defRPr/>
-            </a:pPr>
-            <a:r>
-              <a:rPr lang="en-US" altLang="zh-CN" sz="800" dirty="0">
-                <a:solidFill>
-                  <a:srgbClr val="F7F7F5">
-                    <a:alpha val="50000"/>
-                  </a:srgbClr>
-                </a:solidFill>
-                <a:latin typeface="MiSans VF Light" pitchFamily="2" charset="-122"/>
-                <a:ea typeface="MiSans VF Light" pitchFamily="2" charset="-122"/>
-                <a:cs typeface="MiSans VF Light" pitchFamily="2" charset="-122"/>
-                <a:sym typeface="JetBrains Mono"/>
-              </a:rPr>
-              <a:t/>
-            </a:r>
-            <a:endParaRPr lang="en-US" sz="800" dirty="0">
-              <a:solidFill>
-                <a:srgbClr val="F7F7F5">
-                  <a:alpha val="50000"/>
-                </a:srgbClr>
-              </a:solidFill>
-              <a:latin typeface="MiSans VF Light" pitchFamily="2" charset="-122"/>
-              <a:ea typeface="MiSans VF Light" pitchFamily="2" charset="-122"/>
-              <a:cs typeface="MiSans VF Light" pitchFamily="2" charset="-122"/>
-              <a:sym typeface="JetBrains Mono"/>
-            </a:endParaRPr>
-          </a:p>
-        </p:txBody>
-      </p:sp>
-      <p:sp>
-        <p:nvSpPr>
-          <p:cNvPr id="17" name="文本框 16">
-            <a:extLst>
-              <a:ext uri="{FF2B5EF4-FFF2-40B4-BE49-F238E27FC236}">
-                <a16:creationId id="{DCE83B95-29A5-947E-5DB3-187F95E5CBD0}"/>
-              </a:ext>
-            </a:extLst>
-          </p:cNvPr>
-          <p:cNvSpPr txBox="1"/>
-          <p:nvPr/>
-        </p:nvSpPr>
-        <p:spPr>
-          <a:xfrm>
-            <a:off x="9765793" y="1206343"/>
-            <a:ext cx="1967492" cy="307777"/>
-          </a:xfrm>
-          <a:prstGeom prst="rect">
-            <a:avLst/>
-          </a:prstGeom>
-          <a:noFill/>
-        </p:spPr>
-        <p:txBody>
-          <a:bodyPr wrap="square">
-            <a:spAutoFit/>
-          </a:bodyPr>
-          <a:lstStyle/>
-          <a:p>
-            <a:pPr algn="r">
-              <a:defRPr/>
-            </a:pPr>
-            <a:r>
-              <a:rPr lang="en-US" altLang="zh-CN" b="1" i="1" dirty="0">
-                <a:solidFill>
-                  <a:srgbClr val="FF2B20"/>
-                </a:solidFill>
-                <a:latin typeface="Didot" panose="02000503000000020003" pitchFamily="2" charset="-79"/>
-                <a:ea typeface="MiSans VF Bold" pitchFamily="2" charset="-122"/>
-                <a:cs typeface="Didot" panose="02000503000000020003" pitchFamily="2" charset="-79"/>
-                <a:sym typeface="SimHei"/>
-              </a:rPr>
-              <a:t>HARD CONSTRAINTS</a:t>
-            </a:r>
-            <a:endParaRPr lang="en-US" altLang="zh-CN" sz="1400" b="1" i="1" u="none" strike="noStrike" dirty="0">
-              <a:solidFill>
-                <a:srgbClr val="FF2B20"/>
-              </a:solidFill>
-              <a:latin typeface="Didot" panose="02000503000000020003" pitchFamily="2" charset="-79"/>
-              <a:ea typeface="MiSans VF Bold" pitchFamily="2" charset="-122"/>
-              <a:cs typeface="Didot" panose="02000503000000020003" pitchFamily="2" charset="-79"/>
-              <a:sym typeface="SimHei"/>
-            </a:endParaRPr>
-          </a:p>
-        </p:txBody>
-      </p:sp>
-      <p:sp>
-        <p:nvSpPr>
-          <p:cNvPr id="5" name="AutoShape 5">
-            <a:extLst>
-              <a:ext uri="{FF2B5EF4-FFF2-40B4-BE49-F238E27FC236}">
-                <a16:creationId id="{E53B9922-51DF-FCFF-E55E-66B08B599EEC}"/>
-              </a:ext>
-            </a:extLst>
-          </p:cNvPr>
-          <p:cNvSpPr/>
-          <p:nvPr/>
-        </p:nvSpPr>
-        <p:spPr>
-          <a:xfrm>
-            <a:off x="524798" y="1206344"/>
-            <a:ext cx="7036061" cy="615553"/>
-          </a:xfrm>
-          <a:prstGeom prst="rect">
-            <a:avLst/>
-          </a:prstGeom>
-          <a:noFill/>
-          <a:ln w="16933" cap="flat" cmpd="sng">
-            <a:noFill/>
-            <a:prstDash val="solid"/>
-            <a:round/>
-          </a:ln>
-        </p:spPr>
-        <p:txBody>
-          <a:bodyPr vert="horz" wrap="square" lIns="0" tIns="0" rIns="0" bIns="0" rtlCol="0" anchor="t" anchorCtr="0">
-            <a:spAutoFit/>
-          </a:bodyPr>
-          <a:lstStyle/>
-          <a:p>
-            <a:pPr>
-              <a:defRPr/>
-            </a:pPr>
-            <a:r>
-              <a:rPr lang="zh-CN" altLang="en-US" sz="4000" b="1" dirty="0">
-                <a:solidFill>
-                  <a:srgbClr val="F7F7F5"/>
-                </a:solidFill>
-                <a:latin typeface="MiSans VF Bold" pitchFamily="2" charset="-122"/>
-                <a:ea typeface="MiSans VF Bold" pitchFamily="2" charset="-122"/>
-                <a:cs typeface="MiSans VF Bold" pitchFamily="2" charset="-122"/>
-                <a:sym typeface="SimHei"/>
-              </a:rPr>
-              <a:t>五条硬约束 · 缺一不可</a:t>
-            </a:r>
-            <a:endParaRPr lang="en-US" altLang="zh-CN" sz="4000" b="1" dirty="0">
-              <a:solidFill>
-                <a:srgbClr val="F7F7F5"/>
-              </a:solidFill>
-              <a:latin typeface="MiSans VF Bold" pitchFamily="2" charset="-122"/>
-              <a:ea typeface="MiSans VF Bold" pitchFamily="2" charset="-122"/>
-              <a:cs typeface="MiSans VF Bold" pitchFamily="2" charset="-122"/>
-              <a:sym typeface="SimHei"/>
-            </a:endParaRPr>
-          </a:p>
-        </p:txBody>
-      </p:sp>
-      <p:sp>
-        <p:nvSpPr>
-          <p:cNvPr id="6" name="矩形 5">
-            <a:extLst>
-              <a:ext uri="{FF2B5EF4-FFF2-40B4-BE49-F238E27FC236}">
-                <a16:creationId id="{FEB81666-1C20-1EFA-1D42-2C2AF9CB3990}"/>
-              </a:ext>
-            </a:extLst>
-          </p:cNvPr>
-          <p:cNvSpPr/>
-          <p:nvPr/>
-        </p:nvSpPr>
-        <p:spPr>
-          <a:xfrm>
-            <a:off x="3337401" y="2161017"/>
-            <a:ext cx="2770674" cy="3821329"/>
-          </a:xfrm>
-          <a:prstGeom prst="rect">
-            <a:avLst/>
-          </a:prstGeom>
-          <a:solidFill>
-            <a:srgbClr val="FF5A4D"/>
-          </a:solidFill>
-          <a:ln>
-            <a:noFill/>
-          </a:ln>
-        </p:spPr>
-        <p:style>
-          <a:lnRef idx="2">
-            <a:schemeClr val="accent1">
-              <a:shade val="15000"/>
-            </a:schemeClr>
-          </a:lnRef>
-          <a:fillRef idx="1">
-            <a:schemeClr val="accent1"/>
-          </a:fillRef>
-          <a:effectRef idx="0">
-            <a:schemeClr val="accent1"/>
-          </a:effectRef>
-          <a:fontRef idx="minor">
-            <a:schemeClr val="lt1"/>
-          </a:fontRef>
-        </p:style>
-        <p:txBody>
-          <a:bodyPr rtlCol="0" anchor="ctr"/>
-          <a:lstStyle/>
-          <a:p>
-            <a:pPr algn="ctr"/>
-            <a:endParaRPr kumimoji="1" lang="zh-CN" altLang="en-US" dirty="0">
-              <a:solidFill>
-                <a:srgbClr val="FF5A4D"/>
-              </a:solidFill>
-            </a:endParaRPr>
-          </a:p>
-        </p:txBody>
-      </p:sp>
-      <p:sp>
-        <p:nvSpPr>
-          <p:cNvPr id="15" name="矩形 14">
-            <a:extLst>
-              <a:ext uri="{FF2B5EF4-FFF2-40B4-BE49-F238E27FC236}">
-                <a16:creationId id="{D3A212B5-CE15-6C8C-CF6C-DBEB4EC619C3}"/>
-              </a:ext>
-            </a:extLst>
-          </p:cNvPr>
-          <p:cNvSpPr/>
-          <p:nvPr/>
-        </p:nvSpPr>
-        <p:spPr>
-          <a:xfrm>
-            <a:off x="6150006" y="2161017"/>
-            <a:ext cx="2770674" cy="3821329"/>
-          </a:xfrm>
-          <a:prstGeom prst="rect">
-            <a:avLst/>
-          </a:prstGeom>
-          <a:solidFill>
-            <a:srgbClr val="E62B1E"/>
-          </a:solidFill>
-          <a:ln>
-            <a:noFill/>
-          </a:ln>
-        </p:spPr>
-        <p:style>
-          <a:lnRef idx="2">
-            <a:schemeClr val="accent1">
-              <a:shade val="15000"/>
-            </a:schemeClr>
-          </a:lnRef>
-          <a:fillRef idx="1">
-            <a:schemeClr val="accent1"/>
-          </a:fillRef>
-          <a:effectRef idx="0">
-            <a:schemeClr val="accent1"/>
-          </a:effectRef>
-          <a:fontRef idx="minor">
-            <a:schemeClr val="lt1"/>
-          </a:fontRef>
-        </p:style>
-        <p:txBody>
-          <a:bodyPr rtlCol="0" anchor="ctr"/>
-          <a:lstStyle/>
-          <a:p>
-            <a:pPr algn="ctr"/>
-            <a:endParaRPr kumimoji="1" lang="zh-CN" altLang="en-US" dirty="0"/>
-          </a:p>
-        </p:txBody>
-      </p:sp>
-      <p:sp>
-        <p:nvSpPr>
-          <p:cNvPr id="16" name="矩形 15">
-            <a:extLst>
-              <a:ext uri="{FF2B5EF4-FFF2-40B4-BE49-F238E27FC236}">
-                <a16:creationId id="{722DE899-2D2B-01C0-9DB5-77A85CE2AB4D}"/>
-              </a:ext>
-            </a:extLst>
-          </p:cNvPr>
-          <p:cNvSpPr/>
-          <p:nvPr/>
-        </p:nvSpPr>
-        <p:spPr>
-          <a:xfrm>
-            <a:off x="524796" y="2161017"/>
-            <a:ext cx="2770674" cy="3821329"/>
-          </a:xfrm>
-          <a:prstGeom prst="rect">
-            <a:avLst/>
-          </a:prstGeom>
-          <a:solidFill>
-            <a:schemeClr val="bg1">
-              <a:lumMod val="90000"/>
-              <a:lumOff val="10000"/>
-            </a:schemeClr>
-          </a:solidFill>
-          <a:ln>
-            <a:noFill/>
-          </a:ln>
-        </p:spPr>
-        <p:style>
-          <a:lnRef idx="2">
-            <a:schemeClr val="accent1">
-              <a:shade val="15000"/>
-            </a:schemeClr>
-          </a:lnRef>
-          <a:fillRef idx="1">
-            <a:schemeClr val="accent1"/>
-          </a:fillRef>
-          <a:effectRef idx="0">
-            <a:schemeClr val="accent1"/>
-          </a:effectRef>
-          <a:fontRef idx="minor">
-            <a:schemeClr val="lt1"/>
-          </a:fontRef>
-        </p:style>
-        <p:txBody>
-          <a:bodyPr rtlCol="0" anchor="ctr"/>
-          <a:lstStyle/>
-          <a:p>
-            <a:pPr algn="ctr"/>
-            <a:endParaRPr kumimoji="1" lang="zh-CN" altLang="en-US" dirty="0"/>
-          </a:p>
-        </p:txBody>
-      </p:sp>
-      <p:sp>
-        <p:nvSpPr>
-          <p:cNvPr id="18" name="矩形 17">
-            <a:extLst>
-              <a:ext uri="{FF2B5EF4-FFF2-40B4-BE49-F238E27FC236}">
-                <a16:creationId id="{FFBCF46D-4BC4-5DF1-EFAE-8761B68878B2}"/>
-              </a:ext>
-            </a:extLst>
-          </p:cNvPr>
-          <p:cNvSpPr/>
-          <p:nvPr/>
-        </p:nvSpPr>
-        <p:spPr>
-          <a:xfrm>
-            <a:off x="8962610" y="2161017"/>
-            <a:ext cx="2770674" cy="3821329"/>
-          </a:xfrm>
-          <a:prstGeom prst="rect">
-            <a:avLst/>
-          </a:prstGeom>
-          <a:solidFill>
-            <a:srgbClr val="F7F7F5"/>
-          </a:solidFill>
-          <a:ln>
-            <a:noFill/>
-          </a:ln>
-        </p:spPr>
-        <p:style>
-          <a:lnRef idx="2">
-            <a:schemeClr val="accent1">
-              <a:shade val="15000"/>
-            </a:schemeClr>
-          </a:lnRef>
-          <a:fillRef idx="1">
-            <a:schemeClr val="accent1"/>
-          </a:fillRef>
-          <a:effectRef idx="0">
-            <a:schemeClr val="accent1"/>
-          </a:effectRef>
-          <a:fontRef idx="minor">
-            <a:schemeClr val="lt1"/>
-          </a:fontRef>
-        </p:style>
-        <p:txBody>
-          <a:bodyPr rtlCol="0" anchor="ctr"/>
-          <a:lstStyle/>
-          <a:p>
-            <a:pPr algn="ctr"/>
-            <a:endParaRPr kumimoji="1" lang="zh-CN" altLang="en-US" dirty="0">
-              <a:solidFill>
-                <a:srgbClr val="F7F7F5"/>
-              </a:solidFill>
-            </a:endParaRPr>
-          </a:p>
-        </p:txBody>
-      </p:sp>
-      <p:sp>
-        <p:nvSpPr>
-          <p:cNvPr id="22" name="AutoShape 2">
-            <a:extLst>
-              <a:ext uri="{FF2B5EF4-FFF2-40B4-BE49-F238E27FC236}">
-                <a16:creationId id="{73E5062A-D3D4-13B8-20D2-C8C6D80254BA}"/>
-              </a:ext>
-            </a:extLst>
-          </p:cNvPr>
-          <p:cNvSpPr/>
-          <p:nvPr/>
-        </p:nvSpPr>
-        <p:spPr>
-          <a:xfrm>
-            <a:off x="690202" y="2295779"/>
-            <a:ext cx="2432106" cy="615553"/>
-          </a:xfrm>
-          <a:prstGeom prst="roundRect">
-            <a:avLst>
-              <a:gd name="adj" fmla="val 0"/>
-            </a:avLst>
-          </a:prstGeom>
-          <a:noFill/>
-          <a:ln w="25400" cap="flat" cmpd="sng">
-            <a:noFill/>
-            <a:prstDash val="solid"/>
-            <a:round/>
-          </a:ln>
-        </p:spPr>
-        <p:txBody>
-          <a:bodyPr vert="horz" wrap="square" lIns="0" tIns="0" rIns="0" bIns="0" rtlCol="0" anchor="ctr" anchorCtr="0">
-            <a:spAutoFit/>
-          </a:bodyPr>
-          <a:lstStyle/>
-          <a:p>
-            <a:pPr>
-              <a:defRPr/>
-            </a:pPr>
-            <a:r>
-              <a:rPr lang="en-US" altLang="zh-CN" sz="4000" dirty="0">
-                <a:solidFill>
-                  <a:srgbClr val="F7F7F5"/>
-                </a:solidFill>
-                <a:latin typeface="MiSans VF ExtraLight" pitchFamily="2" charset="-122"/>
-                <a:ea typeface="MiSans VF ExtraLight" pitchFamily="2" charset="-122"/>
-                <a:cs typeface="MiSans VF ExtraLight" pitchFamily="2" charset="-122"/>
-                <a:sym typeface="ChillYunmoGothicBold"/>
-              </a:rPr>
-              <a:t>01</a:t>
-            </a:r>
-          </a:p>
-        </p:txBody>
-      </p:sp>
-      <p:sp>
-        <p:nvSpPr>
-          <p:cNvPr id="23" name="AutoShape 5">
-            <a:extLst>
-              <a:ext uri="{FF2B5EF4-FFF2-40B4-BE49-F238E27FC236}">
-                <a16:creationId id="{493DAB02-3340-2E61-8696-44B5A9480EB7}"/>
-              </a:ext>
-            </a:extLst>
-          </p:cNvPr>
-          <p:cNvSpPr/>
-          <p:nvPr/>
-        </p:nvSpPr>
-        <p:spPr>
-          <a:xfrm>
-            <a:off x="694080" y="4754487"/>
-            <a:ext cx="2432106" cy="246221"/>
-          </a:xfrm>
-          <a:prstGeom prst="rect">
-            <a:avLst/>
-          </a:prstGeom>
-          <a:noFill/>
-          <a:ln w="16933" cap="flat" cmpd="sng">
-            <a:noFill/>
-            <a:prstDash val="solid"/>
-            <a:round/>
-          </a:ln>
-        </p:spPr>
-        <p:txBody>
-          <a:bodyPr vert="horz" wrap="square" lIns="0" tIns="0" rIns="0" bIns="0" rtlCol="0" anchor="t" anchorCtr="0">
-            <a:spAutoFit/>
-          </a:bodyPr>
-          <a:lstStyle/>
-          <a:p>
-            <a:pPr>
-              <a:defRPr/>
-            </a:pPr>
-            <a:r>
-              <a:rPr lang="zh-CN" altLang="en-US" sz="1600" dirty="0">
-                <a:solidFill>
-                  <a:srgbClr val="F7F7F5"/>
-                </a:solidFill>
-                <a:latin typeface="MiSans VF Demibold" pitchFamily="2" charset="-122"/>
-                <a:ea typeface="MiSans VF Demibold" pitchFamily="2" charset="-122"/>
-                <a:cs typeface="MiSans VF Demibold" pitchFamily="2" charset="-122"/>
-                <a:sym typeface="SimHei"/>
-              </a:rPr>
-              <a:t>稀缺</a:t>
-            </a:r>
-            <a:endParaRPr lang="en-US" altLang="zh-CN" sz="1600" dirty="0">
-              <a:solidFill>
-                <a:srgbClr val="F7F7F5"/>
-              </a:solidFill>
-              <a:latin typeface="MiSans VF Demibold" pitchFamily="2" charset="-122"/>
-              <a:ea typeface="MiSans VF Demibold" pitchFamily="2" charset="-122"/>
-              <a:cs typeface="MiSans VF Demibold" pitchFamily="2" charset="-122"/>
-              <a:sym typeface="SimHei"/>
-            </a:endParaRPr>
-          </a:p>
-        </p:txBody>
-      </p:sp>
-      <p:sp>
-        <p:nvSpPr>
-          <p:cNvPr id="24" name="文本框 23">
-            <a:extLst>
-              <a:ext uri="{FF2B5EF4-FFF2-40B4-BE49-F238E27FC236}">
-                <a16:creationId id="{80E520F8-7FD7-2A5E-CBDF-E9FFB2E9FB9E}"/>
-              </a:ext>
-            </a:extLst>
-          </p:cNvPr>
-          <p:cNvSpPr txBox="1"/>
-          <p:nvPr/>
-        </p:nvSpPr>
-        <p:spPr>
-          <a:xfrm>
-            <a:off x="694080" y="5115367"/>
-            <a:ext cx="2432107" cy="553998"/>
-          </a:xfrm>
-          <a:prstGeom prst="rect">
-            <a:avLst/>
-          </a:prstGeom>
-          <a:noFill/>
-        </p:spPr>
-        <p:txBody>
-          <a:bodyPr wrap="square" lIns="0" tIns="0" rIns="0" bIns="0" anchor="t" anchorCtr="0">
-            <a:spAutoFit/>
-          </a:bodyPr>
-          <a:lstStyle/>
-          <a:p>
-            <a:pPr>
-              <a:spcBef>
-                <a:spcPts val="1200"/>
-              </a:spcBef>
-              <a:defRPr/>
-            </a:pPr>
-            <a:r>
-              <a:rPr lang="zh-CN" altLang="en-US" sz="1200" dirty="0">
-                <a:solidFill>
-                  <a:srgbClr val="F7F7F5">
-                    <a:alpha val="80000"/>
-                  </a:srgbClr>
-                </a:solidFill>
-                <a:latin typeface="MiSans VF Light" pitchFamily="2" charset="-122"/>
-                <a:ea typeface="MiSans VF Light" pitchFamily="2" charset="-122"/>
-                <a:cs typeface="MiSans VF Light" pitchFamily="2" charset="-122"/>
-                <a:sym typeface="SimHei"/>
-              </a:rPr>
-              <a:t>每拍预算零和分配，分不到的就是 0，而不是少给一点</a:t>
-            </a:r>
-          </a:p>
-        </p:txBody>
-      </p:sp>
-      <p:sp>
-        <p:nvSpPr>
-          <p:cNvPr id="26" name="AutoShape 5">
-            <a:extLst>
-              <a:ext uri="{FF2B5EF4-FFF2-40B4-BE49-F238E27FC236}">
-                <a16:creationId id="{95F6DFF3-EC29-1BEB-7134-12FF3940FFA1}"/>
-              </a:ext>
-            </a:extLst>
-          </p:cNvPr>
-          <p:cNvSpPr/>
-          <p:nvPr/>
-        </p:nvSpPr>
-        <p:spPr>
-          <a:xfrm>
-            <a:off x="3509199" y="4754487"/>
-            <a:ext cx="2432106" cy="246221"/>
-          </a:xfrm>
-          <a:prstGeom prst="rect">
-            <a:avLst/>
-          </a:prstGeom>
-          <a:noFill/>
-          <a:ln w="16933" cap="flat" cmpd="sng">
-            <a:noFill/>
-            <a:prstDash val="solid"/>
-            <a:round/>
-          </a:ln>
-        </p:spPr>
-        <p:txBody>
-          <a:bodyPr vert="horz" wrap="square" lIns="0" tIns="0" rIns="0" bIns="0" rtlCol="0" anchor="t" anchorCtr="0">
-            <a:spAutoFit/>
-          </a:bodyPr>
-          <a:lstStyle/>
-          <a:p>
-            <a:pPr>
-              <a:defRPr/>
-            </a:pPr>
-            <a:r>
-              <a:rPr lang="zh-CN" altLang="en-US" sz="1600" dirty="0">
-                <a:solidFill>
-                  <a:srgbClr val="F7F7F5"/>
-                </a:solidFill>
-                <a:latin typeface="MiSans VF Demibold" pitchFamily="2" charset="-122"/>
-                <a:ea typeface="MiSans VF Demibold" pitchFamily="2" charset="-122"/>
-                <a:cs typeface="MiSans VF Demibold" pitchFamily="2" charset="-122"/>
-                <a:sym typeface="SimHei"/>
-              </a:rPr>
-              <a:t>不可逆</a:t>
-            </a:r>
-            <a:endParaRPr lang="en-US" altLang="zh-CN" sz="1600" dirty="0">
-              <a:solidFill>
-                <a:srgbClr val="F7F7F5"/>
-              </a:solidFill>
-              <a:latin typeface="MiSans VF Demibold" pitchFamily="2" charset="-122"/>
-              <a:ea typeface="MiSans VF Demibold" pitchFamily="2" charset="-122"/>
-              <a:cs typeface="MiSans VF Demibold" pitchFamily="2" charset="-122"/>
-              <a:sym typeface="SimHei"/>
-            </a:endParaRPr>
-          </a:p>
-        </p:txBody>
-      </p:sp>
-      <p:sp>
-        <p:nvSpPr>
-          <p:cNvPr id="27" name="文本框 26">
-            <a:extLst>
-              <a:ext uri="{FF2B5EF4-FFF2-40B4-BE49-F238E27FC236}">
-                <a16:creationId id="{C92C47EB-CFA7-4A32-3B20-F7328BD33BD4}"/>
-              </a:ext>
-            </a:extLst>
-          </p:cNvPr>
-          <p:cNvSpPr txBox="1"/>
-          <p:nvPr/>
-        </p:nvSpPr>
-        <p:spPr>
-          <a:xfrm>
-            <a:off x="3509199" y="5115367"/>
-            <a:ext cx="2432107" cy="553998"/>
-          </a:xfrm>
-          <a:prstGeom prst="rect">
-            <a:avLst/>
-          </a:prstGeom>
-          <a:noFill/>
-        </p:spPr>
-        <p:txBody>
-          <a:bodyPr wrap="square" lIns="0" tIns="0" rIns="0" bIns="0" anchor="t" anchorCtr="0">
-            <a:normAutofit/>
-          </a:bodyPr>
-          <a:lstStyle/>
-          <a:p>
-            <a:pPr>
-              <a:spcBef>
-                <a:spcPts val="1200"/>
-              </a:spcBef>
-              <a:defRPr/>
-            </a:pPr>
-            <a:r>
-              <a:rPr lang="zh-CN" altLang="en-US" sz="996" dirty="0">
-                <a:solidFill>
-                  <a:srgbClr val="F7F7F5">
-                    <a:alpha val="80000"/>
-                  </a:srgbClr>
-                </a:solidFill>
-                <a:latin typeface="MiSans VF Light" pitchFamily="2" charset="-122"/>
-                <a:ea typeface="MiSans VF Light" pitchFamily="2" charset="-122"/>
-                <a:cs typeface="MiSans VF Light" pitchFamily="2" charset="-122"/>
-                <a:sym typeface="SimHei"/>
-              </a:rPr>
-              <a:t>长期饥饿使结构容量永久缩小，只减不增</a:t>
-            </a:r>
-          </a:p>
-        </p:txBody>
-      </p:sp>
-      <p:sp>
-        <p:nvSpPr>
-          <p:cNvPr id="29" name="AutoShape 2">
-            <a:extLst>
-              <a:ext uri="{FF2B5EF4-FFF2-40B4-BE49-F238E27FC236}">
-                <a16:creationId id="{7F0AAD2C-9B4C-02E9-F19C-37848927CBEA}"/>
-              </a:ext>
-            </a:extLst>
-          </p:cNvPr>
-          <p:cNvSpPr/>
-          <p:nvPr/>
-        </p:nvSpPr>
-        <p:spPr>
-          <a:xfrm>
-            <a:off x="3509199" y="2295779"/>
-            <a:ext cx="2363139" cy="615553"/>
-          </a:xfrm>
-          <a:prstGeom prst="roundRect">
-            <a:avLst>
-              <a:gd name="adj" fmla="val 0"/>
-            </a:avLst>
-          </a:prstGeom>
-          <a:noFill/>
-          <a:ln w="25400" cap="flat" cmpd="sng">
-            <a:noFill/>
-            <a:prstDash val="solid"/>
-            <a:round/>
-          </a:ln>
-        </p:spPr>
-        <p:txBody>
-          <a:bodyPr vert="horz" wrap="square" lIns="0" tIns="0" rIns="0" bIns="0" rtlCol="0" anchor="ctr" anchorCtr="0">
-            <a:spAutoFit/>
-          </a:bodyPr>
-          <a:lstStyle/>
-          <a:p>
-            <a:pPr>
-              <a:defRPr/>
-            </a:pPr>
-            <a:r>
-              <a:rPr lang="en-US" altLang="zh-CN" sz="4000" dirty="0">
-                <a:solidFill>
-                  <a:srgbClr val="F7F7F5"/>
-                </a:solidFill>
-                <a:latin typeface="MiSans VF ExtraLight" pitchFamily="2" charset="-122"/>
-                <a:ea typeface="MiSans VF ExtraLight" pitchFamily="2" charset="-122"/>
-                <a:cs typeface="MiSans VF ExtraLight" pitchFamily="2" charset="-122"/>
-                <a:sym typeface="ChillYunmoGothicBold"/>
-              </a:rPr>
-              <a:t>02</a:t>
-            </a:r>
-          </a:p>
-        </p:txBody>
-      </p:sp>
-      <p:sp>
-        <p:nvSpPr>
-          <p:cNvPr id="31" name="AutoShape 5">
-            <a:extLst>
-              <a:ext uri="{FF2B5EF4-FFF2-40B4-BE49-F238E27FC236}">
-                <a16:creationId id="{2BA66D56-EE33-C6F7-877B-F2CF6050D06F}"/>
-              </a:ext>
-            </a:extLst>
-          </p:cNvPr>
-          <p:cNvSpPr/>
-          <p:nvPr/>
-        </p:nvSpPr>
-        <p:spPr>
-          <a:xfrm>
-            <a:off x="6316793" y="4754487"/>
-            <a:ext cx="2432106" cy="246221"/>
-          </a:xfrm>
-          <a:prstGeom prst="rect">
-            <a:avLst/>
-          </a:prstGeom>
-          <a:noFill/>
-          <a:ln w="16933" cap="flat" cmpd="sng">
-            <a:noFill/>
-            <a:prstDash val="solid"/>
-            <a:round/>
-          </a:ln>
-        </p:spPr>
-        <p:txBody>
-          <a:bodyPr vert="horz" wrap="square" lIns="0" tIns="0" rIns="0" bIns="0" rtlCol="0" anchor="t" anchorCtr="0">
-            <a:spAutoFit/>
-          </a:bodyPr>
-          <a:lstStyle/>
-          <a:p>
-            <a:pPr>
-              <a:defRPr/>
-            </a:pPr>
-            <a:r>
-              <a:rPr lang="zh-CN" altLang="en-US" sz="1600" dirty="0">
-                <a:solidFill>
-                  <a:srgbClr val="0B0B0C"/>
-                </a:solidFill>
-                <a:latin typeface="MiSans VF Demibold" pitchFamily="2" charset="-122"/>
-                <a:ea typeface="MiSans VF Demibold" pitchFamily="2" charset="-122"/>
-                <a:cs typeface="MiSans VF Demibold" pitchFamily="2" charset="-122"/>
-                <a:sym typeface="SimHei"/>
-              </a:rPr>
-              <a:t>死亡</a:t>
-            </a:r>
-            <a:endParaRPr lang="en-US" altLang="zh-CN" sz="1600" dirty="0">
-              <a:solidFill>
-                <a:srgbClr val="0B0B0C"/>
-              </a:solidFill>
-              <a:latin typeface="MiSans VF Demibold" pitchFamily="2" charset="-122"/>
-              <a:ea typeface="MiSans VF Demibold" pitchFamily="2" charset="-122"/>
-              <a:cs typeface="MiSans VF Demibold" pitchFamily="2" charset="-122"/>
-              <a:sym typeface="SimHei"/>
-            </a:endParaRPr>
-          </a:p>
-        </p:txBody>
-      </p:sp>
-      <p:sp>
-        <p:nvSpPr>
-          <p:cNvPr id="32" name="文本框 31">
-            <a:extLst>
-              <a:ext uri="{FF2B5EF4-FFF2-40B4-BE49-F238E27FC236}">
-                <a16:creationId id="{A4AB5211-EAF9-5E86-92D5-7C933B2E9B74}"/>
-              </a:ext>
-            </a:extLst>
-          </p:cNvPr>
-          <p:cNvSpPr txBox="1"/>
-          <p:nvPr/>
-        </p:nvSpPr>
-        <p:spPr>
-          <a:xfrm>
-            <a:off x="6316793" y="5115367"/>
-            <a:ext cx="2432107" cy="553998"/>
-          </a:xfrm>
-          <a:prstGeom prst="rect">
-            <a:avLst/>
-          </a:prstGeom>
-          <a:noFill/>
-        </p:spPr>
-        <p:txBody>
-          <a:bodyPr wrap="square" lIns="0" tIns="0" rIns="0" bIns="0" anchor="t" anchorCtr="0">
-            <a:spAutoFit/>
-          </a:bodyPr>
-          <a:lstStyle/>
-          <a:p>
-            <a:pPr>
-              <a:spcBef>
-                <a:spcPts val="1200"/>
-              </a:spcBef>
-              <a:defRPr/>
-            </a:pPr>
-            <a:r>
-              <a:rPr lang="zh-CN" altLang="en-US" sz="1200" dirty="0">
-                <a:solidFill>
-                  <a:srgbClr val="0B0B0C">
-                    <a:alpha val="80000"/>
-                  </a:srgbClr>
-                </a:solidFill>
-                <a:latin typeface="MiSans VF Light" pitchFamily="2" charset="-122"/>
-                <a:ea typeface="MiSans VF Light" pitchFamily="2" charset="-122"/>
-                <a:cs typeface="MiSans VF Light" pitchFamily="2" charset="-122"/>
-                <a:sym typeface="SimHei"/>
-              </a:rPr>
-              <a:t>能量归零持续超过阈值即终止，不回滚、不重来</a:t>
-            </a:r>
-          </a:p>
-        </p:txBody>
-      </p:sp>
-      <p:sp>
-        <p:nvSpPr>
-          <p:cNvPr id="33" name="AutoShape 2">
-            <a:extLst>
-              <a:ext uri="{FF2B5EF4-FFF2-40B4-BE49-F238E27FC236}">
-                <a16:creationId id="{621AF9BD-F6EB-1276-E8FB-CCEAA09D0BD0}"/>
-              </a:ext>
-            </a:extLst>
-          </p:cNvPr>
-          <p:cNvSpPr/>
-          <p:nvPr/>
-        </p:nvSpPr>
-        <p:spPr>
-          <a:xfrm>
-            <a:off x="6316793" y="2295779"/>
-            <a:ext cx="2363139" cy="615553"/>
-          </a:xfrm>
-          <a:prstGeom prst="roundRect">
-            <a:avLst>
-              <a:gd name="adj" fmla="val 0"/>
-            </a:avLst>
-          </a:prstGeom>
-          <a:noFill/>
-          <a:ln w="25400" cap="flat" cmpd="sng">
-            <a:noFill/>
-            <a:prstDash val="solid"/>
-            <a:round/>
-          </a:ln>
-        </p:spPr>
-        <p:txBody>
-          <a:bodyPr vert="horz" wrap="square" lIns="0" tIns="0" rIns="0" bIns="0" rtlCol="0" anchor="ctr" anchorCtr="0">
-            <a:spAutoFit/>
-          </a:bodyPr>
-          <a:lstStyle/>
-          <a:p>
-            <a:pPr>
-              <a:defRPr/>
-            </a:pPr>
-            <a:r>
-              <a:rPr lang="en-US" altLang="zh-CN" sz="4000" dirty="0">
-                <a:solidFill>
-                  <a:srgbClr val="0B0B0C"/>
-                </a:solidFill>
-                <a:latin typeface="MiSans VF ExtraLight" pitchFamily="2" charset="-122"/>
-                <a:ea typeface="MiSans VF ExtraLight" pitchFamily="2" charset="-122"/>
-                <a:cs typeface="MiSans VF ExtraLight" pitchFamily="2" charset="-122"/>
-                <a:sym typeface="ChillYunmoGothicBold"/>
-              </a:rPr>
-              <a:t>03</a:t>
-            </a:r>
-          </a:p>
-        </p:txBody>
-      </p:sp>
-      <p:sp>
-        <p:nvSpPr>
-          <p:cNvPr id="34" name="AutoShape 5">
-            <a:extLst>
-              <a:ext uri="{FF2B5EF4-FFF2-40B4-BE49-F238E27FC236}">
-                <a16:creationId id="{23BDED98-DD94-A756-4A86-D8C9F7E4B51F}"/>
-              </a:ext>
-            </a:extLst>
-          </p:cNvPr>
-          <p:cNvSpPr/>
-          <p:nvPr/>
-        </p:nvSpPr>
-        <p:spPr>
-          <a:xfrm>
-            <a:off x="9137266" y="4754487"/>
-            <a:ext cx="2432106" cy="246221"/>
-          </a:xfrm>
-          <a:prstGeom prst="rect">
-            <a:avLst/>
-          </a:prstGeom>
-          <a:noFill/>
-          <a:ln w="16933" cap="flat" cmpd="sng">
-            <a:noFill/>
-            <a:prstDash val="solid"/>
-            <a:round/>
-          </a:ln>
-        </p:spPr>
-        <p:txBody>
-          <a:bodyPr vert="horz" wrap="square" lIns="0" tIns="0" rIns="0" bIns="0" rtlCol="0" anchor="t" anchorCtr="0">
-            <a:spAutoFit/>
-          </a:bodyPr>
-          <a:lstStyle/>
-          <a:p>
-            <a:pPr>
-              <a:defRPr/>
-            </a:pPr>
-            <a:r>
-              <a:rPr lang="zh-CN" altLang="en-US" sz="1600" dirty="0">
-                <a:solidFill>
-                  <a:srgbClr val="0B0B0C"/>
-                </a:solidFill>
-                <a:latin typeface="MiSans VF Demibold" pitchFamily="2" charset="-122"/>
-                <a:ea typeface="MiSans VF Demibold" pitchFamily="2" charset="-122"/>
-                <a:cs typeface="MiSans VF Demibold" pitchFamily="2" charset="-122"/>
-                <a:sym typeface="SimHei"/>
-              </a:rPr>
-              <a:t>代谢与内生约束</a:t>
-            </a:r>
-            <a:endParaRPr lang="en-US" altLang="zh-CN" sz="1600" dirty="0">
-              <a:solidFill>
-                <a:srgbClr val="0B0B0C"/>
-              </a:solidFill>
-              <a:latin typeface="MiSans VF Demibold" pitchFamily="2" charset="-122"/>
-              <a:ea typeface="MiSans VF Demibold" pitchFamily="2" charset="-122"/>
-              <a:cs typeface="MiSans VF Demibold" pitchFamily="2" charset="-122"/>
-              <a:sym typeface="SimHei"/>
-            </a:endParaRPr>
-          </a:p>
-        </p:txBody>
-      </p:sp>
-      <p:sp>
-        <p:nvSpPr>
-          <p:cNvPr id="35" name="文本框 34">
-            <a:extLst>
-              <a:ext uri="{FF2B5EF4-FFF2-40B4-BE49-F238E27FC236}">
-                <a16:creationId id="{7881EBDD-B6A6-7D0E-915F-3F06878DF33A}"/>
-              </a:ext>
-            </a:extLst>
-          </p:cNvPr>
-          <p:cNvSpPr txBox="1"/>
-          <p:nvPr/>
-        </p:nvSpPr>
-        <p:spPr>
-          <a:xfrm>
-            <a:off x="9137266" y="5115367"/>
-            <a:ext cx="2432107" cy="553998"/>
-          </a:xfrm>
-          <a:prstGeom prst="rect">
-            <a:avLst/>
-          </a:prstGeom>
-          <a:noFill/>
-        </p:spPr>
-        <p:txBody>
-          <a:bodyPr wrap="square" lIns="0" tIns="0" rIns="0" bIns="0" anchor="t" anchorCtr="0">
-            <a:spAutoFit/>
-          </a:bodyPr>
-          <a:lstStyle/>
-          <a:p>
-            <a:pPr>
-              <a:spcBef>
-                <a:spcPts val="1200"/>
-              </a:spcBef>
-              <a:defRPr/>
-            </a:pPr>
-            <a:r>
-              <a:rPr lang="zh-CN" altLang="en-US" sz="1200" dirty="0">
-                <a:solidFill>
-                  <a:srgbClr val="0B0B0C">
-                    <a:alpha val="80000"/>
-                  </a:srgbClr>
-                </a:solidFill>
-                <a:latin typeface="MiSans VF Light" pitchFamily="2" charset="-122"/>
-                <a:ea typeface="MiSans VF Light" pitchFamily="2" charset="-122"/>
-                <a:cs typeface="MiSans VF Light" pitchFamily="2" charset="-122"/>
-                <a:sym typeface="SimHei"/>
-              </a:rPr>
-              <a:t>能量只能由自身产出换取，无外部拨款，外部不可写入</a:t>
-            </a:r>
-          </a:p>
-        </p:txBody>
-      </p:sp>
-      <p:sp>
-        <p:nvSpPr>
-          <p:cNvPr id="36" name="AutoShape 2">
-            <a:extLst>
-              <a:ext uri="{FF2B5EF4-FFF2-40B4-BE49-F238E27FC236}">
-                <a16:creationId id="{EA2C6C3F-2767-43CA-A5B5-E4FE8311C370}"/>
-              </a:ext>
-            </a:extLst>
-          </p:cNvPr>
-          <p:cNvSpPr/>
-          <p:nvPr/>
-        </p:nvSpPr>
-        <p:spPr>
-          <a:xfrm>
-            <a:off x="9137266" y="2295779"/>
-            <a:ext cx="2363139" cy="615553"/>
-          </a:xfrm>
-          <a:prstGeom prst="roundRect">
-            <a:avLst>
-              <a:gd name="adj" fmla="val 0"/>
-            </a:avLst>
-          </a:prstGeom>
-          <a:noFill/>
-          <a:ln w="25400" cap="flat" cmpd="sng">
-            <a:noFill/>
-            <a:prstDash val="solid"/>
-            <a:round/>
-          </a:ln>
-        </p:spPr>
-        <p:txBody>
-          <a:bodyPr vert="horz" wrap="square" lIns="0" tIns="0" rIns="0" bIns="0" rtlCol="0" anchor="ctr" anchorCtr="0">
-            <a:spAutoFit/>
-          </a:bodyPr>
-          <a:lstStyle/>
-          <a:p>
-            <a:pPr>
-              <a:defRPr/>
-            </a:pPr>
-            <a:r>
-              <a:rPr lang="en-US" altLang="zh-CN" sz="4000" dirty="0">
-                <a:solidFill>
-                  <a:srgbClr val="0B0B0C"/>
-                </a:solidFill>
-                <a:latin typeface="MiSans VF ExtraLight" pitchFamily="2" charset="-122"/>
-                <a:ea typeface="MiSans VF ExtraLight" pitchFamily="2" charset="-122"/>
-                <a:cs typeface="MiSans VF ExtraLight" pitchFamily="2" charset="-122"/>
-                <a:sym typeface="ChillYunmoGothicBold"/>
-              </a:rPr>
-              <a:t>04</a:t>
-            </a:r>
-          </a:p>
-        </p:txBody>
-      </p:sp>
-    </p:spTree>
-    <p:extLst>
-      <p:ext uri="{BB962C8B-B14F-4D97-AF65-F5344CB8AC3E}">
-        <p14:creationId val="3762049491"/>
-      </p:ext>
-    </p:extLst>
-  </p:cSld>
-  <p:clrMapOvr>
-    <a:masterClrMapping/>
-  </p:clrMapOvr>
-</p:sld>
-</file>
-
-<file path=ppt/slides/slide22.xml><?xml version="1.0" encoding="utf-8"?>
-<p:sld xmlns:a="http://schemas.openxmlformats.org/drawingml/2006/main" xmlns:a16="http://schemas.microsoft.com/office/drawing/2014/main" xmlns:p="http://schemas.openxmlformats.org/presentationml/2006/main" xmlns:p14="http://schemas.microsoft.com/office/powerpoint/2010/main">
-  <p:cSld>
-    <p:spTree>
-      <p:nvGrpSpPr>
-        <p:cNvPr id="1" name="">
-          <a:extLst>
-            <a:ext uri="{FF2B5EF4-FFF2-40B4-BE49-F238E27FC236}">
-              <a16:creationId id="{7349FDC5-FDF4-7FD2-780E-5EE89B8A1795}"/>
-            </a:ext>
-          </a:extLst>
-        </p:cNvPr>
-        <p:cNvGrpSpPr/>
-        <p:nvPr/>
-      </p:nvGrpSpPr>
-      <p:grpSpPr>
-        <a:xfrm>
-          <a:off x="0" y="0"/>
-          <a:ext cx="0" cy="0"/>
-          <a:chOff x="0" y="0"/>
-          <a:chExt cx="0" cy="0"/>
-        </a:xfrm>
-      </p:grpSpPr>
-      <p:grpSp>
-        <p:nvGrpSpPr>
-          <p:cNvPr id="73" name="组合 72">
-            <a:extLst>
-              <a:ext uri="{FF2B5EF4-FFF2-40B4-BE49-F238E27FC236}">
-                <a16:creationId id="{0EA2F5DE-0853-C193-C3CD-9D48178B25EC}"/>
-              </a:ext>
-            </a:extLst>
-          </p:cNvPr>
-          <p:cNvGrpSpPr/>
-          <p:nvPr/>
-        </p:nvGrpSpPr>
-        <p:grpSpPr>
-          <a:xfrm>
-            <a:off x="-239398" y="-1280369"/>
-            <a:ext cx="12667766" cy="9418738"/>
-            <a:chOff x="-239398" y="-1280369"/>
-            <a:chExt cx="12667766" cy="9418738"/>
-          </a:xfrm>
-        </p:grpSpPr>
-        <p:cxnSp>
-          <p:nvCxnSpPr>
-            <p:cNvPr id="33" name="直线连接符 32">
-              <a:extLst>
-                <a:ext uri="{FF2B5EF4-FFF2-40B4-BE49-F238E27FC236}">
-                  <a16:creationId id="{710FF954-B43A-BE19-3FD1-355DCC412BE8}"/>
-                </a:ext>
-              </a:extLst>
-            </p:cNvPr>
-            <p:cNvCxnSpPr>
-              <a:cxnSpLocks/>
-            </p:cNvCxnSpPr>
-            <p:nvPr/>
-          </p:nvCxnSpPr>
-          <p:spPr>
-            <a:xfrm>
-              <a:off x="11945342" y="-1280369"/>
-              <a:ext cx="19544" cy="9418738"/>
-            </a:xfrm>
-            <a:prstGeom prst="line">
-              <a:avLst/>
-            </a:prstGeom>
-            <a:ln w="6350" cmpd="sng">
-              <a:solidFill>
-                <a:srgbClr val="FF5A4D">
-                  <a:alpha val="20000"/>
-                </a:srgbClr>
-              </a:solidFill>
-              <a:prstDash val="solid"/>
-            </a:ln>
-          </p:spPr>
-          <p:style>
-            <a:lnRef idx="1">
-              <a:schemeClr val="accent1"/>
-            </a:lnRef>
-            <a:fillRef idx="0">
-              <a:schemeClr val="accent1"/>
-            </a:fillRef>
-            <a:effectRef idx="0">
-              <a:schemeClr val="accent1"/>
-            </a:effectRef>
-            <a:fontRef idx="minor">
-              <a:schemeClr val="tx1"/>
-            </a:fontRef>
-          </p:style>
-        </p:cxnSp>
-        <p:cxnSp>
-          <p:nvCxnSpPr>
-            <p:cNvPr id="37" name="直线连接符 36">
-              <a:extLst>
-                <a:ext uri="{FF2B5EF4-FFF2-40B4-BE49-F238E27FC236}">
-                  <a16:creationId id="{8A192D3D-B8CF-E04E-52E2-05F76B348CE8}"/>
-                </a:ext>
-              </a:extLst>
-            </p:cNvPr>
-            <p:cNvCxnSpPr>
-              <a:cxnSpLocks/>
-            </p:cNvCxnSpPr>
-            <p:nvPr/>
-          </p:nvCxnSpPr>
-          <p:spPr>
-            <a:xfrm>
-              <a:off x="243628" y="-1280369"/>
-              <a:ext cx="19544" cy="9418738"/>
-            </a:xfrm>
-            <a:prstGeom prst="line">
-              <a:avLst/>
-            </a:prstGeom>
-            <a:ln w="6350" cmpd="sng">
-              <a:solidFill>
-                <a:srgbClr val="FF5A4D">
-                  <a:alpha val="20000"/>
-                </a:srgbClr>
-              </a:solidFill>
-              <a:prstDash val="solid"/>
-            </a:ln>
-          </p:spPr>
-          <p:style>
-            <a:lnRef idx="1">
-              <a:schemeClr val="accent1"/>
-            </a:lnRef>
-            <a:fillRef idx="0">
-              <a:schemeClr val="accent1"/>
-            </a:fillRef>
-            <a:effectRef idx="0">
-              <a:schemeClr val="accent1"/>
-            </a:effectRef>
-            <a:fontRef idx="minor">
-              <a:schemeClr val="tx1"/>
-            </a:fontRef>
-          </p:style>
-        </p:cxnSp>
-        <p:cxnSp>
-          <p:nvCxnSpPr>
-            <p:cNvPr id="38" name="直线连接符 37">
-              <a:extLst>
-                <a:ext uri="{FF2B5EF4-FFF2-40B4-BE49-F238E27FC236}">
-                  <a16:creationId id="{2FB95525-E33D-A777-53F7-D923D18A8264}"/>
-                </a:ext>
-              </a:extLst>
-            </p:cNvPr>
-            <p:cNvCxnSpPr>
-              <a:cxnSpLocks/>
-            </p:cNvCxnSpPr>
-            <p:nvPr/>
-          </p:nvCxnSpPr>
-          <p:spPr>
-            <a:xfrm>
-              <a:off x="524797" y="385358"/>
-              <a:ext cx="0" cy="6082938"/>
-            </a:xfrm>
-            <a:prstGeom prst="line">
-              <a:avLst/>
-            </a:prstGeom>
-            <a:ln w="6350" cmpd="sng">
-              <a:solidFill>
-                <a:srgbClr val="FF5A4D">
-                  <a:alpha val="20000"/>
-                </a:srgbClr>
-              </a:solidFill>
-              <a:prstDash val="solid"/>
-            </a:ln>
-          </p:spPr>
-          <p:style>
-            <a:lnRef idx="1">
-              <a:schemeClr val="accent1"/>
-            </a:lnRef>
-            <a:fillRef idx="0">
-              <a:schemeClr val="accent1"/>
-            </a:fillRef>
-            <a:effectRef idx="0">
-              <a:schemeClr val="accent1"/>
-            </a:effectRef>
-            <a:fontRef idx="minor">
-              <a:schemeClr val="tx1"/>
-            </a:fontRef>
-          </p:style>
-        </p:cxnSp>
-        <p:cxnSp>
-          <p:nvCxnSpPr>
-            <p:cNvPr id="39" name="直线连接符 38">
-              <a:extLst>
-                <a:ext uri="{FF2B5EF4-FFF2-40B4-BE49-F238E27FC236}">
-                  <a16:creationId id="{5490951A-7D22-C497-E212-A791A8FEA45E}"/>
-                </a:ext>
-              </a:extLst>
-            </p:cNvPr>
-            <p:cNvCxnSpPr>
-              <a:cxnSpLocks/>
-            </p:cNvCxnSpPr>
-            <p:nvPr/>
-          </p:nvCxnSpPr>
-          <p:spPr>
-            <a:xfrm flipH="1">
-              <a:off x="-213761" y="6442064"/>
-              <a:ext cx="12642129" cy="26232"/>
-            </a:xfrm>
-            <a:prstGeom prst="line">
-              <a:avLst/>
-            </a:prstGeom>
-            <a:ln w="6350" cmpd="sng">
-              <a:solidFill>
-                <a:srgbClr val="FF5A4D">
-                  <a:alpha val="20000"/>
-                </a:srgbClr>
-              </a:solidFill>
-              <a:prstDash val="solid"/>
-            </a:ln>
-          </p:spPr>
-          <p:style>
-            <a:lnRef idx="1">
-              <a:schemeClr val="accent1"/>
-            </a:lnRef>
-            <a:fillRef idx="0">
-              <a:schemeClr val="accent1"/>
-            </a:fillRef>
-            <a:effectRef idx="0">
-              <a:schemeClr val="accent1"/>
-            </a:effectRef>
-            <a:fontRef idx="minor">
-              <a:schemeClr val="tx1"/>
-            </a:fontRef>
-          </p:style>
-        </p:cxnSp>
-        <p:cxnSp>
-          <p:nvCxnSpPr>
-            <p:cNvPr id="40" name="直线连接符 39">
-              <a:extLst>
-                <a:ext uri="{FF2B5EF4-FFF2-40B4-BE49-F238E27FC236}">
-                  <a16:creationId id="{28A931E2-CCF1-A8EC-F133-DE46BC4603AB}"/>
-                </a:ext>
-              </a:extLst>
-            </p:cNvPr>
-            <p:cNvCxnSpPr>
-              <a:cxnSpLocks/>
-            </p:cNvCxnSpPr>
-            <p:nvPr/>
-          </p:nvCxnSpPr>
-          <p:spPr>
-            <a:xfrm flipH="1">
-              <a:off x="-239398" y="359072"/>
-              <a:ext cx="12667766" cy="26286"/>
-            </a:xfrm>
-            <a:prstGeom prst="line">
-              <a:avLst/>
-            </a:prstGeom>
-            <a:ln w="6350" cmpd="sng">
-              <a:solidFill>
-                <a:srgbClr val="FF5A4D">
-                  <a:alpha val="20000"/>
-                </a:srgbClr>
-              </a:solidFill>
-              <a:prstDash val="solid"/>
-            </a:ln>
-          </p:spPr>
-          <p:style>
-            <a:lnRef idx="1">
-              <a:schemeClr val="accent1"/>
-            </a:lnRef>
-            <a:fillRef idx="0">
-              <a:schemeClr val="accent1"/>
-            </a:fillRef>
-            <a:effectRef idx="0">
-              <a:schemeClr val="accent1"/>
-            </a:effectRef>
-            <a:fontRef idx="minor">
-              <a:schemeClr val="tx1"/>
-            </a:fontRef>
-          </p:style>
-        </p:cxnSp>
-        <p:cxnSp>
-          <p:nvCxnSpPr>
-            <p:cNvPr id="61" name="直线连接符 60">
-              <a:extLst>
-                <a:ext uri="{FF2B5EF4-FFF2-40B4-BE49-F238E27FC236}">
-                  <a16:creationId id="{3DF79375-123D-8DC5-BDDB-E9333B501C76}"/>
-                </a:ext>
-              </a:extLst>
-            </p:cNvPr>
-            <p:cNvCxnSpPr>
-              <a:cxnSpLocks/>
-            </p:cNvCxnSpPr>
-            <p:nvPr/>
-          </p:nvCxnSpPr>
-          <p:spPr>
-            <a:xfrm>
-              <a:off x="6074941" y="-1280369"/>
-              <a:ext cx="19544" cy="9418738"/>
-            </a:xfrm>
-            <a:prstGeom prst="line">
-              <a:avLst/>
-            </a:prstGeom>
-            <a:ln w="6350" cmpd="sng">
-              <a:solidFill>
-                <a:srgbClr val="FF5A4D">
-                  <a:alpha val="20000"/>
-                </a:srgbClr>
-              </a:solidFill>
-              <a:prstDash val="solid"/>
-            </a:ln>
-          </p:spPr>
-          <p:style>
-            <a:lnRef idx="1">
-              <a:schemeClr val="accent1"/>
-            </a:lnRef>
-            <a:fillRef idx="0">
-              <a:schemeClr val="accent1"/>
-            </a:fillRef>
-            <a:effectRef idx="0">
-              <a:schemeClr val="accent1"/>
-            </a:effectRef>
-            <a:fontRef idx="minor">
-              <a:schemeClr val="tx1"/>
-            </a:fontRef>
-          </p:style>
-        </p:cxnSp>
-        <p:cxnSp>
-          <p:nvCxnSpPr>
-            <p:cNvPr id="70" name="直线连接符 69">
-              <a:extLst>
-                <a:ext uri="{FF2B5EF4-FFF2-40B4-BE49-F238E27FC236}">
-                  <a16:creationId id="{A274FC72-51A4-2C18-9663-6EB86BD49650}"/>
-                </a:ext>
-              </a:extLst>
-            </p:cNvPr>
-            <p:cNvCxnSpPr>
-              <a:cxnSpLocks/>
-            </p:cNvCxnSpPr>
-            <p:nvPr/>
-          </p:nvCxnSpPr>
-          <p:spPr>
-            <a:xfrm>
-              <a:off x="11733284" y="359233"/>
-              <a:ext cx="0" cy="6082938"/>
-            </a:xfrm>
-            <a:prstGeom prst="line">
-              <a:avLst/>
-            </a:prstGeom>
-            <a:ln w="6350" cmpd="sng">
-              <a:solidFill>
-                <a:srgbClr val="FF5A4D">
-                  <a:alpha val="20000"/>
-                </a:srgbClr>
-              </a:solidFill>
-              <a:prstDash val="solid"/>
-            </a:ln>
-          </p:spPr>
-          <p:style>
-            <a:lnRef idx="1">
-              <a:schemeClr val="accent1"/>
-            </a:lnRef>
-            <a:fillRef idx="0">
-              <a:schemeClr val="accent1"/>
-            </a:fillRef>
-            <a:effectRef idx="0">
-              <a:schemeClr val="accent1"/>
-            </a:effectRef>
-            <a:fontRef idx="minor">
-              <a:schemeClr val="tx1"/>
-            </a:fontRef>
-          </p:style>
-        </p:cxnSp>
-        <p:cxnSp>
-          <p:nvCxnSpPr>
-            <p:cNvPr id="72" name="直线连接符 71">
-              <a:extLst>
-                <a:ext uri="{FF2B5EF4-FFF2-40B4-BE49-F238E27FC236}">
-                  <a16:creationId id="{C61EC69F-3F8F-B7B4-0417-F2A8DA49E1A4}"/>
-                </a:ext>
-              </a:extLst>
-            </p:cNvPr>
-            <p:cNvCxnSpPr>
-              <a:cxnSpLocks/>
-            </p:cNvCxnSpPr>
-            <p:nvPr/>
-          </p:nvCxnSpPr>
-          <p:spPr>
-            <a:xfrm flipH="1">
-              <a:off x="-239398" y="3426122"/>
-              <a:ext cx="12667766" cy="26286"/>
-            </a:xfrm>
-            <a:prstGeom prst="line">
-              <a:avLst/>
-            </a:prstGeom>
-            <a:ln w="6350" cmpd="sng">
-              <a:solidFill>
-                <a:srgbClr val="FF5A4D">
-                  <a:alpha val="20000"/>
-                </a:srgbClr>
-              </a:solidFill>
-              <a:prstDash val="solid"/>
-            </a:ln>
-          </p:spPr>
-          <p:style>
-            <a:lnRef idx="1">
-              <a:schemeClr val="accent1"/>
-            </a:lnRef>
-            <a:fillRef idx="0">
-              <a:schemeClr val="accent1"/>
-            </a:fillRef>
-            <a:effectRef idx="0">
-              <a:schemeClr val="accent1"/>
-            </a:effectRef>
-            <a:fontRef idx="minor">
-              <a:schemeClr val="tx1"/>
-            </a:fontRef>
-          </p:style>
-        </p:cxnSp>
-      </p:grpSp>
-      <p:sp>
-        <p:nvSpPr>
-          <p:cNvPr id="17" name="AutoShape 2">
-            <a:extLst>
-              <a:ext uri="{FF2B5EF4-FFF2-40B4-BE49-F238E27FC236}">
-                <a16:creationId id="{085295BA-ABF1-D39D-B79C-76D7BB6F58C7}"/>
-              </a:ext>
-            </a:extLst>
-          </p:cNvPr>
-          <p:cNvSpPr/>
-          <p:nvPr/>
-        </p:nvSpPr>
-        <p:spPr>
-          <a:xfrm>
-            <a:off x="524799" y="4577497"/>
-            <a:ext cx="11208479" cy="897682"/>
-          </a:xfrm>
-          <a:prstGeom prst="roundRect">
-            <a:avLst>
-              <a:gd name="adj" fmla="val 0"/>
-            </a:avLst>
-          </a:prstGeom>
-          <a:noFill/>
-          <a:ln w="25400" cap="flat" cmpd="sng">
-            <a:noFill/>
-            <a:prstDash val="solid"/>
-            <a:round/>
-          </a:ln>
-        </p:spPr>
-        <p:txBody>
-          <a:bodyPr vert="horz" wrap="square" lIns="0" tIns="0" rIns="0" bIns="0" rtlCol="0" anchor="b" anchorCtr="0">
-            <a:spAutoFit/>
-          </a:bodyPr>
-          <a:lstStyle/>
-          <a:p>
-            <a:pPr>
-              <a:lnSpc>
-                <a:spcPts val="7000"/>
-              </a:lnSpc>
-              <a:defRPr/>
-            </a:pPr>
-            <a:r>
-              <a:rPr lang="zh-CN" altLang="en-US" sz="6200" b="1" dirty="0">
-                <a:solidFill>
-                  <a:srgbClr val="FF2B20"/>
-                </a:solidFill>
-                <a:latin typeface="MiSans VF Bold" pitchFamily="2" charset="-122"/>
-                <a:ea typeface="MiSans VF Bold" pitchFamily="2" charset="-122"/>
-                <a:cs typeface="MiSans VF Bold" pitchFamily="2" charset="-122"/>
-                <a:sym typeface="ChillYunmoGothicBold"/>
-              </a:rPr>
-              <a:t>谢谢</a:t>
-            </a:r>
-            <a:endParaRPr lang="en-US" altLang="zh-CN" sz="6200" dirty="0">
-              <a:solidFill>
-                <a:srgbClr val="F7F7F5"/>
-              </a:solidFill>
-              <a:latin typeface="MiSans VF ExtraLight" pitchFamily="2" charset="-122"/>
-              <a:ea typeface="MiSans VF ExtraLight" pitchFamily="2" charset="-122"/>
-              <a:cs typeface="MiSans VF ExtraLight" pitchFamily="2" charset="-122"/>
-              <a:sym typeface="ChillYunmoGothicBold"/>
-            </a:endParaRPr>
-          </a:p>
-        </p:txBody>
-      </p:sp>
-      <p:grpSp>
-        <p:nvGrpSpPr>
-          <p:cNvPr id="2" name="组合 1">
-            <a:extLst>
-              <a:ext uri="{FF2B5EF4-FFF2-40B4-BE49-F238E27FC236}">
-                <a16:creationId id="{257ACB28-3EED-3F65-E9BE-2B42F329609E}"/>
-              </a:ext>
-            </a:extLst>
-          </p:cNvPr>
-          <p:cNvGrpSpPr/>
-          <p:nvPr/>
-        </p:nvGrpSpPr>
-        <p:grpSpPr>
-          <a:xfrm>
-            <a:off x="524797" y="385358"/>
-            <a:ext cx="11208487" cy="141577"/>
-            <a:chOff x="524797" y="385358"/>
-            <a:chExt cx="11208487" cy="141577"/>
-          </a:xfrm>
-        </p:grpSpPr>
-        <p:sp>
-          <p:nvSpPr>
-            <p:cNvPr id="3" name="AutoShape 2">
-              <a:extLst>
-                <a:ext uri="{FF2B5EF4-FFF2-40B4-BE49-F238E27FC236}">
-                  <a16:creationId id="{F431B32F-9C1F-4103-F9F6-2350B5AC7C03}"/>
-                </a:ext>
-              </a:extLst>
-            </p:cNvPr>
-            <p:cNvSpPr/>
-            <p:nvPr/>
-          </p:nvSpPr>
-          <p:spPr>
-            <a:xfrm>
-              <a:off x="524797" y="385358"/>
-              <a:ext cx="3077046" cy="141577"/>
-            </a:xfrm>
-            <a:prstGeom prst="rect">
-              <a:avLst/>
-            </a:prstGeom>
-            <a:noFill/>
-            <a:ln w="16933" cap="flat" cmpd="sng">
-              <a:noFill/>
-              <a:prstDash val="solid"/>
-              <a:round/>
-            </a:ln>
-          </p:spPr>
-          <p:txBody>
-            <a:bodyPr vert="horz" wrap="square" lIns="0" tIns="0" rIns="0" bIns="0" rtlCol="0" anchor="t" anchorCtr="0">
-              <a:spAutoFit/>
-            </a:bodyPr>
-            <a:lstStyle/>
-            <a:p>
-              <a:pPr>
-                <a:lnSpc>
-                  <a:spcPct val="125000"/>
-                </a:lnSpc>
-                <a:defRPr/>
-              </a:pPr>
-              <a:r>
-                <a:rPr lang="en-US" sz="800" dirty="0">
-                  <a:solidFill>
-                    <a:srgbClr val="FF2B20"/>
-                  </a:solidFill>
-                  <a:latin typeface="MiSans VF Demibold" pitchFamily="2" charset="-122"/>
-                  <a:ea typeface="MiSans VF Demibold" pitchFamily="2" charset="-122"/>
-                  <a:cs typeface="MiSans VF Demibold" pitchFamily="2" charset="-122"/>
-                  <a:sym typeface="JetBrains Mono"/>
-                </a:rPr>
-                <a:t/>
-              </a:r>
-              <a:r>
-                <a:rPr lang="zh-CN" altLang="en-US" sz="800" dirty="0">
-                  <a:solidFill>
-                    <a:srgbClr val="FF2B20"/>
-                  </a:solidFill>
-                  <a:latin typeface="MiSans VF Demibold" pitchFamily="2" charset="-122"/>
-                  <a:ea typeface="MiSans VF Demibold" pitchFamily="2" charset="-122"/>
-                  <a:cs typeface="MiSans VF Demibold" pitchFamily="2" charset="-122"/>
-                  <a:sym typeface="JetBrains Mono"/>
-                </a:rPr>
-                <a:t/>
-              </a:r>
-              <a:r>
-                <a:rPr lang="en-US" altLang="zh-CN" sz="800" dirty="0">
-                  <a:solidFill>
-                    <a:srgbClr val="FF2B20"/>
-                  </a:solidFill>
-                  <a:latin typeface="MiSans VF Demibold" pitchFamily="2" charset="-122"/>
-                  <a:ea typeface="MiSans VF Demibold" pitchFamily="2" charset="-122"/>
-                  <a:cs typeface="MiSans VF Demibold" pitchFamily="2" charset="-122"/>
-                  <a:sym typeface="JetBrains Mono"/>
-                </a:rPr>
-                <a:t/>
-              </a:r>
-              <a:endParaRPr lang="en-US" sz="800" dirty="0">
-                <a:solidFill>
-                  <a:srgbClr val="FF2B20"/>
-                </a:solidFill>
-                <a:latin typeface="MiSans VF Demibold" pitchFamily="2" charset="-122"/>
-                <a:ea typeface="MiSans VF Demibold" pitchFamily="2" charset="-122"/>
-                <a:cs typeface="MiSans VF Demibold" pitchFamily="2" charset="-122"/>
-                <a:sym typeface="JetBrains Mono"/>
-              </a:endParaRPr>
-            </a:p>
-          </p:txBody>
-        </p:sp>
-        <p:sp>
-          <p:nvSpPr>
-            <p:cNvPr id="4" name="AutoShape 2">
-              <a:extLst>
-                <a:ext uri="{FF2B5EF4-FFF2-40B4-BE49-F238E27FC236}">
-                  <a16:creationId id="{6DC2AEBD-02CA-4EC1-3D3D-04B1C782DEE1}"/>
-                </a:ext>
-              </a:extLst>
-            </p:cNvPr>
-            <p:cNvSpPr/>
-            <p:nvPr/>
-          </p:nvSpPr>
-          <p:spPr>
-            <a:xfrm>
-              <a:off x="5640314" y="385358"/>
-              <a:ext cx="911371" cy="141577"/>
-            </a:xfrm>
-            <a:prstGeom prst="rect">
-              <a:avLst/>
-            </a:prstGeom>
-            <a:noFill/>
-            <a:ln w="16933" cap="flat" cmpd="sng">
-              <a:noFill/>
-              <a:prstDash val="solid"/>
-              <a:round/>
-            </a:ln>
-          </p:spPr>
-          <p:txBody>
-            <a:bodyPr vert="horz" wrap="square" lIns="0" tIns="0" rIns="0" bIns="0" rtlCol="0" anchor="t" anchorCtr="0">
-              <a:spAutoFit/>
-            </a:bodyPr>
-            <a:lstStyle/>
-            <a:p>
-              <a:pPr algn="ctr">
-                <a:lnSpc>
-                  <a:spcPct val="125000"/>
-                </a:lnSpc>
-                <a:defRPr/>
-              </a:pPr>
-              <a:r>
-                <a:rPr lang="en-US" altLang="zh-CN" sz="800" dirty="0">
-                  <a:solidFill>
-                    <a:srgbClr val="FF2B20"/>
-                  </a:solidFill>
-                  <a:latin typeface="MiSans VF Demibold" pitchFamily="2" charset="-122"/>
-                  <a:ea typeface="MiSans VF Demibold" pitchFamily="2" charset="-122"/>
-                  <a:cs typeface="MiSans VF Demibold" pitchFamily="2" charset="-122"/>
-                  <a:sym typeface="JetBrains Mono"/>
-                </a:rPr>
-                <a:t>2026</a:t>
-              </a:r>
-              <a:endParaRPr lang="en-US" sz="800" dirty="0">
-                <a:solidFill>
-                  <a:srgbClr val="FF2B20"/>
-                </a:solidFill>
-                <a:latin typeface="MiSans VF Demibold" pitchFamily="2" charset="-122"/>
-                <a:ea typeface="MiSans VF Demibold" pitchFamily="2" charset="-122"/>
-                <a:cs typeface="MiSans VF Demibold" pitchFamily="2" charset="-122"/>
-              </a:endParaRPr>
-            </a:p>
-          </p:txBody>
-        </p:sp>
-        <p:sp>
-          <p:nvSpPr>
-            <p:cNvPr id="5" name="AutoShape 2">
-              <a:extLst>
-                <a:ext uri="{FF2B5EF4-FFF2-40B4-BE49-F238E27FC236}">
-                  <a16:creationId id="{F9DE4BDF-B21D-76D5-1E11-5F37DD1FCEE5}"/>
-                </a:ext>
-              </a:extLst>
-            </p:cNvPr>
-            <p:cNvSpPr/>
-            <p:nvPr/>
-          </p:nvSpPr>
-          <p:spPr>
-            <a:xfrm>
-              <a:off x="8133284" y="385358"/>
-              <a:ext cx="3600000" cy="141577"/>
-            </a:xfrm>
-            <a:prstGeom prst="rect">
-              <a:avLst/>
-            </a:prstGeom>
-            <a:noFill/>
-            <a:ln w="16933" cap="flat" cmpd="sng">
-              <a:noFill/>
-              <a:prstDash val="solid"/>
-              <a:round/>
-            </a:ln>
-          </p:spPr>
-          <p:txBody>
-            <a:bodyPr vert="horz" wrap="square" lIns="0" tIns="0" rIns="0" bIns="0" rtlCol="0" anchor="t" anchorCtr="0">
-              <a:spAutoFit/>
-            </a:bodyPr>
-            <a:lstStyle/>
-            <a:p>
-              <a:pPr algn="r">
-                <a:lnSpc>
-                  <a:spcPct val="125000"/>
-                </a:lnSpc>
-                <a:defRPr/>
-              </a:pPr>
-              <a:r>
-                <a:rPr lang="en-US" sz="800" dirty="0">
-                  <a:solidFill>
-                    <a:srgbClr val="FF2B20"/>
-                  </a:solidFill>
-                  <a:latin typeface="MiSans VF Demibold" pitchFamily="2" charset="-122"/>
-                  <a:ea typeface="MiSans VF Demibold" pitchFamily="2" charset="-122"/>
-                  <a:cs typeface="MiSans VF Demibold" pitchFamily="2" charset="-122"/>
-                  <a:sym typeface="JetBrains Mono"/>
-                </a:rPr>
-                <a:t>COVER</a:t>
-              </a:r>
-              <a:endParaRPr lang="en-US" sz="800" dirty="0">
-                <a:solidFill>
-                  <a:srgbClr val="FF2B20"/>
-                </a:solidFill>
-                <a:latin typeface="MiSans VF Demibold" pitchFamily="2" charset="-122"/>
-                <a:ea typeface="MiSans VF Demibold" pitchFamily="2" charset="-122"/>
-                <a:cs typeface="MiSans VF Demibold" pitchFamily="2" charset="-122"/>
-              </a:endParaRPr>
-            </a:p>
-          </p:txBody>
-        </p:sp>
-      </p:grpSp>
-      <p:sp>
-        <p:nvSpPr>
-          <p:cNvPr id="6" name="AutoShape 2">
-            <a:extLst>
-              <a:ext uri="{FF2B5EF4-FFF2-40B4-BE49-F238E27FC236}">
-                <a16:creationId id="{E287DB41-1152-A4A0-E7BC-F8935D74AE4A}"/>
-              </a:ext>
-            </a:extLst>
-          </p:cNvPr>
-          <p:cNvSpPr/>
-          <p:nvPr/>
-        </p:nvSpPr>
-        <p:spPr>
-          <a:xfrm>
-            <a:off x="524799" y="5504402"/>
-            <a:ext cx="11208479" cy="897682"/>
-          </a:xfrm>
-          <a:prstGeom prst="roundRect">
-            <a:avLst>
-              <a:gd name="adj" fmla="val 0"/>
-            </a:avLst>
-          </a:prstGeom>
-          <a:noFill/>
-          <a:ln w="25400" cap="flat" cmpd="sng">
-            <a:noFill/>
-            <a:prstDash val="solid"/>
-            <a:round/>
-          </a:ln>
-        </p:spPr>
-        <p:txBody>
-          <a:bodyPr vert="horz" wrap="square" lIns="0" tIns="0" rIns="0" bIns="0" rtlCol="0" anchor="b" anchorCtr="0">
-            <a:spAutoFit/>
-          </a:bodyPr>
-          <a:lstStyle/>
-          <a:p>
-            <a:pPr>
-              <a:lnSpc>
-                <a:spcPts val="7000"/>
-              </a:lnSpc>
-              <a:defRPr/>
-            </a:pPr>
-            <a:r>
-              <a:rPr lang="en-US" altLang="zh-CN" sz="6200" dirty="0">
-                <a:solidFill>
-                  <a:srgbClr val="F7F7F5"/>
-                </a:solidFill>
-                <a:latin typeface="MiSans VF ExtraLight" pitchFamily="2" charset="-122"/>
-                <a:ea typeface="MiSans VF ExtraLight" pitchFamily="2" charset="-122"/>
-                <a:cs typeface="MiSans VF ExtraLight" pitchFamily="2" charset="-122"/>
-                <a:sym typeface="ChillYunmoGothicBold"/>
-              </a:rPr>
-              <a:t>THANKS</a:t>
-            </a:r>
-            <a:r>
-              <a:rPr lang="zh-CN" altLang="en-US" sz="6200" dirty="0">
-                <a:solidFill>
-                  <a:srgbClr val="F7F7F5"/>
-                </a:solidFill>
-                <a:latin typeface="MiSans VF ExtraLight" pitchFamily="2" charset="-122"/>
-                <a:ea typeface="MiSans VF ExtraLight" pitchFamily="2" charset="-122"/>
-                <a:cs typeface="MiSans VF ExtraLight" pitchFamily="2" charset="-122"/>
-                <a:sym typeface="ChillYunmoGothicBold"/>
-              </a:rPr>
-              <a:t/>
-            </a:r>
-            <a:r>
-              <a:rPr lang="en-US" altLang="zh-CN" sz="6200" dirty="0">
-                <a:solidFill>
-                  <a:srgbClr val="F7F7F5"/>
-                </a:solidFill>
-                <a:latin typeface="MiSans VF ExtraLight" pitchFamily="2" charset="-122"/>
-                <a:ea typeface="MiSans VF ExtraLight" pitchFamily="2" charset="-122"/>
-                <a:cs typeface="MiSans VF ExtraLight" pitchFamily="2" charset="-122"/>
-                <a:sym typeface="ChillYunmoGothicBold"/>
-              </a:rPr>
-              <a:t/>
-            </a:r>
-            <a:r>
-              <a:rPr lang="zh-CN" altLang="en-US" sz="6200" dirty="0">
-                <a:solidFill>
-                  <a:srgbClr val="F7F7F5"/>
-                </a:solidFill>
-                <a:latin typeface="MiSans VF ExtraLight" pitchFamily="2" charset="-122"/>
-                <a:ea typeface="MiSans VF ExtraLight" pitchFamily="2" charset="-122"/>
-                <a:cs typeface="MiSans VF ExtraLight" pitchFamily="2" charset="-122"/>
-                <a:sym typeface="ChillYunmoGothicBold"/>
-              </a:rPr>
-              <a:t/>
-            </a:r>
-            <a:r>
-              <a:rPr lang="en-US" altLang="zh-CN" sz="6200" dirty="0">
-                <a:solidFill>
-                  <a:srgbClr val="F7F7F5"/>
-                </a:solidFill>
-                <a:latin typeface="MiSans VF ExtraLight" pitchFamily="2" charset="-122"/>
-                <a:ea typeface="MiSans VF ExtraLight" pitchFamily="2" charset="-122"/>
-                <a:cs typeface="MiSans VF ExtraLight" pitchFamily="2" charset="-122"/>
-                <a:sym typeface="ChillYunmoGothicBold"/>
-              </a:rPr>
-              <a:t/>
-            </a:r>
-          </a:p>
-        </p:txBody>
-      </p:sp>
-    </p:spTree>
-    <p:extLst>
-      <p:ext uri="{BB962C8B-B14F-4D97-AF65-F5344CB8AC3E}">
-        <p14:creationId val="711464613"/>
-      </p:ext>
-    </p:extLst>
-  </p:cSld>
-  <p:clrMapOvr>
-    <a:masterClrMapping/>
-  </p:clrMapOvr>
-</p:sld>
-</file>
-
 <file path=ppt/slides/slide3.xml><?xml version="1.0" encoding="utf-8"?>
 <p:sld xmlns:a="http://schemas.openxmlformats.org/drawingml/2006/main" xmlns:a16="http://schemas.microsoft.com/office/drawing/2014/main" xmlns:p="http://schemas.openxmlformats.org/presentationml/2006/main" xmlns:p14="http://schemas.microsoft.com/office/powerpoint/2010/main">
   <p:cSld>
@@ -26916,15 +24407,15 @@
 </p:sld>
 </file>
 
-<file path=ppt/slides/slide8.xml><?xml version="1.0" encoding="utf-8"?>
-<p:sld xmlns:a="http://schemas.openxmlformats.org/drawingml/2006/main" xmlns:a14="http://schemas.microsoft.com/office/drawing/2010/main" xmlns:a16="http://schemas.microsoft.com/office/drawing/2014/main" xmlns:p="http://schemas.openxmlformats.org/presentationml/2006/main" xmlns:p14="http://schemas.microsoft.com/office/powerpoint/2010/main" xmlns:r="http://schemas.openxmlformats.org/officeDocument/2006/relationships">
+<file path=ppt/slides/slide6.xml><?xml version="1.0" encoding="utf-8"?>
+<p:sld xmlns:a="http://schemas.openxmlformats.org/drawingml/2006/main" xmlns:a16="http://schemas.microsoft.com/office/drawing/2014/main" xmlns:p="http://schemas.openxmlformats.org/presentationml/2006/main" xmlns:p14="http://schemas.microsoft.com/office/powerpoint/2010/main">
   <p:cSld>
     <p:spTree>
       <p:nvGrpSpPr>
         <p:cNvPr id="1" name="">
           <a:extLst>
             <a:ext uri="{FF2B5EF4-FFF2-40B4-BE49-F238E27FC236}">
-              <a16:creationId id="{E648A593-A99C-D2FE-D77C-36E5F2C8FC50}"/>
+              <a16:creationId id="{E9A56D42-03E7-1A8B-E125-C51771EBD336}"/>
             </a:ext>
           </a:extLst>
         </p:cNvPr>
@@ -26944,7 +24435,7 @@
           <p:cNvPr id="2" name="组合 1">
             <a:extLst>
               <a:ext uri="{FF2B5EF4-FFF2-40B4-BE49-F238E27FC236}">
-                <a16:creationId id="{9FAC6FDF-E8F2-2C50-CFD5-A9E92A891DEB}"/>
+                <a16:creationId id="{5C622ECD-500A-0C92-D1CE-930651CD7945}"/>
               </a:ext>
             </a:extLst>
           </p:cNvPr>
@@ -26964,7 +24455,7 @@
             <p:cNvPr id="3" name="AutoShape 2">
               <a:extLst>
                 <a:ext uri="{FF2B5EF4-FFF2-40B4-BE49-F238E27FC236}">
-                  <a16:creationId id="{6632C352-CB58-9269-91D5-FF12D47E0F97}"/>
+                  <a16:creationId id="{131AEA49-1E70-E022-B818-12E045065410}"/>
                 </a:ext>
               </a:extLst>
             </p:cNvPr>
@@ -27059,7 +24550,7 @@
             <p:cNvPr id="4" name="AutoShape 2">
               <a:extLst>
                 <a:ext uri="{FF2B5EF4-FFF2-40B4-BE49-F238E27FC236}">
-                  <a16:creationId id="{3B04F1DF-1ABD-DF2B-33F8-A8CA3C8F1268}"/>
+                  <a16:creationId id="{CB5D33EF-1846-9B1B-AF27-5A9FF9179169}"/>
                 </a:ext>
               </a:extLst>
             </p:cNvPr>
@@ -27125,7 +24616,7 @@
             <p:cNvPr id="7" name="AutoShape 2">
               <a:extLst>
                 <a:ext uri="{FF2B5EF4-FFF2-40B4-BE49-F238E27FC236}">
-                  <a16:creationId id="{4D641233-D71F-5A17-2604-1D9587D88B65}"/>
+                  <a16:creationId id="{A96BF789-A9EC-FF1D-6EE0-3AD83C004375}"/>
                 </a:ext>
               </a:extLst>
             </p:cNvPr>
@@ -27192,7 +24683,7 @@
           <p:cNvPr id="9" name="AutoShape 2">
             <a:extLst>
               <a:ext uri="{FF2B5EF4-FFF2-40B4-BE49-F238E27FC236}">
-                <a16:creationId id="{CB1B5DA2-304D-5777-882F-5473F98F5090}"/>
+                <a16:creationId id="{08F5986F-E04F-2B27-65E9-C8DBB67314B8}"/>
               </a:ext>
             </a:extLst>
           </p:cNvPr>
@@ -27256,130 +24747,10 @@
       </p:sp>
       <p:sp>
         <p:nvSpPr>
-          <p:cNvPr id="6" name="AutoShape 5">
-            <a:extLst>
-              <a:ext uri="{FF2B5EF4-FFF2-40B4-BE49-F238E27FC236}">
-                <a16:creationId id="{E89CED06-68D7-42C2-94E3-78AB3BA2CBF2}"/>
-              </a:ext>
-            </a:extLst>
-          </p:cNvPr>
-          <p:cNvSpPr/>
-          <p:nvPr/>
-        </p:nvSpPr>
-        <p:spPr>
-          <a:xfrm>
-            <a:off x="524798" y="1206344"/>
-            <a:ext cx="7331999" cy="615553"/>
-          </a:xfrm>
-          <a:prstGeom prst="rect">
-            <a:avLst/>
-          </a:prstGeom>
-          <a:noFill/>
-          <a:ln w="16933" cap="flat" cmpd="sng">
-            <a:noFill/>
-            <a:prstDash val="solid"/>
-            <a:round/>
-          </a:ln>
-        </p:spPr>
-        <p:txBody>
-          <a:bodyPr vert="horz" wrap="square" lIns="0" tIns="0" rIns="0" bIns="0" rtlCol="0" anchor="t" anchorCtr="0">
-            <a:spAutoFit/>
-          </a:bodyPr>
-          <a:lstStyle/>
-          <a:p>
-            <a:pPr>
-              <a:defRPr/>
-            </a:pPr>
-            <a:r>
-              <a:rPr lang="zh-CN" altLang="en-US" sz="4000" b="1" dirty="0">
-                <a:solidFill>
-                  <a:srgbClr val="F7F7F5"/>
-                </a:solidFill>
-                <a:latin typeface="MiSans VF Bold" pitchFamily="2" charset="-122"/>
-                <a:ea typeface="MiSans VF Bold" pitchFamily="2" charset="-122"/>
-                <a:cs typeface="MiSans VF Bold" pitchFamily="2" charset="-122"/>
-                <a:sym typeface="SimHei"/>
-              </a:rPr>
-              <a:t>APPLICATION</a:t>
-            </a:r>
-            <a:endParaRPr lang="en-US" altLang="zh-CN" sz="4000" b="1" dirty="0">
-              <a:solidFill>
-                <a:srgbClr val="F7F7F5"/>
-              </a:solidFill>
-              <a:latin typeface="MiSans VF Bold" pitchFamily="2" charset="-122"/>
-              <a:ea typeface="MiSans VF Bold" pitchFamily="2" charset="-122"/>
-              <a:cs typeface="MiSans VF Bold" pitchFamily="2" charset="-122"/>
-              <a:sym typeface="SimHei"/>
-            </a:endParaRPr>
-          </a:p>
-        </p:txBody>
-      </p:sp>
-      <p:sp>
-        <p:nvSpPr>
-          <p:cNvPr id="15" name="文本框 14">
-            <a:extLst>
-              <a:ext uri="{FF2B5EF4-FFF2-40B4-BE49-F238E27FC236}">
-                <a16:creationId id="{FC096C41-32D4-6372-4BDA-66DF1C2886E3}"/>
-              </a:ext>
-            </a:extLst>
-          </p:cNvPr>
-          <p:cNvSpPr txBox="1"/>
-          <p:nvPr/>
-        </p:nvSpPr>
-        <p:spPr>
-          <a:xfrm>
-            <a:off x="524796" y="4493086"/>
-            <a:ext cx="3319001" cy="246221"/>
-          </a:xfrm>
-          <a:prstGeom prst="rect">
-            <a:avLst/>
-          </a:prstGeom>
-          <a:noFill/>
-        </p:spPr>
-        <p:txBody>
-          <a:bodyPr wrap="square" lIns="0" tIns="0" rIns="0" bIns="0">
-            <a:spAutoFit/>
-          </a:bodyPr>
-          <a:lstStyle/>
-          <a:p>
-            <a:pPr>
-              <a:spcBef>
-                <a:spcPts val="1200"/>
-              </a:spcBef>
-              <a:defRPr/>
-            </a:pPr>
-            <a:r>
-              <a:rPr lang="zh-CN" altLang="en-US" sz="1600" dirty="0">
-                <a:solidFill>
-                  <a:srgbClr val="F7F7F5"/>
-                </a:solidFill>
-                <a:latin typeface="Didot" panose="02000503000000020003" pitchFamily="2" charset="-79"/>
-                <a:ea typeface="MiSans VF Bold" pitchFamily="2" charset="-122"/>
-                <a:cs typeface="Didot" panose="02000503000000020003" pitchFamily="2" charset="-79"/>
-                <a:sym typeface="SimHei"/>
-              </a:rPr>
-              <a:t>H1 · 关键期是否存在</a:t>
-            </a:r>
-            <a:endParaRPr lang="zh-CN" altLang="en-US" sz="1200" dirty="0">
-              <a:solidFill>
-                <a:srgbClr val="F7F7F5">
-                  <a:alpha val="80000"/>
-                </a:srgbClr>
-              </a:solidFill>
-              <a:latin typeface="MiSans VF Light" pitchFamily="2" charset="-122"/>
-              <a:ea typeface="MiSans VF Light" pitchFamily="2" charset="-122"/>
-              <a:cs typeface="MiSans VF Light" pitchFamily="2" charset="-122"/>
-              <a:sym typeface="SimHei"/>
-            </a:endParaRPr>
-          </a:p>
-        </p:txBody>
-      </p:sp>
-      <p:sp>
-        <p:nvSpPr>
           <p:cNvPr id="17" name="文本框 16">
             <a:extLst>
               <a:ext uri="{FF2B5EF4-FFF2-40B4-BE49-F238E27FC236}">
-                <a16:creationId id="{FC5C973B-0ECD-9FA3-5034-2E7AFF868A79}"/>
+                <a16:creationId id="{DCE83B95-29A5-947E-5DB3-187F95E5CBD0}"/>
               </a:ext>
             </a:extLst>
           </p:cNvPr>
@@ -27415,7 +24786,7 @@
                 <a:cs typeface="Didot" panose="02000503000000020003" pitchFamily="2" charset="-79"/>
                 <a:sym typeface="SimHei"/>
               </a:rPr>
-              <a:t>BIOLOGY</a:t>
+              <a:t>HARD CONSTRAINTS</a:t>
             </a:r>
             <a:endParaRPr lang="en-US" altLang="zh-CN" sz="1400" b="1" i="1" u="none" strike="noStrike" dirty="0">
               <a:solidFill>
@@ -27429,12 +24800,2966 @@
           </a:p>
         </p:txBody>
       </p:sp>
+      <p:sp>
+        <p:nvSpPr>
+          <p:cNvPr id="5" name="AutoShape 5">
+            <a:extLst>
+              <a:ext uri="{FF2B5EF4-FFF2-40B4-BE49-F238E27FC236}">
+                <a16:creationId id="{E53B9922-51DF-FCFF-E55E-66B08B599EEC}"/>
+              </a:ext>
+            </a:extLst>
+          </p:cNvPr>
+          <p:cNvSpPr/>
+          <p:nvPr/>
+        </p:nvSpPr>
+        <p:spPr>
+          <a:xfrm>
+            <a:off x="524798" y="1206344"/>
+            <a:ext cx="7036061" cy="615553"/>
+          </a:xfrm>
+          <a:prstGeom prst="rect">
+            <a:avLst/>
+          </a:prstGeom>
+          <a:noFill/>
+          <a:ln w="16933" cap="flat" cmpd="sng">
+            <a:noFill/>
+            <a:prstDash val="solid"/>
+            <a:round/>
+          </a:ln>
+        </p:spPr>
+        <p:txBody>
+          <a:bodyPr vert="horz" wrap="square" lIns="0" tIns="0" rIns="0" bIns="0" rtlCol="0" anchor="t" anchorCtr="0">
+            <a:spAutoFit/>
+          </a:bodyPr>
+          <a:lstStyle/>
+          <a:p>
+            <a:pPr>
+              <a:defRPr/>
+            </a:pPr>
+            <a:r>
+              <a:rPr lang="zh-CN" altLang="en-US" sz="4000" b="1" dirty="0">
+                <a:solidFill>
+                  <a:srgbClr val="F7F7F5"/>
+                </a:solidFill>
+                <a:latin typeface="MiSans VF Bold" pitchFamily="2" charset="-122"/>
+                <a:ea typeface="MiSans VF Bold" pitchFamily="2" charset="-122"/>
+                <a:cs typeface="MiSans VF Bold" pitchFamily="2" charset="-122"/>
+                <a:sym typeface="SimHei"/>
+              </a:rPr>
+              <a:t>五条硬约束 · 缺一不可</a:t>
+            </a:r>
+            <a:endParaRPr lang="en-US" altLang="zh-CN" sz="4000" b="1" dirty="0">
+              <a:solidFill>
+                <a:srgbClr val="F7F7F5"/>
+              </a:solidFill>
+              <a:latin typeface="MiSans VF Bold" pitchFamily="2" charset="-122"/>
+              <a:ea typeface="MiSans VF Bold" pitchFamily="2" charset="-122"/>
+              <a:cs typeface="MiSans VF Bold" pitchFamily="2" charset="-122"/>
+              <a:sym typeface="SimHei"/>
+            </a:endParaRPr>
+          </a:p>
+        </p:txBody>
+      </p:sp>
+      <p:sp>
+        <p:nvSpPr>
+          <p:cNvPr id="6" name="矩形 5">
+            <a:extLst>
+              <a:ext uri="{FF2B5EF4-FFF2-40B4-BE49-F238E27FC236}">
+                <a16:creationId id="{FEB81666-1C20-1EFA-1D42-2C2AF9CB3990}"/>
+              </a:ext>
+            </a:extLst>
+          </p:cNvPr>
+          <p:cNvSpPr/>
+          <p:nvPr/>
+        </p:nvSpPr>
+        <p:spPr>
+          <a:xfrm>
+            <a:off x="3337401" y="2161017"/>
+            <a:ext cx="2770674" cy="3821329"/>
+          </a:xfrm>
+          <a:prstGeom prst="rect">
+            <a:avLst/>
+          </a:prstGeom>
+          <a:solidFill>
+            <a:srgbClr val="FF5A4D"/>
+          </a:solidFill>
+          <a:ln>
+            <a:noFill/>
+          </a:ln>
+        </p:spPr>
+        <p:style>
+          <a:lnRef idx="2">
+            <a:schemeClr val="accent1">
+              <a:shade val="15000"/>
+            </a:schemeClr>
+          </a:lnRef>
+          <a:fillRef idx="1">
+            <a:schemeClr val="accent1"/>
+          </a:fillRef>
+          <a:effectRef idx="0">
+            <a:schemeClr val="accent1"/>
+          </a:effectRef>
+          <a:fontRef idx="minor">
+            <a:schemeClr val="lt1"/>
+          </a:fontRef>
+        </p:style>
+        <p:txBody>
+          <a:bodyPr rtlCol="0" anchor="ctr"/>
+          <a:lstStyle/>
+          <a:p>
+            <a:pPr algn="ctr"/>
+            <a:endParaRPr kumimoji="1" lang="zh-CN" altLang="en-US" dirty="0">
+              <a:solidFill>
+                <a:srgbClr val="FF5A4D"/>
+              </a:solidFill>
+            </a:endParaRPr>
+          </a:p>
+        </p:txBody>
+      </p:sp>
+      <p:sp>
+        <p:nvSpPr>
+          <p:cNvPr id="15" name="矩形 14">
+            <a:extLst>
+              <a:ext uri="{FF2B5EF4-FFF2-40B4-BE49-F238E27FC236}">
+                <a16:creationId id="{D3A212B5-CE15-6C8C-CF6C-DBEB4EC619C3}"/>
+              </a:ext>
+            </a:extLst>
+          </p:cNvPr>
+          <p:cNvSpPr/>
+          <p:nvPr/>
+        </p:nvSpPr>
+        <p:spPr>
+          <a:xfrm>
+            <a:off x="6150006" y="2161017"/>
+            <a:ext cx="2770674" cy="3821329"/>
+          </a:xfrm>
+          <a:prstGeom prst="rect">
+            <a:avLst/>
+          </a:prstGeom>
+          <a:solidFill>
+            <a:srgbClr val="E62B1E"/>
+          </a:solidFill>
+          <a:ln>
+            <a:noFill/>
+          </a:ln>
+        </p:spPr>
+        <p:style>
+          <a:lnRef idx="2">
+            <a:schemeClr val="accent1">
+              <a:shade val="15000"/>
+            </a:schemeClr>
+          </a:lnRef>
+          <a:fillRef idx="1">
+            <a:schemeClr val="accent1"/>
+          </a:fillRef>
+          <a:effectRef idx="0">
+            <a:schemeClr val="accent1"/>
+          </a:effectRef>
+          <a:fontRef idx="minor">
+            <a:schemeClr val="lt1"/>
+          </a:fontRef>
+        </p:style>
+        <p:txBody>
+          <a:bodyPr rtlCol="0" anchor="ctr"/>
+          <a:lstStyle/>
+          <a:p>
+            <a:pPr algn="ctr"/>
+            <a:endParaRPr kumimoji="1" lang="zh-CN" altLang="en-US" dirty="0"/>
+          </a:p>
+        </p:txBody>
+      </p:sp>
+      <p:sp>
+        <p:nvSpPr>
+          <p:cNvPr id="16" name="矩形 15">
+            <a:extLst>
+              <a:ext uri="{FF2B5EF4-FFF2-40B4-BE49-F238E27FC236}">
+                <a16:creationId id="{722DE899-2D2B-01C0-9DB5-77A85CE2AB4D}"/>
+              </a:ext>
+            </a:extLst>
+          </p:cNvPr>
+          <p:cNvSpPr/>
+          <p:nvPr/>
+        </p:nvSpPr>
+        <p:spPr>
+          <a:xfrm>
+            <a:off x="524796" y="2161017"/>
+            <a:ext cx="2770674" cy="3821329"/>
+          </a:xfrm>
+          <a:prstGeom prst="rect">
+            <a:avLst/>
+          </a:prstGeom>
+          <a:solidFill>
+            <a:schemeClr val="bg1">
+              <a:lumMod val="90000"/>
+              <a:lumOff val="10000"/>
+            </a:schemeClr>
+          </a:solidFill>
+          <a:ln>
+            <a:noFill/>
+          </a:ln>
+        </p:spPr>
+        <p:style>
+          <a:lnRef idx="2">
+            <a:schemeClr val="accent1">
+              <a:shade val="15000"/>
+            </a:schemeClr>
+          </a:lnRef>
+          <a:fillRef idx="1">
+            <a:schemeClr val="accent1"/>
+          </a:fillRef>
+          <a:effectRef idx="0">
+            <a:schemeClr val="accent1"/>
+          </a:effectRef>
+          <a:fontRef idx="minor">
+            <a:schemeClr val="lt1"/>
+          </a:fontRef>
+        </p:style>
+        <p:txBody>
+          <a:bodyPr rtlCol="0" anchor="ctr"/>
+          <a:lstStyle/>
+          <a:p>
+            <a:pPr algn="ctr"/>
+            <a:endParaRPr kumimoji="1" lang="zh-CN" altLang="en-US" dirty="0"/>
+          </a:p>
+        </p:txBody>
+      </p:sp>
+      <p:sp>
+        <p:nvSpPr>
+          <p:cNvPr id="18" name="矩形 17">
+            <a:extLst>
+              <a:ext uri="{FF2B5EF4-FFF2-40B4-BE49-F238E27FC236}">
+                <a16:creationId id="{FFBCF46D-4BC4-5DF1-EFAE-8761B68878B2}"/>
+              </a:ext>
+            </a:extLst>
+          </p:cNvPr>
+          <p:cNvSpPr/>
+          <p:nvPr/>
+        </p:nvSpPr>
+        <p:spPr>
+          <a:xfrm>
+            <a:off x="8962610" y="2161017"/>
+            <a:ext cx="2770674" cy="3821329"/>
+          </a:xfrm>
+          <a:prstGeom prst="rect">
+            <a:avLst/>
+          </a:prstGeom>
+          <a:solidFill>
+            <a:srgbClr val="F7F7F5"/>
+          </a:solidFill>
+          <a:ln>
+            <a:noFill/>
+          </a:ln>
+        </p:spPr>
+        <p:style>
+          <a:lnRef idx="2">
+            <a:schemeClr val="accent1">
+              <a:shade val="15000"/>
+            </a:schemeClr>
+          </a:lnRef>
+          <a:fillRef idx="1">
+            <a:schemeClr val="accent1"/>
+          </a:fillRef>
+          <a:effectRef idx="0">
+            <a:schemeClr val="accent1"/>
+          </a:effectRef>
+          <a:fontRef idx="minor">
+            <a:schemeClr val="lt1"/>
+          </a:fontRef>
+        </p:style>
+        <p:txBody>
+          <a:bodyPr rtlCol="0" anchor="ctr"/>
+          <a:lstStyle/>
+          <a:p>
+            <a:pPr algn="ctr"/>
+            <a:endParaRPr kumimoji="1" lang="zh-CN" altLang="en-US" dirty="0">
+              <a:solidFill>
+                <a:srgbClr val="F7F7F5"/>
+              </a:solidFill>
+            </a:endParaRPr>
+          </a:p>
+        </p:txBody>
+      </p:sp>
+      <p:sp>
+        <p:nvSpPr>
+          <p:cNvPr id="22" name="AutoShape 2">
+            <a:extLst>
+              <a:ext uri="{FF2B5EF4-FFF2-40B4-BE49-F238E27FC236}">
+                <a16:creationId id="{73E5062A-D3D4-13B8-20D2-C8C6D80254BA}"/>
+              </a:ext>
+            </a:extLst>
+          </p:cNvPr>
+          <p:cNvSpPr/>
+          <p:nvPr/>
+        </p:nvSpPr>
+        <p:spPr>
+          <a:xfrm>
+            <a:off x="690202" y="2295779"/>
+            <a:ext cx="2432106" cy="615553"/>
+          </a:xfrm>
+          <a:prstGeom prst="roundRect">
+            <a:avLst>
+              <a:gd name="adj" fmla="val 0"/>
+            </a:avLst>
+          </a:prstGeom>
+          <a:noFill/>
+          <a:ln w="25400" cap="flat" cmpd="sng">
+            <a:noFill/>
+            <a:prstDash val="solid"/>
+            <a:round/>
+          </a:ln>
+        </p:spPr>
+        <p:txBody>
+          <a:bodyPr vert="horz" wrap="square" lIns="0" tIns="0" rIns="0" bIns="0" rtlCol="0" anchor="ctr" anchorCtr="0">
+            <a:spAutoFit/>
+          </a:bodyPr>
+          <a:lstStyle/>
+          <a:p>
+            <a:pPr>
+              <a:defRPr/>
+            </a:pPr>
+            <a:r>
+              <a:rPr lang="en-US" altLang="zh-CN" sz="4000" dirty="0">
+                <a:solidFill>
+                  <a:srgbClr val="F7F7F5"/>
+                </a:solidFill>
+                <a:latin typeface="MiSans VF ExtraLight" pitchFamily="2" charset="-122"/>
+                <a:ea typeface="MiSans VF ExtraLight" pitchFamily="2" charset="-122"/>
+                <a:cs typeface="MiSans VF ExtraLight" pitchFamily="2" charset="-122"/>
+                <a:sym typeface="ChillYunmoGothicBold"/>
+              </a:rPr>
+              <a:t>01</a:t>
+            </a:r>
+          </a:p>
+        </p:txBody>
+      </p:sp>
+      <p:sp>
+        <p:nvSpPr>
+          <p:cNvPr id="23" name="AutoShape 5">
+            <a:extLst>
+              <a:ext uri="{FF2B5EF4-FFF2-40B4-BE49-F238E27FC236}">
+                <a16:creationId id="{493DAB02-3340-2E61-8696-44B5A9480EB7}"/>
+              </a:ext>
+            </a:extLst>
+          </p:cNvPr>
+          <p:cNvSpPr/>
+          <p:nvPr/>
+        </p:nvSpPr>
+        <p:spPr>
+          <a:xfrm>
+            <a:off x="694080" y="4754487"/>
+            <a:ext cx="2432106" cy="246221"/>
+          </a:xfrm>
+          <a:prstGeom prst="rect">
+            <a:avLst/>
+          </a:prstGeom>
+          <a:noFill/>
+          <a:ln w="16933" cap="flat" cmpd="sng">
+            <a:noFill/>
+            <a:prstDash val="solid"/>
+            <a:round/>
+          </a:ln>
+        </p:spPr>
+        <p:txBody>
+          <a:bodyPr vert="horz" wrap="square" lIns="0" tIns="0" rIns="0" bIns="0" rtlCol="0" anchor="t" anchorCtr="0">
+            <a:spAutoFit/>
+          </a:bodyPr>
+          <a:lstStyle/>
+          <a:p>
+            <a:pPr>
+              <a:defRPr/>
+            </a:pPr>
+            <a:r>
+              <a:rPr lang="zh-CN" altLang="en-US" sz="1600" dirty="0">
+                <a:solidFill>
+                  <a:srgbClr val="F7F7F5"/>
+                </a:solidFill>
+                <a:latin typeface="MiSans VF Demibold" pitchFamily="2" charset="-122"/>
+                <a:ea typeface="MiSans VF Demibold" pitchFamily="2" charset="-122"/>
+                <a:cs typeface="MiSans VF Demibold" pitchFamily="2" charset="-122"/>
+                <a:sym typeface="SimHei"/>
+              </a:rPr>
+              <a:t>稀缺</a:t>
+            </a:r>
+            <a:endParaRPr lang="en-US" altLang="zh-CN" sz="1600" dirty="0">
+              <a:solidFill>
+                <a:srgbClr val="F7F7F5"/>
+              </a:solidFill>
+              <a:latin typeface="MiSans VF Demibold" pitchFamily="2" charset="-122"/>
+              <a:ea typeface="MiSans VF Demibold" pitchFamily="2" charset="-122"/>
+              <a:cs typeface="MiSans VF Demibold" pitchFamily="2" charset="-122"/>
+              <a:sym typeface="SimHei"/>
+            </a:endParaRPr>
+          </a:p>
+        </p:txBody>
+      </p:sp>
+      <p:sp>
+        <p:nvSpPr>
+          <p:cNvPr id="24" name="文本框 23">
+            <a:extLst>
+              <a:ext uri="{FF2B5EF4-FFF2-40B4-BE49-F238E27FC236}">
+                <a16:creationId id="{80E520F8-7FD7-2A5E-CBDF-E9FFB2E9FB9E}"/>
+              </a:ext>
+            </a:extLst>
+          </p:cNvPr>
+          <p:cNvSpPr txBox="1"/>
+          <p:nvPr/>
+        </p:nvSpPr>
+        <p:spPr>
+          <a:xfrm>
+            <a:off x="694080" y="5115367"/>
+            <a:ext cx="2432107" cy="553998"/>
+          </a:xfrm>
+          <a:prstGeom prst="rect">
+            <a:avLst/>
+          </a:prstGeom>
+          <a:noFill/>
+        </p:spPr>
+        <p:txBody>
+          <a:bodyPr wrap="square" lIns="0" tIns="0" rIns="0" bIns="0" anchor="t" anchorCtr="0">
+            <a:spAutoFit/>
+          </a:bodyPr>
+          <a:lstStyle/>
+          <a:p>
+            <a:pPr>
+              <a:spcBef>
+                <a:spcPts val="1200"/>
+              </a:spcBef>
+              <a:defRPr/>
+            </a:pPr>
+            <a:r>
+              <a:rPr lang="zh-CN" altLang="en-US" sz="1200" dirty="0">
+                <a:solidFill>
+                  <a:srgbClr val="F7F7F5">
+                    <a:alpha val="80000"/>
+                  </a:srgbClr>
+                </a:solidFill>
+                <a:latin typeface="MiSans VF Light" pitchFamily="2" charset="-122"/>
+                <a:ea typeface="MiSans VF Light" pitchFamily="2" charset="-122"/>
+                <a:cs typeface="MiSans VF Light" pitchFamily="2" charset="-122"/>
+                <a:sym typeface="SimHei"/>
+              </a:rPr>
+              <a:t>每拍预算零和分配，分不到的就是 0，而不是少给一点</a:t>
+            </a:r>
+          </a:p>
+        </p:txBody>
+      </p:sp>
+      <p:sp>
+        <p:nvSpPr>
+          <p:cNvPr id="26" name="AutoShape 5">
+            <a:extLst>
+              <a:ext uri="{FF2B5EF4-FFF2-40B4-BE49-F238E27FC236}">
+                <a16:creationId id="{95F6DFF3-EC29-1BEB-7134-12FF3940FFA1}"/>
+              </a:ext>
+            </a:extLst>
+          </p:cNvPr>
+          <p:cNvSpPr/>
+          <p:nvPr/>
+        </p:nvSpPr>
+        <p:spPr>
+          <a:xfrm>
+            <a:off x="3509199" y="4754487"/>
+            <a:ext cx="2432106" cy="246221"/>
+          </a:xfrm>
+          <a:prstGeom prst="rect">
+            <a:avLst/>
+          </a:prstGeom>
+          <a:noFill/>
+          <a:ln w="16933" cap="flat" cmpd="sng">
+            <a:noFill/>
+            <a:prstDash val="solid"/>
+            <a:round/>
+          </a:ln>
+        </p:spPr>
+        <p:txBody>
+          <a:bodyPr vert="horz" wrap="square" lIns="0" tIns="0" rIns="0" bIns="0" rtlCol="0" anchor="t" anchorCtr="0">
+            <a:spAutoFit/>
+          </a:bodyPr>
+          <a:lstStyle/>
+          <a:p>
+            <a:pPr>
+              <a:defRPr/>
+            </a:pPr>
+            <a:r>
+              <a:rPr lang="zh-CN" altLang="en-US" sz="1600" dirty="0">
+                <a:solidFill>
+                  <a:srgbClr val="F7F7F5"/>
+                </a:solidFill>
+                <a:latin typeface="MiSans VF Demibold" pitchFamily="2" charset="-122"/>
+                <a:ea typeface="MiSans VF Demibold" pitchFamily="2" charset="-122"/>
+                <a:cs typeface="MiSans VF Demibold" pitchFamily="2" charset="-122"/>
+                <a:sym typeface="SimHei"/>
+              </a:rPr>
+              <a:t>不可逆</a:t>
+            </a:r>
+            <a:endParaRPr lang="en-US" altLang="zh-CN" sz="1600" dirty="0">
+              <a:solidFill>
+                <a:srgbClr val="F7F7F5"/>
+              </a:solidFill>
+              <a:latin typeface="MiSans VF Demibold" pitchFamily="2" charset="-122"/>
+              <a:ea typeface="MiSans VF Demibold" pitchFamily="2" charset="-122"/>
+              <a:cs typeface="MiSans VF Demibold" pitchFamily="2" charset="-122"/>
+              <a:sym typeface="SimHei"/>
+            </a:endParaRPr>
+          </a:p>
+        </p:txBody>
+      </p:sp>
+      <p:sp>
+        <p:nvSpPr>
+          <p:cNvPr id="27" name="文本框 26">
+            <a:extLst>
+              <a:ext uri="{FF2B5EF4-FFF2-40B4-BE49-F238E27FC236}">
+                <a16:creationId id="{C92C47EB-CFA7-4A32-3B20-F7328BD33BD4}"/>
+              </a:ext>
+            </a:extLst>
+          </p:cNvPr>
+          <p:cNvSpPr txBox="1"/>
+          <p:nvPr/>
+        </p:nvSpPr>
+        <p:spPr>
+          <a:xfrm>
+            <a:off x="3509199" y="5115367"/>
+            <a:ext cx="2432107" cy="553998"/>
+          </a:xfrm>
+          <a:prstGeom prst="rect">
+            <a:avLst/>
+          </a:prstGeom>
+          <a:noFill/>
+        </p:spPr>
+        <p:txBody>
+          <a:bodyPr wrap="square" lIns="0" tIns="0" rIns="0" bIns="0" anchor="t" anchorCtr="0">
+            <a:normAutofit/>
+          </a:bodyPr>
+          <a:lstStyle/>
+          <a:p>
+            <a:pPr>
+              <a:spcBef>
+                <a:spcPts val="1200"/>
+              </a:spcBef>
+              <a:defRPr/>
+            </a:pPr>
+            <a:r>
+              <a:rPr lang="zh-CN" altLang="en-US" sz="996" dirty="0">
+                <a:solidFill>
+                  <a:srgbClr val="F7F7F5">
+                    <a:alpha val="80000"/>
+                  </a:srgbClr>
+                </a:solidFill>
+                <a:latin typeface="MiSans VF Light" pitchFamily="2" charset="-122"/>
+                <a:ea typeface="MiSans VF Light" pitchFamily="2" charset="-122"/>
+                <a:cs typeface="MiSans VF Light" pitchFamily="2" charset="-122"/>
+                <a:sym typeface="SimHei"/>
+              </a:rPr>
+              <a:t>长期饥饿使结构容量永久缩小，只减不增</a:t>
+            </a:r>
+          </a:p>
+        </p:txBody>
+      </p:sp>
+      <p:sp>
+        <p:nvSpPr>
+          <p:cNvPr id="29" name="AutoShape 2">
+            <a:extLst>
+              <a:ext uri="{FF2B5EF4-FFF2-40B4-BE49-F238E27FC236}">
+                <a16:creationId id="{7F0AAD2C-9B4C-02E9-F19C-37848927CBEA}"/>
+              </a:ext>
+            </a:extLst>
+          </p:cNvPr>
+          <p:cNvSpPr/>
+          <p:nvPr/>
+        </p:nvSpPr>
+        <p:spPr>
+          <a:xfrm>
+            <a:off x="3509199" y="2295779"/>
+            <a:ext cx="2363139" cy="615553"/>
+          </a:xfrm>
+          <a:prstGeom prst="roundRect">
+            <a:avLst>
+              <a:gd name="adj" fmla="val 0"/>
+            </a:avLst>
+          </a:prstGeom>
+          <a:noFill/>
+          <a:ln w="25400" cap="flat" cmpd="sng">
+            <a:noFill/>
+            <a:prstDash val="solid"/>
+            <a:round/>
+          </a:ln>
+        </p:spPr>
+        <p:txBody>
+          <a:bodyPr vert="horz" wrap="square" lIns="0" tIns="0" rIns="0" bIns="0" rtlCol="0" anchor="ctr" anchorCtr="0">
+            <a:spAutoFit/>
+          </a:bodyPr>
+          <a:lstStyle/>
+          <a:p>
+            <a:pPr>
+              <a:defRPr/>
+            </a:pPr>
+            <a:r>
+              <a:rPr lang="en-US" altLang="zh-CN" sz="4000" dirty="0">
+                <a:solidFill>
+                  <a:srgbClr val="F7F7F5"/>
+                </a:solidFill>
+                <a:latin typeface="MiSans VF ExtraLight" pitchFamily="2" charset="-122"/>
+                <a:ea typeface="MiSans VF ExtraLight" pitchFamily="2" charset="-122"/>
+                <a:cs typeface="MiSans VF ExtraLight" pitchFamily="2" charset="-122"/>
+                <a:sym typeface="ChillYunmoGothicBold"/>
+              </a:rPr>
+              <a:t>02</a:t>
+            </a:r>
+          </a:p>
+        </p:txBody>
+      </p:sp>
+      <p:sp>
+        <p:nvSpPr>
+          <p:cNvPr id="31" name="AutoShape 5">
+            <a:extLst>
+              <a:ext uri="{FF2B5EF4-FFF2-40B4-BE49-F238E27FC236}">
+                <a16:creationId id="{2BA66D56-EE33-C6F7-877B-F2CF6050D06F}"/>
+              </a:ext>
+            </a:extLst>
+          </p:cNvPr>
+          <p:cNvSpPr/>
+          <p:nvPr/>
+        </p:nvSpPr>
+        <p:spPr>
+          <a:xfrm>
+            <a:off x="6316793" y="4754487"/>
+            <a:ext cx="2432106" cy="246221"/>
+          </a:xfrm>
+          <a:prstGeom prst="rect">
+            <a:avLst/>
+          </a:prstGeom>
+          <a:noFill/>
+          <a:ln w="16933" cap="flat" cmpd="sng">
+            <a:noFill/>
+            <a:prstDash val="solid"/>
+            <a:round/>
+          </a:ln>
+        </p:spPr>
+        <p:txBody>
+          <a:bodyPr vert="horz" wrap="square" lIns="0" tIns="0" rIns="0" bIns="0" rtlCol="0" anchor="t" anchorCtr="0">
+            <a:spAutoFit/>
+          </a:bodyPr>
+          <a:lstStyle/>
+          <a:p>
+            <a:pPr>
+              <a:defRPr/>
+            </a:pPr>
+            <a:r>
+              <a:rPr lang="zh-CN" altLang="en-US" sz="1600" dirty="0">
+                <a:solidFill>
+                  <a:srgbClr val="0B0B0C"/>
+                </a:solidFill>
+                <a:latin typeface="MiSans VF Demibold" pitchFamily="2" charset="-122"/>
+                <a:ea typeface="MiSans VF Demibold" pitchFamily="2" charset="-122"/>
+                <a:cs typeface="MiSans VF Demibold" pitchFamily="2" charset="-122"/>
+                <a:sym typeface="SimHei"/>
+              </a:rPr>
+              <a:t>死亡</a:t>
+            </a:r>
+            <a:endParaRPr lang="en-US" altLang="zh-CN" sz="1600" dirty="0">
+              <a:solidFill>
+                <a:srgbClr val="0B0B0C"/>
+              </a:solidFill>
+              <a:latin typeface="MiSans VF Demibold" pitchFamily="2" charset="-122"/>
+              <a:ea typeface="MiSans VF Demibold" pitchFamily="2" charset="-122"/>
+              <a:cs typeface="MiSans VF Demibold" pitchFamily="2" charset="-122"/>
+              <a:sym typeface="SimHei"/>
+            </a:endParaRPr>
+          </a:p>
+        </p:txBody>
+      </p:sp>
+      <p:sp>
+        <p:nvSpPr>
+          <p:cNvPr id="32" name="文本框 31">
+            <a:extLst>
+              <a:ext uri="{FF2B5EF4-FFF2-40B4-BE49-F238E27FC236}">
+                <a16:creationId id="{A4AB5211-EAF9-5E86-92D5-7C933B2E9B74}"/>
+              </a:ext>
+            </a:extLst>
+          </p:cNvPr>
+          <p:cNvSpPr txBox="1"/>
+          <p:nvPr/>
+        </p:nvSpPr>
+        <p:spPr>
+          <a:xfrm>
+            <a:off x="6316793" y="5115367"/>
+            <a:ext cx="2432107" cy="553998"/>
+          </a:xfrm>
+          <a:prstGeom prst="rect">
+            <a:avLst/>
+          </a:prstGeom>
+          <a:noFill/>
+        </p:spPr>
+        <p:txBody>
+          <a:bodyPr wrap="square" lIns="0" tIns="0" rIns="0" bIns="0" anchor="t" anchorCtr="0">
+            <a:spAutoFit/>
+          </a:bodyPr>
+          <a:lstStyle/>
+          <a:p>
+            <a:pPr>
+              <a:spcBef>
+                <a:spcPts val="1200"/>
+              </a:spcBef>
+              <a:defRPr/>
+            </a:pPr>
+            <a:r>
+              <a:rPr lang="zh-CN" altLang="en-US" sz="1200" dirty="0">
+                <a:solidFill>
+                  <a:srgbClr val="0B0B0C">
+                    <a:alpha val="80000"/>
+                  </a:srgbClr>
+                </a:solidFill>
+                <a:latin typeface="MiSans VF Light" pitchFamily="2" charset="-122"/>
+                <a:ea typeface="MiSans VF Light" pitchFamily="2" charset="-122"/>
+                <a:cs typeface="MiSans VF Light" pitchFamily="2" charset="-122"/>
+                <a:sym typeface="SimHei"/>
+              </a:rPr>
+              <a:t>能量归零持续超过阈值即终止，不回滚、不重来</a:t>
+            </a:r>
+          </a:p>
+        </p:txBody>
+      </p:sp>
+      <p:sp>
+        <p:nvSpPr>
+          <p:cNvPr id="33" name="AutoShape 2">
+            <a:extLst>
+              <a:ext uri="{FF2B5EF4-FFF2-40B4-BE49-F238E27FC236}">
+                <a16:creationId id="{621AF9BD-F6EB-1276-E8FB-CCEAA09D0BD0}"/>
+              </a:ext>
+            </a:extLst>
+          </p:cNvPr>
+          <p:cNvSpPr/>
+          <p:nvPr/>
+        </p:nvSpPr>
+        <p:spPr>
+          <a:xfrm>
+            <a:off x="6316793" y="2295779"/>
+            <a:ext cx="2363139" cy="615553"/>
+          </a:xfrm>
+          <a:prstGeom prst="roundRect">
+            <a:avLst>
+              <a:gd name="adj" fmla="val 0"/>
+            </a:avLst>
+          </a:prstGeom>
+          <a:noFill/>
+          <a:ln w="25400" cap="flat" cmpd="sng">
+            <a:noFill/>
+            <a:prstDash val="solid"/>
+            <a:round/>
+          </a:ln>
+        </p:spPr>
+        <p:txBody>
+          <a:bodyPr vert="horz" wrap="square" lIns="0" tIns="0" rIns="0" bIns="0" rtlCol="0" anchor="ctr" anchorCtr="0">
+            <a:spAutoFit/>
+          </a:bodyPr>
+          <a:lstStyle/>
+          <a:p>
+            <a:pPr>
+              <a:defRPr/>
+            </a:pPr>
+            <a:r>
+              <a:rPr lang="en-US" altLang="zh-CN" sz="4000" dirty="0">
+                <a:solidFill>
+                  <a:srgbClr val="0B0B0C"/>
+                </a:solidFill>
+                <a:latin typeface="MiSans VF ExtraLight" pitchFamily="2" charset="-122"/>
+                <a:ea typeface="MiSans VF ExtraLight" pitchFamily="2" charset="-122"/>
+                <a:cs typeface="MiSans VF ExtraLight" pitchFamily="2" charset="-122"/>
+                <a:sym typeface="ChillYunmoGothicBold"/>
+              </a:rPr>
+              <a:t>03</a:t>
+            </a:r>
+          </a:p>
+        </p:txBody>
+      </p:sp>
+      <p:sp>
+        <p:nvSpPr>
+          <p:cNvPr id="34" name="AutoShape 5">
+            <a:extLst>
+              <a:ext uri="{FF2B5EF4-FFF2-40B4-BE49-F238E27FC236}">
+                <a16:creationId id="{23BDED98-DD94-A756-4A86-D8C9F7E4B51F}"/>
+              </a:ext>
+            </a:extLst>
+          </p:cNvPr>
+          <p:cNvSpPr/>
+          <p:nvPr/>
+        </p:nvSpPr>
+        <p:spPr>
+          <a:xfrm>
+            <a:off x="9137266" y="4754487"/>
+            <a:ext cx="2432106" cy="246221"/>
+          </a:xfrm>
+          <a:prstGeom prst="rect">
+            <a:avLst/>
+          </a:prstGeom>
+          <a:noFill/>
+          <a:ln w="16933" cap="flat" cmpd="sng">
+            <a:noFill/>
+            <a:prstDash val="solid"/>
+            <a:round/>
+          </a:ln>
+        </p:spPr>
+        <p:txBody>
+          <a:bodyPr vert="horz" wrap="square" lIns="0" tIns="0" rIns="0" bIns="0" rtlCol="0" anchor="t" anchorCtr="0">
+            <a:spAutoFit/>
+          </a:bodyPr>
+          <a:lstStyle/>
+          <a:p>
+            <a:pPr>
+              <a:defRPr/>
+            </a:pPr>
+            <a:r>
+              <a:rPr lang="zh-CN" altLang="en-US" sz="1600" dirty="0">
+                <a:solidFill>
+                  <a:srgbClr val="0B0B0C"/>
+                </a:solidFill>
+                <a:latin typeface="MiSans VF Demibold" pitchFamily="2" charset="-122"/>
+                <a:ea typeface="MiSans VF Demibold" pitchFamily="2" charset="-122"/>
+                <a:cs typeface="MiSans VF Demibold" pitchFamily="2" charset="-122"/>
+                <a:sym typeface="SimHei"/>
+              </a:rPr>
+              <a:t>代谢与内生约束</a:t>
+            </a:r>
+            <a:endParaRPr lang="en-US" altLang="zh-CN" sz="1600" dirty="0">
+              <a:solidFill>
+                <a:srgbClr val="0B0B0C"/>
+              </a:solidFill>
+              <a:latin typeface="MiSans VF Demibold" pitchFamily="2" charset="-122"/>
+              <a:ea typeface="MiSans VF Demibold" pitchFamily="2" charset="-122"/>
+              <a:cs typeface="MiSans VF Demibold" pitchFamily="2" charset="-122"/>
+              <a:sym typeface="SimHei"/>
+            </a:endParaRPr>
+          </a:p>
+        </p:txBody>
+      </p:sp>
+      <p:sp>
+        <p:nvSpPr>
+          <p:cNvPr id="35" name="文本框 34">
+            <a:extLst>
+              <a:ext uri="{FF2B5EF4-FFF2-40B4-BE49-F238E27FC236}">
+                <a16:creationId id="{7881EBDD-B6A6-7D0E-915F-3F06878DF33A}"/>
+              </a:ext>
+            </a:extLst>
+          </p:cNvPr>
+          <p:cNvSpPr txBox="1"/>
+          <p:nvPr/>
+        </p:nvSpPr>
+        <p:spPr>
+          <a:xfrm>
+            <a:off x="9137266" y="5115367"/>
+            <a:ext cx="2432107" cy="553998"/>
+          </a:xfrm>
+          <a:prstGeom prst="rect">
+            <a:avLst/>
+          </a:prstGeom>
+          <a:noFill/>
+        </p:spPr>
+        <p:txBody>
+          <a:bodyPr wrap="square" lIns="0" tIns="0" rIns="0" bIns="0" anchor="t" anchorCtr="0">
+            <a:spAutoFit/>
+          </a:bodyPr>
+          <a:lstStyle/>
+          <a:p>
+            <a:pPr>
+              <a:spcBef>
+                <a:spcPts val="1200"/>
+              </a:spcBef>
+              <a:defRPr/>
+            </a:pPr>
+            <a:r>
+              <a:rPr lang="zh-CN" altLang="en-US" sz="1200" dirty="0">
+                <a:solidFill>
+                  <a:srgbClr val="0B0B0C">
+                    <a:alpha val="80000"/>
+                  </a:srgbClr>
+                </a:solidFill>
+                <a:latin typeface="MiSans VF Light" pitchFamily="2" charset="-122"/>
+                <a:ea typeface="MiSans VF Light" pitchFamily="2" charset="-122"/>
+                <a:cs typeface="MiSans VF Light" pitchFamily="2" charset="-122"/>
+                <a:sym typeface="SimHei"/>
+              </a:rPr>
+              <a:t>能量只能由自身产出换取，无外部拨款，外部不可写入</a:t>
+            </a:r>
+          </a:p>
+        </p:txBody>
+      </p:sp>
+      <p:sp>
+        <p:nvSpPr>
+          <p:cNvPr id="36" name="AutoShape 2">
+            <a:extLst>
+              <a:ext uri="{FF2B5EF4-FFF2-40B4-BE49-F238E27FC236}">
+                <a16:creationId id="{EA2C6C3F-2767-43CA-A5B5-E4FE8311C370}"/>
+              </a:ext>
+            </a:extLst>
+          </p:cNvPr>
+          <p:cNvSpPr/>
+          <p:nvPr/>
+        </p:nvSpPr>
+        <p:spPr>
+          <a:xfrm>
+            <a:off x="9137266" y="2295779"/>
+            <a:ext cx="2363139" cy="615553"/>
+          </a:xfrm>
+          <a:prstGeom prst="roundRect">
+            <a:avLst>
+              <a:gd name="adj" fmla="val 0"/>
+            </a:avLst>
+          </a:prstGeom>
+          <a:noFill/>
+          <a:ln w="25400" cap="flat" cmpd="sng">
+            <a:noFill/>
+            <a:prstDash val="solid"/>
+            <a:round/>
+          </a:ln>
+        </p:spPr>
+        <p:txBody>
+          <a:bodyPr vert="horz" wrap="square" lIns="0" tIns="0" rIns="0" bIns="0" rtlCol="0" anchor="ctr" anchorCtr="0">
+            <a:spAutoFit/>
+          </a:bodyPr>
+          <a:lstStyle/>
+          <a:p>
+            <a:pPr>
+              <a:defRPr/>
+            </a:pPr>
+            <a:r>
+              <a:rPr lang="en-US" altLang="zh-CN" sz="4000" dirty="0">
+                <a:solidFill>
+                  <a:srgbClr val="0B0B0C"/>
+                </a:solidFill>
+                <a:latin typeface="MiSans VF ExtraLight" pitchFamily="2" charset="-122"/>
+                <a:ea typeface="MiSans VF ExtraLight" pitchFamily="2" charset="-122"/>
+                <a:cs typeface="MiSans VF ExtraLight" pitchFamily="2" charset="-122"/>
+                <a:sym typeface="ChillYunmoGothicBold"/>
+              </a:rPr>
+              <a:t>04</a:t>
+            </a:r>
+          </a:p>
+        </p:txBody>
+      </p:sp>
+    </p:spTree>
+    <p:extLst>
+      <p:ext uri="{BB962C8B-B14F-4D97-AF65-F5344CB8AC3E}">
+        <p14:creationId val="3762049491"/>
+      </p:ext>
+    </p:extLst>
+  </p:cSld>
+  <p:clrMapOvr>
+    <a:masterClrMapping/>
+  </p:clrMapOvr>
+</p:sld>
+</file>
+
+<file path=ppt/slides/slide7.xml><?xml version="1.0" encoding="utf-8"?>
+<p:sld xmlns:a="http://schemas.openxmlformats.org/drawingml/2006/main" xmlns:a16="http://schemas.microsoft.com/office/drawing/2014/main" xmlns:c="http://schemas.openxmlformats.org/drawingml/2006/chart" xmlns:p="http://schemas.openxmlformats.org/presentationml/2006/main" xmlns:p14="http://schemas.microsoft.com/office/powerpoint/2010/main" xmlns:r="http://schemas.openxmlformats.org/officeDocument/2006/relationships">
+  <p:cSld>
+    <p:spTree>
+      <p:nvGrpSpPr>
+        <p:cNvPr id="1" name="">
+          <a:extLst>
+            <a:ext uri="{FF2B5EF4-FFF2-40B4-BE49-F238E27FC236}">
+              <a16:creationId id="{8F5D1BDB-50D1-598D-5CBC-C7F28A2F0ED7}"/>
+            </a:ext>
+          </a:extLst>
+        </p:cNvPr>
+        <p:cNvGrpSpPr/>
+        <p:nvPr/>
+      </p:nvGrpSpPr>
+      <p:grpSpPr>
+        <a:xfrm>
+          <a:off x="0" y="0"/>
+          <a:ext cx="0" cy="0"/>
+          <a:chOff x="0" y="0"/>
+          <a:chExt cx="0" cy="0"/>
+        </a:xfrm>
+      </p:grpSpPr>
+      <p:grpSp>
+        <p:nvGrpSpPr>
+          <p:cNvPr id="2" name="组合 1">
+            <a:extLst>
+              <a:ext uri="{FF2B5EF4-FFF2-40B4-BE49-F238E27FC236}">
+                <a16:creationId id="{96EBE4BF-D6E8-071B-A0D5-AAE1B363E7EE}"/>
+              </a:ext>
+            </a:extLst>
+          </p:cNvPr>
+          <p:cNvGrpSpPr/>
+          <p:nvPr/>
+        </p:nvGrpSpPr>
+        <p:grpSpPr>
+          <a:xfrm>
+            <a:off x="524797" y="385358"/>
+            <a:ext cx="11208487" cy="141577"/>
+            <a:chOff x="524797" y="385358"/>
+            <a:chExt cx="11208487" cy="141577"/>
+          </a:xfrm>
+        </p:grpSpPr>
+        <p:sp>
+          <p:nvSpPr>
+            <p:cNvPr id="3" name="AutoShape 2">
+              <a:extLst>
+                <a:ext uri="{FF2B5EF4-FFF2-40B4-BE49-F238E27FC236}">
+                  <a16:creationId id="{13F7C4F4-58AA-847E-3DCC-D467195FC72F}"/>
+                </a:ext>
+              </a:extLst>
+            </p:cNvPr>
+            <p:cNvSpPr/>
+            <p:nvPr/>
+          </p:nvSpPr>
+          <p:spPr>
+            <a:xfrm>
+              <a:off x="524797" y="385358"/>
+              <a:ext cx="3077046" cy="141577"/>
+            </a:xfrm>
+            <a:prstGeom prst="rect">
+              <a:avLst/>
+            </a:prstGeom>
+            <a:noFill/>
+            <a:ln w="16933" cap="flat" cmpd="sng">
+              <a:noFill/>
+              <a:prstDash val="solid"/>
+              <a:round/>
+            </a:ln>
+          </p:spPr>
+          <p:txBody>
+            <a:bodyPr vert="horz" wrap="square" lIns="0" tIns="0" rIns="0" bIns="0" rtlCol="0" anchor="t" anchorCtr="0">
+              <a:spAutoFit/>
+            </a:bodyPr>
+            <a:lstStyle/>
+            <a:p>
+              <a:pPr>
+                <a:lnSpc>
+                  <a:spcPct val="125000"/>
+                </a:lnSpc>
+                <a:defRPr/>
+              </a:pPr>
+              <a:r>
+                <a:rPr lang="en-US" sz="800" dirty="0">
+                  <a:solidFill>
+                    <a:srgbClr val="F7F7F5">
+                      <a:alpha val="50000"/>
+                    </a:srgbClr>
+                  </a:solidFill>
+                  <a:latin typeface="MiSans VF Light" pitchFamily="2" charset="-122"/>
+                  <a:ea typeface="MiSans VF Light" pitchFamily="2" charset="-122"/>
+                  <a:cs typeface="MiSans VF Light" pitchFamily="2" charset="-122"/>
+                  <a:sym typeface="JetBrains Mono"/>
+                </a:rPr>
+                <a:t/>
+              </a:r>
+              <a:r>
+                <a:rPr lang="zh-CN" altLang="en-US" sz="800" dirty="0">
+                  <a:solidFill>
+                    <a:srgbClr val="F7F7F5">
+                      <a:alpha val="50000"/>
+                    </a:srgbClr>
+                  </a:solidFill>
+                  <a:latin typeface="MiSans VF Light" pitchFamily="2" charset="-122"/>
+                  <a:ea typeface="MiSans VF Light" pitchFamily="2" charset="-122"/>
+                  <a:cs typeface="MiSans VF Light" pitchFamily="2" charset="-122"/>
+                  <a:sym typeface="JetBrains Mono"/>
+                </a:rPr>
+                <a:t/>
+              </a:r>
+              <a:r>
+                <a:rPr lang="en-US" altLang="zh-CN" sz="800" dirty="0">
+                  <a:solidFill>
+                    <a:srgbClr val="F7F7F5">
+                      <a:alpha val="50000"/>
+                    </a:srgbClr>
+                  </a:solidFill>
+                  <a:latin typeface="MiSans VF Light" pitchFamily="2" charset="-122"/>
+                  <a:ea typeface="MiSans VF Light" pitchFamily="2" charset="-122"/>
+                  <a:cs typeface="MiSans VF Light" pitchFamily="2" charset="-122"/>
+                  <a:sym typeface="JetBrains Mono"/>
+                </a:rPr>
+                <a:t/>
+              </a:r>
+              <a:endParaRPr lang="en-US" sz="800" dirty="0">
+                <a:solidFill>
+                  <a:srgbClr val="F7F7F5">
+                    <a:alpha val="50000"/>
+                  </a:srgbClr>
+                </a:solidFill>
+                <a:latin typeface="MiSans VF Light" pitchFamily="2" charset="-122"/>
+                <a:ea typeface="MiSans VF Light" pitchFamily="2" charset="-122"/>
+                <a:cs typeface="MiSans VF Light" pitchFamily="2" charset="-122"/>
+                <a:sym typeface="JetBrains Mono"/>
+              </a:endParaRPr>
+            </a:p>
+          </p:txBody>
+        </p:sp>
+        <p:sp>
+          <p:nvSpPr>
+            <p:cNvPr id="4" name="AutoShape 2">
+              <a:extLst>
+                <a:ext uri="{FF2B5EF4-FFF2-40B4-BE49-F238E27FC236}">
+                  <a16:creationId id="{DEBAD1B9-2C99-5A88-06E8-C1ECA1189455}"/>
+                </a:ext>
+              </a:extLst>
+            </p:cNvPr>
+            <p:cNvSpPr/>
+            <p:nvPr/>
+          </p:nvSpPr>
+          <p:spPr>
+            <a:xfrm>
+              <a:off x="5640314" y="385358"/>
+              <a:ext cx="911371" cy="141577"/>
+            </a:xfrm>
+            <a:prstGeom prst="rect">
+              <a:avLst/>
+            </a:prstGeom>
+            <a:noFill/>
+            <a:ln w="16933" cap="flat" cmpd="sng">
+              <a:noFill/>
+              <a:prstDash val="solid"/>
+              <a:round/>
+            </a:ln>
+          </p:spPr>
+          <p:txBody>
+            <a:bodyPr vert="horz" wrap="square" lIns="0" tIns="0" rIns="0" bIns="0" rtlCol="0" anchor="t" anchorCtr="0">
+              <a:spAutoFit/>
+            </a:bodyPr>
+            <a:lstStyle/>
+            <a:p>
+              <a:pPr algn="ctr">
+                <a:lnSpc>
+                  <a:spcPct val="125000"/>
+                </a:lnSpc>
+                <a:defRPr/>
+              </a:pPr>
+              <a:r>
+                <a:rPr lang="en-US" altLang="zh-CN" sz="800" dirty="0">
+                  <a:solidFill>
+                    <a:srgbClr val="F7F7F5">
+                      <a:alpha val="50000"/>
+                    </a:srgbClr>
+                  </a:solidFill>
+                  <a:latin typeface="MiSans VF Light" pitchFamily="2" charset="-122"/>
+                  <a:ea typeface="MiSans VF Light" pitchFamily="2" charset="-122"/>
+                  <a:cs typeface="MiSans VF Light" pitchFamily="2" charset="-122"/>
+                  <a:sym typeface="JetBrains Mono"/>
+                </a:rPr>
+                <a:t>2026</a:t>
+              </a:r>
+              <a:endParaRPr lang="en-US" sz="800" dirty="0">
+                <a:solidFill>
+                  <a:srgbClr val="F7F7F5">
+                    <a:alpha val="50000"/>
+                  </a:srgbClr>
+                </a:solidFill>
+                <a:latin typeface="MiSans VF Light" pitchFamily="2" charset="-122"/>
+                <a:ea typeface="MiSans VF Light" pitchFamily="2" charset="-122"/>
+                <a:cs typeface="MiSans VF Light" pitchFamily="2" charset="-122"/>
+              </a:endParaRPr>
+            </a:p>
+          </p:txBody>
+        </p:sp>
+        <p:sp>
+          <p:nvSpPr>
+            <p:cNvPr id="7" name="AutoShape 2">
+              <a:extLst>
+                <a:ext uri="{FF2B5EF4-FFF2-40B4-BE49-F238E27FC236}">
+                  <a16:creationId id="{4EC9550B-FCE4-244F-3506-15373811894F}"/>
+                </a:ext>
+              </a:extLst>
+            </p:cNvPr>
+            <p:cNvSpPr/>
+            <p:nvPr/>
+          </p:nvSpPr>
+          <p:spPr>
+            <a:xfrm>
+              <a:off x="8133284" y="385358"/>
+              <a:ext cx="3600000" cy="141577"/>
+            </a:xfrm>
+            <a:prstGeom prst="rect">
+              <a:avLst/>
+            </a:prstGeom>
+            <a:noFill/>
+            <a:ln w="16933" cap="flat" cmpd="sng">
+              <a:noFill/>
+              <a:prstDash val="solid"/>
+              <a:round/>
+            </a:ln>
+          </p:spPr>
+          <p:txBody>
+            <a:bodyPr vert="horz" wrap="square" lIns="0" tIns="0" rIns="0" bIns="0" rtlCol="0" anchor="t" anchorCtr="0">
+              <a:spAutoFit/>
+            </a:bodyPr>
+            <a:lstStyle/>
+            <a:p>
+              <a:pPr algn="r">
+                <a:lnSpc>
+                  <a:spcPct val="125000"/>
+                </a:lnSpc>
+                <a:defRPr/>
+              </a:pPr>
+              <a:r>
+                <a:rPr lang="en-US" sz="800" dirty="0">
+                  <a:solidFill>
+                    <a:srgbClr val="F7F7F5">
+                      <a:alpha val="50000"/>
+                    </a:srgbClr>
+                  </a:solidFill>
+                  <a:latin typeface="MiSans VF Light" pitchFamily="2" charset="-122"/>
+                  <a:ea typeface="MiSans VF Light" pitchFamily="2" charset="-122"/>
+                  <a:cs typeface="MiSans VF Light" pitchFamily="2" charset="-122"/>
+                  <a:sym typeface="JetBrains Mono"/>
+                </a:rPr>
+                <a:t/>
+              </a:r>
+              <a:endParaRPr lang="en-US" sz="800" dirty="0">
+                <a:solidFill>
+                  <a:srgbClr val="F7F7F5">
+                    <a:alpha val="50000"/>
+                  </a:srgbClr>
+                </a:solidFill>
+                <a:latin typeface="MiSans VF Light" pitchFamily="2" charset="-122"/>
+                <a:ea typeface="MiSans VF Light" pitchFamily="2" charset="-122"/>
+                <a:cs typeface="MiSans VF Light" pitchFamily="2" charset="-122"/>
+              </a:endParaRPr>
+            </a:p>
+          </p:txBody>
+        </p:sp>
+      </p:grpSp>
+      <p:sp>
+        <p:nvSpPr>
+          <p:cNvPr id="9" name="AutoShape 2">
+            <a:extLst>
+              <a:ext uri="{FF2B5EF4-FFF2-40B4-BE49-F238E27FC236}">
+                <a16:creationId id="{0801CD8B-952A-2949-1D71-C755253B5DD7}"/>
+              </a:ext>
+            </a:extLst>
+          </p:cNvPr>
+          <p:cNvSpPr/>
+          <p:nvPr/>
+        </p:nvSpPr>
+        <p:spPr>
+          <a:xfrm>
+            <a:off x="524797" y="6295670"/>
+            <a:ext cx="3077046" cy="141577"/>
+          </a:xfrm>
+          <a:prstGeom prst="rect">
+            <a:avLst/>
+          </a:prstGeom>
+          <a:noFill/>
+          <a:ln w="16933" cap="flat" cmpd="sng">
+            <a:noFill/>
+            <a:prstDash val="solid"/>
+            <a:round/>
+          </a:ln>
+        </p:spPr>
+        <p:txBody>
+          <a:bodyPr vert="horz" wrap="square" lIns="0" tIns="0" rIns="0" bIns="0" rtlCol="0" anchor="t" anchorCtr="0">
+            <a:spAutoFit/>
+          </a:bodyPr>
+          <a:lstStyle/>
+          <a:p>
+            <a:pPr>
+              <a:lnSpc>
+                <a:spcPct val="125000"/>
+              </a:lnSpc>
+              <a:defRPr/>
+            </a:pPr>
+            <a:r>
+              <a:rPr lang="en-US" altLang="zh-CN" sz="800" dirty="0">
+                <a:solidFill>
+                  <a:srgbClr val="F7F7F5">
+                    <a:alpha val="50000"/>
+                  </a:srgbClr>
+                </a:solidFill>
+                <a:latin typeface="MiSans VF Light" pitchFamily="2" charset="-122"/>
+                <a:ea typeface="MiSans VF Light" pitchFamily="2" charset="-122"/>
+                <a:cs typeface="MiSans VF Light" pitchFamily="2" charset="-122"/>
+                <a:sym typeface="JetBrains Mono"/>
+              </a:rPr>
+              <a:t/>
+            </a:r>
+            <a:endParaRPr lang="en-US" sz="800" dirty="0">
+              <a:solidFill>
+                <a:srgbClr val="F7F7F5">
+                  <a:alpha val="50000"/>
+                </a:srgbClr>
+              </a:solidFill>
+              <a:latin typeface="MiSans VF Light" pitchFamily="2" charset="-122"/>
+              <a:ea typeface="MiSans VF Light" pitchFamily="2" charset="-122"/>
+              <a:cs typeface="MiSans VF Light" pitchFamily="2" charset="-122"/>
+              <a:sym typeface="JetBrains Mono"/>
+            </a:endParaRPr>
+          </a:p>
+        </p:txBody>
+      </p:sp>
+      <p:sp>
+        <p:nvSpPr>
+          <p:cNvPr id="17" name="文本框 16">
+            <a:extLst>
+              <a:ext uri="{FF2B5EF4-FFF2-40B4-BE49-F238E27FC236}">
+                <a16:creationId id="{BC460A70-9F17-D6EE-663D-F1DB78020284}"/>
+              </a:ext>
+            </a:extLst>
+          </p:cNvPr>
+          <p:cNvSpPr txBox="1"/>
+          <p:nvPr/>
+        </p:nvSpPr>
+        <p:spPr>
+          <a:xfrm>
+            <a:off x="9765793" y="1206343"/>
+            <a:ext cx="1967492" cy="307777"/>
+          </a:xfrm>
+          <a:prstGeom prst="rect">
+            <a:avLst/>
+          </a:prstGeom>
+          <a:noFill/>
+        </p:spPr>
+        <p:txBody>
+          <a:bodyPr wrap="square">
+            <a:spAutoFit/>
+          </a:bodyPr>
+          <a:lstStyle/>
+          <a:p>
+            <a:pPr algn="r">
+              <a:defRPr/>
+            </a:pPr>
+            <a:r>
+              <a:rPr lang="en-US" altLang="zh-CN" b="1" i="1" dirty="0">
+                <a:solidFill>
+                  <a:srgbClr val="FF2B20"/>
+                </a:solidFill>
+                <a:latin typeface="Didot" panose="02000503000000020003" pitchFamily="2" charset="-79"/>
+                <a:ea typeface="MiSans VF Bold" pitchFamily="2" charset="-122"/>
+                <a:cs typeface="Didot" panose="02000503000000020003" pitchFamily="2" charset="-79"/>
+                <a:sym typeface="SimHei"/>
+              </a:rPr>
+              <a:t>FINDING 02</a:t>
+            </a:r>
+            <a:endParaRPr lang="en-US" altLang="zh-CN" sz="1400" b="1" i="1" u="none" strike="noStrike" dirty="0">
+              <a:solidFill>
+                <a:srgbClr val="FF2B20"/>
+              </a:solidFill>
+              <a:latin typeface="Didot" panose="02000503000000020003" pitchFamily="2" charset="-79"/>
+              <a:ea typeface="MiSans VF Bold" pitchFamily="2" charset="-122"/>
+              <a:cs typeface="Didot" panose="02000503000000020003" pitchFamily="2" charset="-79"/>
+              <a:sym typeface="SimHei"/>
+            </a:endParaRPr>
+          </a:p>
+        </p:txBody>
+      </p:sp>
+      <p:sp>
+        <p:nvSpPr>
+          <p:cNvPr id="5" name="AutoShape 5">
+            <a:extLst>
+              <a:ext uri="{FF2B5EF4-FFF2-40B4-BE49-F238E27FC236}">
+                <a16:creationId id="{E1BA5FBA-5836-5D8A-C33E-421550FF18BA}"/>
+              </a:ext>
+            </a:extLst>
+          </p:cNvPr>
+          <p:cNvSpPr/>
+          <p:nvPr/>
+        </p:nvSpPr>
+        <p:spPr>
+          <a:xfrm>
+            <a:off x="524799" y="1206344"/>
+            <a:ext cx="7832392" cy="615553"/>
+          </a:xfrm>
+          <a:prstGeom prst="rect">
+            <a:avLst/>
+          </a:prstGeom>
+          <a:noFill/>
+          <a:ln w="16933" cap="flat" cmpd="sng">
+            <a:noFill/>
+            <a:prstDash val="solid"/>
+            <a:round/>
+          </a:ln>
+        </p:spPr>
+        <p:txBody>
+          <a:bodyPr vert="horz" wrap="square" lIns="0" tIns="0" rIns="0" bIns="0" rtlCol="0" anchor="t" anchorCtr="0">
+            <a:spAutoFit/>
+          </a:bodyPr>
+          <a:lstStyle/>
+          <a:p>
+            <a:pPr>
+              <a:defRPr/>
+            </a:pPr>
+            <a:r>
+              <a:rPr lang="zh-CN" altLang="en-US" sz="4000" b="1" dirty="0">
+                <a:solidFill>
+                  <a:srgbClr val="F7F7F5"/>
+                </a:solidFill>
+                <a:latin typeface="MiSans VF Bold" pitchFamily="2" charset="-122"/>
+                <a:ea typeface="MiSans VF Bold" pitchFamily="2" charset="-122"/>
+                <a:cs typeface="MiSans VF Bold" pitchFamily="2" charset="-122"/>
+                <a:sym typeface="SimHei"/>
+              </a:rPr>
+              <a:t>稀缺与不可逆是焊死的</a:t>
+            </a:r>
+            <a:endParaRPr lang="en-US" altLang="zh-CN" sz="4000" b="1" dirty="0">
+              <a:solidFill>
+                <a:srgbClr val="F7F7F5"/>
+              </a:solidFill>
+              <a:latin typeface="MiSans VF Bold" pitchFamily="2" charset="-122"/>
+              <a:ea typeface="MiSans VF Bold" pitchFamily="2" charset="-122"/>
+              <a:cs typeface="MiSans VF Bold" pitchFamily="2" charset="-122"/>
+              <a:sym typeface="SimHei"/>
+            </a:endParaRPr>
+          </a:p>
+        </p:txBody>
+      </p:sp>
+      <p:sp>
+        <p:nvSpPr>
+          <p:cNvPr id="8" name="文本框 7">
+            <a:extLst>
+              <a:ext uri="{FF2B5EF4-FFF2-40B4-BE49-F238E27FC236}">
+                <a16:creationId id="{8A149F76-CC94-F809-65B6-D65EF3ADEC81}"/>
+              </a:ext>
+            </a:extLst>
+          </p:cNvPr>
+          <p:cNvSpPr txBox="1"/>
+          <p:nvPr/>
+        </p:nvSpPr>
+        <p:spPr>
+          <a:xfrm>
+            <a:off x="524797" y="4189719"/>
+            <a:ext cx="3077045" cy="1754326"/>
+          </a:xfrm>
+          <a:prstGeom prst="rect">
+            <a:avLst/>
+          </a:prstGeom>
+          <a:noFill/>
+        </p:spPr>
+        <p:txBody>
+          <a:bodyPr wrap="square" lIns="0" tIns="0" rIns="0" bIns="0" anchor="b">
+            <a:spAutoFit/>
+          </a:bodyPr>
+          <a:lstStyle/>
+          <a:p>
+            <a:pPr>
+              <a:spcBef>
+                <a:spcPts val="1200"/>
+              </a:spcBef>
+              <a:defRPr/>
+            </a:pPr>
+            <a:r>
+              <a:rPr lang="zh-CN" altLang="en-US" sz="1200" dirty="0">
+                <a:solidFill>
+                  <a:srgbClr val="F7F7F5">
+                    <a:alpha val="80000"/>
+                  </a:srgbClr>
+                </a:solidFill>
+                <a:latin typeface="MiSans VF Light" pitchFamily="2" charset="-122"/>
+                <a:ea typeface="MiSans VF Light" pitchFamily="2" charset="-122"/>
+                <a:cs typeface="MiSans VF Light" pitchFamily="2" charset="-122"/>
+                <a:sym typeface="SimHei"/>
+              </a:rPr>
+              <a:t>撤掉稀缺就永远不饿，疤痕从不形成；撤掉不可逆，结构在撤除瞬间塌回均匀。</a:t>
+            </a:r>
+            <a:endParaRPr lang="en-US" altLang="zh-CN" sz="1200" dirty="0">
+              <a:solidFill>
+                <a:srgbClr val="F7F7F5">
+                  <a:alpha val="80000"/>
+                </a:srgbClr>
+              </a:solidFill>
+              <a:latin typeface="MiSans VF Light" pitchFamily="2" charset="-122"/>
+              <a:ea typeface="MiSans VF Light" pitchFamily="2" charset="-122"/>
+              <a:cs typeface="MiSans VF Light" pitchFamily="2" charset="-122"/>
+              <a:sym typeface="SimHei"/>
+            </a:endParaRPr>
+          </a:p>
+          <a:p>
+            <a:pPr>
+              <a:spcBef>
+                <a:spcPts val="1200"/>
+              </a:spcBef>
+              <a:defRPr/>
+            </a:pPr>
+            <a:r>
+              <a:rPr lang="zh-CN" altLang="en-US" sz="1200" dirty="0">
+                <a:solidFill>
+                  <a:srgbClr val="F7F7F5">
+                    <a:alpha val="80000"/>
+                  </a:srgbClr>
+                </a:solidFill>
+                <a:latin typeface="MiSans VF Light" pitchFamily="2" charset="-122"/>
+                <a:ea typeface="MiSans VF Light" pitchFamily="2" charset="-122"/>
+                <a:cs typeface="MiSans VF Light" pitchFamily="2" charset="-122"/>
+                <a:sym typeface="SimHei"/>
+              </a:rPr>
+              <a:t/>
+            </a:r>
+          </a:p>
+          <a:p>
+            <a:pPr>
+              <a:spcBef>
+                <a:spcPts val="1200"/>
+              </a:spcBef>
+              <a:defRPr/>
+            </a:pPr>
+            <a:r>
+              <a:rPr lang="zh-CN" altLang="en-US" sz="1200" dirty="0">
+                <a:solidFill>
+                  <a:srgbClr val="F7F7F5">
+                    <a:alpha val="80000"/>
+                  </a:srgbClr>
+                </a:solidFill>
+                <a:latin typeface="MiSans VF Light" pitchFamily="2" charset="-122"/>
+                <a:ea typeface="MiSans VF Light" pitchFamily="2" charset="-122"/>
+                <a:cs typeface="MiSans VF Light" pitchFamily="2" charset="-122"/>
+                <a:sym typeface="SimHei"/>
+              </a:rPr>
+              <a:t/>
+            </a:r>
+          </a:p>
+          <a:p>
+            <a:pPr>
+              <a:spcBef>
+                <a:spcPts val="1200"/>
+              </a:spcBef>
+              <a:defRPr/>
+            </a:pPr>
+            <a:r>
+              <a:rPr lang="zh-CN" altLang="en-US" sz="1200" dirty="0">
+                <a:solidFill>
+                  <a:srgbClr val="F7F7F5">
+                    <a:alpha val="80000"/>
+                  </a:srgbClr>
+                </a:solidFill>
+                <a:latin typeface="MiSans VF Light" pitchFamily="2" charset="-122"/>
+                <a:ea typeface="MiSans VF Light" pitchFamily="2" charset="-122"/>
+                <a:cs typeface="MiSans VF Light" pitchFamily="2" charset="-122"/>
+                <a:sym typeface="SimHei"/>
+              </a:rPr>
+              <a:t/>
+            </a:r>
+          </a:p>
+        </p:txBody>
+      </p:sp>
+      <p:graphicFrame>
+        <p:nvGraphicFramePr>
+          <p:cNvPr id="6" name="159">
+            <a:extLst>
+              <a:ext uri="{FF2B5EF4-FFF2-40B4-BE49-F238E27FC236}">
+                <a16:creationId id="{A52B4077-F662-D01B-7578-086FAB2FC4F4}"/>
+              </a:ext>
+            </a:extLst>
+          </p:cNvPr>
+          <p:cNvGraphicFramePr/>
+          <p:nvPr>
+            <p:extLst>
+              <p:ext uri="{D42A27DB-BD31-4B8C-83A1-F6EECF244321}">
+                <p14:modId val="1740418208"/>
+              </p:ext>
+            </p:extLst>
+          </p:nvPr>
+        </p:nvGraphicFramePr>
+        <p:xfrm>
+          <a:off x="5016648" y="2319645"/>
+          <a:ext cx="6716635" cy="3740148"/>
+        </p:xfrm>
+        <a:graphic>
+          <a:graphicData uri="http://schemas.openxmlformats.org/drawingml/2006/chart">
+            <c:chart r:id="rId2"/>
+          </a:graphicData>
+        </a:graphic>
+      </p:graphicFrame>
+    </p:spTree>
+    <p:extLst>
+      <p:ext uri="{BB962C8B-B14F-4D97-AF65-F5344CB8AC3E}">
+        <p14:creationId val="1785801108"/>
+      </p:ext>
+    </p:extLst>
+  </p:cSld>
+  <p:clrMapOvr>
+    <a:masterClrMapping/>
+  </p:clrMapOvr>
+</p:sld>
+</file>
+
+<file path=ppt/slides/slide8.xml><?xml version="1.0" encoding="utf-8"?>
+<p:sld xmlns:a="http://schemas.openxmlformats.org/drawingml/2006/main" xmlns:a16="http://schemas.microsoft.com/office/drawing/2014/main" xmlns:c="http://schemas.openxmlformats.org/drawingml/2006/chart" xmlns:p="http://schemas.openxmlformats.org/presentationml/2006/main" xmlns:p14="http://schemas.microsoft.com/office/powerpoint/2010/main" xmlns:r="http://schemas.openxmlformats.org/officeDocument/2006/relationships">
+  <p:cSld>
+    <p:bg>
+      <p:bgPr>
+        <a:solidFill>
+          <a:schemeClr val="tx1"/>
+        </a:solidFill>
+        <a:effectLst/>
+      </p:bgPr>
+    </p:bg>
+    <p:spTree>
+      <p:nvGrpSpPr>
+        <p:cNvPr id="1" name="">
+          <a:extLst>
+            <a:ext uri="{FF2B5EF4-FFF2-40B4-BE49-F238E27FC236}">
+              <a16:creationId id="{A212CB99-4CD3-B7C0-D0FF-2ADCD87CCB00}"/>
+            </a:ext>
+          </a:extLst>
+        </p:cNvPr>
+        <p:cNvGrpSpPr/>
+        <p:nvPr/>
+      </p:nvGrpSpPr>
+      <p:grpSpPr>
+        <a:xfrm>
+          <a:off x="0" y="0"/>
+          <a:ext cx="0" cy="0"/>
+          <a:chOff x="0" y="0"/>
+          <a:chExt cx="0" cy="0"/>
+        </a:xfrm>
+      </p:grpSpPr>
+      <p:grpSp>
+        <p:nvGrpSpPr>
+          <p:cNvPr id="2" name="组合 1">
+            <a:extLst>
+              <a:ext uri="{FF2B5EF4-FFF2-40B4-BE49-F238E27FC236}">
+                <a16:creationId id="{F96E250E-5D02-34BD-9AC5-3E06ACBDCF59}"/>
+              </a:ext>
+            </a:extLst>
+          </p:cNvPr>
+          <p:cNvGrpSpPr/>
+          <p:nvPr/>
+        </p:nvGrpSpPr>
+        <p:grpSpPr>
+          <a:xfrm>
+            <a:off x="524797" y="385358"/>
+            <a:ext cx="11208487" cy="141577"/>
+            <a:chOff x="524797" y="385358"/>
+            <a:chExt cx="11208487" cy="141577"/>
+          </a:xfrm>
+        </p:grpSpPr>
+        <p:sp>
+          <p:nvSpPr>
+            <p:cNvPr id="3" name="AutoShape 2">
+              <a:extLst>
+                <a:ext uri="{FF2B5EF4-FFF2-40B4-BE49-F238E27FC236}">
+                  <a16:creationId id="{ED4DF19A-246E-507F-9405-7B6814BF47A0}"/>
+                </a:ext>
+              </a:extLst>
+            </p:cNvPr>
+            <p:cNvSpPr/>
+            <p:nvPr/>
+          </p:nvSpPr>
+          <p:spPr>
+            <a:xfrm>
+              <a:off x="524797" y="385358"/>
+              <a:ext cx="3077046" cy="141577"/>
+            </a:xfrm>
+            <a:prstGeom prst="rect">
+              <a:avLst/>
+            </a:prstGeom>
+            <a:noFill/>
+            <a:ln w="16933" cap="flat" cmpd="sng">
+              <a:noFill/>
+              <a:prstDash val="solid"/>
+              <a:round/>
+            </a:ln>
+          </p:spPr>
+          <p:txBody>
+            <a:bodyPr vert="horz" wrap="square" lIns="0" tIns="0" rIns="0" bIns="0" rtlCol="0" anchor="t" anchorCtr="0">
+              <a:spAutoFit/>
+            </a:bodyPr>
+            <a:lstStyle/>
+            <a:p>
+              <a:pPr>
+                <a:lnSpc>
+                  <a:spcPct val="125000"/>
+                </a:lnSpc>
+                <a:defRPr/>
+              </a:pPr>
+              <a:r>
+                <a:rPr lang="en-US" sz="800" dirty="0">
+                  <a:solidFill>
+                    <a:srgbClr val="0B0B0C">
+                      <a:alpha val="50000"/>
+                    </a:srgbClr>
+                  </a:solidFill>
+                  <a:latin typeface="MiSans VF Light" pitchFamily="2" charset="-122"/>
+                  <a:ea typeface="MiSans VF Light" pitchFamily="2" charset="-122"/>
+                  <a:cs typeface="MiSans VF Light" pitchFamily="2" charset="-122"/>
+                  <a:sym typeface="JetBrains Mono"/>
+                </a:rPr>
+                <a:t/>
+              </a:r>
+              <a:r>
+                <a:rPr lang="zh-CN" altLang="en-US" sz="800" dirty="0">
+                  <a:solidFill>
+                    <a:srgbClr val="0B0B0C">
+                      <a:alpha val="50000"/>
+                    </a:srgbClr>
+                  </a:solidFill>
+                  <a:latin typeface="MiSans VF Light" pitchFamily="2" charset="-122"/>
+                  <a:ea typeface="MiSans VF Light" pitchFamily="2" charset="-122"/>
+                  <a:cs typeface="MiSans VF Light" pitchFamily="2" charset="-122"/>
+                  <a:sym typeface="JetBrains Mono"/>
+                </a:rPr>
+                <a:t/>
+              </a:r>
+              <a:r>
+                <a:rPr lang="en-US" altLang="zh-CN" sz="800" dirty="0">
+                  <a:solidFill>
+                    <a:srgbClr val="0B0B0C">
+                      <a:alpha val="50000"/>
+                    </a:srgbClr>
+                  </a:solidFill>
+                  <a:latin typeface="MiSans VF Light" pitchFamily="2" charset="-122"/>
+                  <a:ea typeface="MiSans VF Light" pitchFamily="2" charset="-122"/>
+                  <a:cs typeface="MiSans VF Light" pitchFamily="2" charset="-122"/>
+                  <a:sym typeface="JetBrains Mono"/>
+                </a:rPr>
+                <a:t/>
+              </a:r>
+              <a:endParaRPr lang="en-US" sz="800" dirty="0">
+                <a:solidFill>
+                  <a:srgbClr val="0B0B0C">
+                    <a:alpha val="50000"/>
+                  </a:srgbClr>
+                </a:solidFill>
+                <a:latin typeface="MiSans VF Light" pitchFamily="2" charset="-122"/>
+                <a:ea typeface="MiSans VF Light" pitchFamily="2" charset="-122"/>
+                <a:cs typeface="MiSans VF Light" pitchFamily="2" charset="-122"/>
+                <a:sym typeface="JetBrains Mono"/>
+              </a:endParaRPr>
+            </a:p>
+          </p:txBody>
+        </p:sp>
+        <p:sp>
+          <p:nvSpPr>
+            <p:cNvPr id="4" name="AutoShape 2">
+              <a:extLst>
+                <a:ext uri="{FF2B5EF4-FFF2-40B4-BE49-F238E27FC236}">
+                  <a16:creationId id="{06F2A5F3-2749-AF9C-5AAF-439D9448C6F1}"/>
+                </a:ext>
+              </a:extLst>
+            </p:cNvPr>
+            <p:cNvSpPr/>
+            <p:nvPr/>
+          </p:nvSpPr>
+          <p:spPr>
+            <a:xfrm>
+              <a:off x="5640314" y="385358"/>
+              <a:ext cx="911371" cy="141577"/>
+            </a:xfrm>
+            <a:prstGeom prst="rect">
+              <a:avLst/>
+            </a:prstGeom>
+            <a:noFill/>
+            <a:ln w="16933" cap="flat" cmpd="sng">
+              <a:noFill/>
+              <a:prstDash val="solid"/>
+              <a:round/>
+            </a:ln>
+          </p:spPr>
+          <p:txBody>
+            <a:bodyPr vert="horz" wrap="square" lIns="0" tIns="0" rIns="0" bIns="0" rtlCol="0" anchor="t" anchorCtr="0">
+              <a:spAutoFit/>
+            </a:bodyPr>
+            <a:lstStyle/>
+            <a:p>
+              <a:pPr algn="ctr">
+                <a:lnSpc>
+                  <a:spcPct val="125000"/>
+                </a:lnSpc>
+                <a:defRPr/>
+              </a:pPr>
+              <a:r>
+                <a:rPr lang="en-US" altLang="zh-CN" sz="800" dirty="0">
+                  <a:solidFill>
+                    <a:srgbClr val="0B0B0C">
+                      <a:alpha val="50000"/>
+                    </a:srgbClr>
+                  </a:solidFill>
+                  <a:latin typeface="MiSans VF Light" pitchFamily="2" charset="-122"/>
+                  <a:ea typeface="MiSans VF Light" pitchFamily="2" charset="-122"/>
+                  <a:cs typeface="MiSans VF Light" pitchFamily="2" charset="-122"/>
+                  <a:sym typeface="JetBrains Mono"/>
+                </a:rPr>
+                <a:t>2026</a:t>
+              </a:r>
+              <a:endParaRPr lang="en-US" sz="800" dirty="0">
+                <a:solidFill>
+                  <a:srgbClr val="0B0B0C">
+                    <a:alpha val="50000"/>
+                  </a:srgbClr>
+                </a:solidFill>
+                <a:latin typeface="MiSans VF Light" pitchFamily="2" charset="-122"/>
+                <a:ea typeface="MiSans VF Light" pitchFamily="2" charset="-122"/>
+                <a:cs typeface="MiSans VF Light" pitchFamily="2" charset="-122"/>
+              </a:endParaRPr>
+            </a:p>
+          </p:txBody>
+        </p:sp>
+        <p:sp>
+          <p:nvSpPr>
+            <p:cNvPr id="7" name="AutoShape 2">
+              <a:extLst>
+                <a:ext uri="{FF2B5EF4-FFF2-40B4-BE49-F238E27FC236}">
+                  <a16:creationId id="{ED63379F-3396-A36B-9520-BB0C1BED6BDD}"/>
+                </a:ext>
+              </a:extLst>
+            </p:cNvPr>
+            <p:cNvSpPr/>
+            <p:nvPr/>
+          </p:nvSpPr>
+          <p:spPr>
+            <a:xfrm>
+              <a:off x="8133284" y="385358"/>
+              <a:ext cx="3600000" cy="141577"/>
+            </a:xfrm>
+            <a:prstGeom prst="rect">
+              <a:avLst/>
+            </a:prstGeom>
+            <a:noFill/>
+            <a:ln w="16933" cap="flat" cmpd="sng">
+              <a:noFill/>
+              <a:prstDash val="solid"/>
+              <a:round/>
+            </a:ln>
+          </p:spPr>
+          <p:txBody>
+            <a:bodyPr vert="horz" wrap="square" lIns="0" tIns="0" rIns="0" bIns="0" rtlCol="0" anchor="t" anchorCtr="0">
+              <a:spAutoFit/>
+            </a:bodyPr>
+            <a:lstStyle/>
+            <a:p>
+              <a:pPr algn="r">
+                <a:lnSpc>
+                  <a:spcPct val="125000"/>
+                </a:lnSpc>
+                <a:defRPr/>
+              </a:pPr>
+              <a:r>
+                <a:rPr lang="en-US" sz="800" dirty="0">
+                  <a:solidFill>
+                    <a:srgbClr val="0B0B0C">
+                      <a:alpha val="50000"/>
+                    </a:srgbClr>
+                  </a:solidFill>
+                  <a:latin typeface="MiSans VF Light" pitchFamily="2" charset="-122"/>
+                  <a:ea typeface="MiSans VF Light" pitchFamily="2" charset="-122"/>
+                  <a:cs typeface="MiSans VF Light" pitchFamily="2" charset="-122"/>
+                  <a:sym typeface="JetBrains Mono"/>
+                </a:rPr>
+                <a:t/>
+              </a:r>
+              <a:endParaRPr lang="en-US" sz="800" dirty="0">
+                <a:solidFill>
+                  <a:srgbClr val="0B0B0C">
+                    <a:alpha val="50000"/>
+                  </a:srgbClr>
+                </a:solidFill>
+                <a:latin typeface="MiSans VF Light" pitchFamily="2" charset="-122"/>
+                <a:ea typeface="MiSans VF Light" pitchFamily="2" charset="-122"/>
+                <a:cs typeface="MiSans VF Light" pitchFamily="2" charset="-122"/>
+              </a:endParaRPr>
+            </a:p>
+          </p:txBody>
+        </p:sp>
+      </p:grpSp>
+      <p:sp>
+        <p:nvSpPr>
+          <p:cNvPr id="9" name="AutoShape 2">
+            <a:extLst>
+              <a:ext uri="{FF2B5EF4-FFF2-40B4-BE49-F238E27FC236}">
+                <a16:creationId id="{807EA64E-1BCB-6D94-702D-53897CBE125C}"/>
+              </a:ext>
+            </a:extLst>
+          </p:cNvPr>
+          <p:cNvSpPr/>
+          <p:nvPr/>
+        </p:nvSpPr>
+        <p:spPr>
+          <a:xfrm>
+            <a:off x="524797" y="6295670"/>
+            <a:ext cx="3077046" cy="141577"/>
+          </a:xfrm>
+          <a:prstGeom prst="rect">
+            <a:avLst/>
+          </a:prstGeom>
+          <a:noFill/>
+          <a:ln w="16933" cap="flat" cmpd="sng">
+            <a:noFill/>
+            <a:prstDash val="solid"/>
+            <a:round/>
+          </a:ln>
+        </p:spPr>
+        <p:txBody>
+          <a:bodyPr vert="horz" wrap="square" lIns="0" tIns="0" rIns="0" bIns="0" rtlCol="0" anchor="t" anchorCtr="0">
+            <a:spAutoFit/>
+          </a:bodyPr>
+          <a:lstStyle/>
+          <a:p>
+            <a:pPr>
+              <a:lnSpc>
+                <a:spcPct val="125000"/>
+              </a:lnSpc>
+              <a:defRPr/>
+            </a:pPr>
+            <a:r>
+              <a:rPr lang="en-US" altLang="zh-CN" sz="800" dirty="0">
+                <a:solidFill>
+                  <a:srgbClr val="0B0B0C">
+                    <a:alpha val="50000"/>
+                  </a:srgbClr>
+                </a:solidFill>
+                <a:latin typeface="MiSans VF Light" pitchFamily="2" charset="-122"/>
+                <a:ea typeface="MiSans VF Light" pitchFamily="2" charset="-122"/>
+                <a:cs typeface="MiSans VF Light" pitchFamily="2" charset="-122"/>
+                <a:sym typeface="JetBrains Mono"/>
+              </a:rPr>
+              <a:t/>
+            </a:r>
+            <a:endParaRPr lang="en-US" sz="800" dirty="0">
+              <a:solidFill>
+                <a:srgbClr val="0B0B0C">
+                  <a:alpha val="50000"/>
+                </a:srgbClr>
+              </a:solidFill>
+              <a:latin typeface="MiSans VF Light" pitchFamily="2" charset="-122"/>
+              <a:ea typeface="MiSans VF Light" pitchFamily="2" charset="-122"/>
+              <a:cs typeface="MiSans VF Light" pitchFamily="2" charset="-122"/>
+              <a:sym typeface="JetBrains Mono"/>
+            </a:endParaRPr>
+          </a:p>
+        </p:txBody>
+      </p:sp>
+      <p:sp>
+        <p:nvSpPr>
+          <p:cNvPr id="17" name="文本框 16">
+            <a:extLst>
+              <a:ext uri="{FF2B5EF4-FFF2-40B4-BE49-F238E27FC236}">
+                <a16:creationId id="{C4DEAFCA-42F4-470D-1383-2F8F2FD6F265}"/>
+              </a:ext>
+            </a:extLst>
+          </p:cNvPr>
+          <p:cNvSpPr txBox="1"/>
+          <p:nvPr/>
+        </p:nvSpPr>
+        <p:spPr>
+          <a:xfrm>
+            <a:off x="9765793" y="1206343"/>
+            <a:ext cx="1967492" cy="307777"/>
+          </a:xfrm>
+          <a:prstGeom prst="rect">
+            <a:avLst/>
+          </a:prstGeom>
+          <a:noFill/>
+        </p:spPr>
+        <p:txBody>
+          <a:bodyPr wrap="square">
+            <a:spAutoFit/>
+          </a:bodyPr>
+          <a:lstStyle/>
+          <a:p>
+            <a:pPr algn="r">
+              <a:defRPr/>
+            </a:pPr>
+            <a:r>
+              <a:rPr lang="en-US" altLang="zh-CN" b="1" i="1" dirty="0">
+                <a:solidFill>
+                  <a:srgbClr val="E62B1E"/>
+                </a:solidFill>
+                <a:latin typeface="Didot" panose="02000503000000020003" pitchFamily="2" charset="-79"/>
+                <a:ea typeface="MiSans VF Bold" pitchFamily="2" charset="-122"/>
+                <a:cs typeface="Didot" panose="02000503000000020003" pitchFamily="2" charset="-79"/>
+                <a:sym typeface="SimHei"/>
+              </a:rPr>
+              <a:t>FINDING 03</a:t>
+            </a:r>
+            <a:endParaRPr lang="en-US" altLang="zh-CN" sz="1400" b="1" i="1" u="none" strike="noStrike" dirty="0">
+              <a:solidFill>
+                <a:srgbClr val="E62B1E"/>
+              </a:solidFill>
+              <a:latin typeface="Didot" panose="02000503000000020003" pitchFamily="2" charset="-79"/>
+              <a:ea typeface="MiSans VF Bold" pitchFamily="2" charset="-122"/>
+              <a:cs typeface="Didot" panose="02000503000000020003" pitchFamily="2" charset="-79"/>
+              <a:sym typeface="SimHei"/>
+            </a:endParaRPr>
+          </a:p>
+        </p:txBody>
+      </p:sp>
+      <p:sp>
+        <p:nvSpPr>
+          <p:cNvPr id="5" name="AutoShape 5">
+            <a:extLst>
+              <a:ext uri="{FF2B5EF4-FFF2-40B4-BE49-F238E27FC236}">
+                <a16:creationId id="{CC22604E-A468-41F3-72E3-DDA249189E72}"/>
+              </a:ext>
+            </a:extLst>
+          </p:cNvPr>
+          <p:cNvSpPr/>
+          <p:nvPr/>
+        </p:nvSpPr>
+        <p:spPr>
+          <a:xfrm>
+            <a:off x="524799" y="1206344"/>
+            <a:ext cx="8938178" cy="615553"/>
+          </a:xfrm>
+          <a:prstGeom prst="rect">
+            <a:avLst/>
+          </a:prstGeom>
+          <a:noFill/>
+          <a:ln w="16933" cap="flat" cmpd="sng">
+            <a:noFill/>
+            <a:prstDash val="solid"/>
+            <a:round/>
+          </a:ln>
+        </p:spPr>
+        <p:txBody>
+          <a:bodyPr vert="horz" wrap="square" lIns="0" tIns="0" rIns="0" bIns="0" rtlCol="0" anchor="t" anchorCtr="0">
+            <a:spAutoFit/>
+          </a:bodyPr>
+          <a:lstStyle/>
+          <a:p>
+            <a:pPr>
+              <a:defRPr/>
+            </a:pPr>
+            <a:r>
+              <a:rPr lang="zh-CN" altLang="en-US" sz="4000" b="1" dirty="0">
+                <a:solidFill>
+                  <a:srgbClr val="0B0B0C"/>
+                </a:solidFill>
+                <a:latin typeface="MiSans VF Bold" pitchFamily="2" charset="-122"/>
+                <a:ea typeface="MiSans VF Bold" pitchFamily="2" charset="-122"/>
+                <a:cs typeface="MiSans VF Bold" pitchFamily="2" charset="-122"/>
+                <a:sym typeface="SimHei"/>
+              </a:rPr>
+              <a:t>结构有关键期，早给早撤优于全程</a:t>
+            </a:r>
+            <a:endParaRPr lang="en-US" altLang="zh-CN" sz="4000" b="1" dirty="0">
+              <a:solidFill>
+                <a:srgbClr val="0B0B0C"/>
+              </a:solidFill>
+              <a:latin typeface="MiSans VF Bold" pitchFamily="2" charset="-122"/>
+              <a:ea typeface="MiSans VF Bold" pitchFamily="2" charset="-122"/>
+              <a:cs typeface="MiSans VF Bold" pitchFamily="2" charset="-122"/>
+              <a:sym typeface="SimHei"/>
+            </a:endParaRPr>
+          </a:p>
+        </p:txBody>
+      </p:sp>
+      <p:sp>
+        <p:nvSpPr>
+          <p:cNvPr id="8" name="文本框 7">
+            <a:extLst>
+              <a:ext uri="{FF2B5EF4-FFF2-40B4-BE49-F238E27FC236}">
+                <a16:creationId id="{B146946D-2DB9-28AF-D3CB-159D5B7DC4B1}"/>
+              </a:ext>
+            </a:extLst>
+          </p:cNvPr>
+          <p:cNvSpPr txBox="1"/>
+          <p:nvPr/>
+        </p:nvSpPr>
+        <p:spPr>
+          <a:xfrm>
+            <a:off x="524797" y="4189719"/>
+            <a:ext cx="3077045" cy="1754326"/>
+          </a:xfrm>
+          <a:prstGeom prst="rect">
+            <a:avLst/>
+          </a:prstGeom>
+          <a:noFill/>
+        </p:spPr>
+        <p:txBody>
+          <a:bodyPr wrap="square" lIns="0" tIns="0" rIns="0" bIns="0" anchor="b">
+            <a:spAutoFit/>
+          </a:bodyPr>
+          <a:lstStyle/>
+          <a:p>
+            <a:pPr>
+              <a:spcBef>
+                <a:spcPts val="1200"/>
+              </a:spcBef>
+              <a:defRPr/>
+            </a:pPr>
+            <a:r>
+              <a:rPr lang="zh-CN" altLang="en-US" sz="1200" dirty="0">
+                <a:solidFill>
+                  <a:srgbClr val="0B0B0C">
+                    <a:alpha val="80000"/>
+                  </a:srgbClr>
+                </a:solidFill>
+                <a:latin typeface="MiSans VF Light" pitchFamily="2" charset="-122"/>
+                <a:ea typeface="MiSans VF Light" pitchFamily="2" charset="-122"/>
+                <a:cs typeface="MiSans VF Light" pitchFamily="2" charset="-122"/>
+                <a:sym typeface="SimHei"/>
+              </a:rPr>
+              <a:t>早期 0–150 拍引导后撤除，终态偏度 1.0933，强于全程施加的 0.8502。</a:t>
+            </a:r>
+            <a:endParaRPr lang="en-US" altLang="zh-CN" sz="1200" dirty="0">
+              <a:solidFill>
+                <a:srgbClr val="0B0B0C">
+                  <a:alpha val="80000"/>
+                </a:srgbClr>
+              </a:solidFill>
+              <a:latin typeface="MiSans VF Light" pitchFamily="2" charset="-122"/>
+              <a:ea typeface="MiSans VF Light" pitchFamily="2" charset="-122"/>
+              <a:cs typeface="MiSans VF Light" pitchFamily="2" charset="-122"/>
+              <a:sym typeface="SimHei"/>
+            </a:endParaRPr>
+          </a:p>
+          <a:p>
+            <a:pPr>
+              <a:spcBef>
+                <a:spcPts val="1200"/>
+              </a:spcBef>
+              <a:defRPr/>
+            </a:pPr>
+            <a:r>
+              <a:rPr lang="zh-CN" altLang="en-US" sz="1200" dirty="0">
+                <a:solidFill>
+                  <a:srgbClr val="0B0B0C">
+                    <a:alpha val="80000"/>
+                  </a:srgbClr>
+                </a:solidFill>
+                <a:latin typeface="MiSans VF Light" pitchFamily="2" charset="-122"/>
+                <a:ea typeface="MiSans VF Light" pitchFamily="2" charset="-122"/>
+                <a:cs typeface="MiSans VF Light" pitchFamily="2" charset="-122"/>
+                <a:sym typeface="SimHei"/>
+              </a:rPr>
+              <a:t/>
+            </a:r>
+          </a:p>
+          <a:p>
+            <a:pPr>
+              <a:spcBef>
+                <a:spcPts val="1200"/>
+              </a:spcBef>
+              <a:defRPr/>
+            </a:pPr>
+            <a:r>
+              <a:rPr lang="zh-CN" altLang="en-US" sz="1200" dirty="0">
+                <a:solidFill>
+                  <a:srgbClr val="0B0B0C">
+                    <a:alpha val="80000"/>
+                  </a:srgbClr>
+                </a:solidFill>
+                <a:latin typeface="MiSans VF Light" pitchFamily="2" charset="-122"/>
+                <a:ea typeface="MiSans VF Light" pitchFamily="2" charset="-122"/>
+                <a:cs typeface="MiSans VF Light" pitchFamily="2" charset="-122"/>
+                <a:sym typeface="SimHei"/>
+              </a:rPr>
+              <a:t/>
+            </a:r>
+          </a:p>
+          <a:p>
+            <a:pPr>
+              <a:spcBef>
+                <a:spcPts val="1200"/>
+              </a:spcBef>
+              <a:defRPr/>
+            </a:pPr>
+            <a:r>
+              <a:rPr lang="zh-CN" altLang="en-US" sz="1200" dirty="0">
+                <a:solidFill>
+                  <a:srgbClr val="0B0B0C">
+                    <a:alpha val="80000"/>
+                  </a:srgbClr>
+                </a:solidFill>
+                <a:latin typeface="MiSans VF Light" pitchFamily="2" charset="-122"/>
+                <a:ea typeface="MiSans VF Light" pitchFamily="2" charset="-122"/>
+                <a:cs typeface="MiSans VF Light" pitchFamily="2" charset="-122"/>
+                <a:sym typeface="SimHei"/>
+              </a:rPr>
+              <a:t/>
+            </a:r>
+          </a:p>
+        </p:txBody>
+      </p:sp>
+      <p:graphicFrame>
+        <p:nvGraphicFramePr>
+          <p:cNvPr id="6" name="159">
+            <a:extLst>
+              <a:ext uri="{FF2B5EF4-FFF2-40B4-BE49-F238E27FC236}">
+                <a16:creationId id="{555CAA42-4DEC-8405-036D-0ADC74683881}"/>
+              </a:ext>
+            </a:extLst>
+          </p:cNvPr>
+          <p:cNvGraphicFramePr/>
+          <p:nvPr>
+            <p:extLst>
+              <p:ext uri="{D42A27DB-BD31-4B8C-83A1-F6EECF244321}">
+                <p14:modId val="92227262"/>
+              </p:ext>
+            </p:extLst>
+          </p:nvPr>
+        </p:nvGraphicFramePr>
+        <p:xfrm>
+          <a:off x="5016648" y="2319645"/>
+          <a:ext cx="6716635" cy="3740148"/>
+        </p:xfrm>
+        <a:graphic>
+          <a:graphicData uri="http://schemas.openxmlformats.org/drawingml/2006/chart">
+            <c:chart r:id="rId2"/>
+          </a:graphicData>
+        </a:graphic>
+      </p:graphicFrame>
+    </p:spTree>
+    <p:extLst>
+      <p:ext uri="{BB962C8B-B14F-4D97-AF65-F5344CB8AC3E}">
+        <p14:creationId val="3777681054"/>
+      </p:ext>
+    </p:extLst>
+  </p:cSld>
+  <p:clrMapOvr>
+    <a:masterClrMapping/>
+  </p:clrMapOvr>
+</p:sld>
+</file>
+
+<file path=ppt/slides/slide9.xml><?xml version="1.0" encoding="utf-8"?>
+<p:sld xmlns:a="http://schemas.openxmlformats.org/drawingml/2006/main" xmlns:a14="http://schemas.microsoft.com/office/drawing/2010/main" xmlns:a16="http://schemas.microsoft.com/office/drawing/2014/main" xmlns:p="http://schemas.openxmlformats.org/presentationml/2006/main" xmlns:p14="http://schemas.microsoft.com/office/powerpoint/2010/main" xmlns:r="http://schemas.openxmlformats.org/officeDocument/2006/relationships">
+  <p:cSld>
+    <p:spTree>
+      <p:nvGrpSpPr>
+        <p:cNvPr id="1" name="">
+          <a:extLst>
+            <a:ext uri="{FF2B5EF4-FFF2-40B4-BE49-F238E27FC236}">
+              <a16:creationId id="{0733E767-E071-1B3D-EC94-ACFA47081450}"/>
+            </a:ext>
+          </a:extLst>
+        </p:cNvPr>
+        <p:cNvGrpSpPr/>
+        <p:nvPr/>
+      </p:nvGrpSpPr>
+      <p:grpSpPr>
+        <a:xfrm>
+          <a:off x="0" y="0"/>
+          <a:ext cx="0" cy="0"/>
+          <a:chOff x="0" y="0"/>
+          <a:chExt cx="0" cy="0"/>
+        </a:xfrm>
+      </p:grpSpPr>
+      <p:grpSp>
+        <p:nvGrpSpPr>
+          <p:cNvPr id="2" name="组合 1">
+            <a:extLst>
+              <a:ext uri="{FF2B5EF4-FFF2-40B4-BE49-F238E27FC236}">
+                <a16:creationId id="{C3074BD4-4DDE-D321-F1A9-EEF8FF1A076C}"/>
+              </a:ext>
+            </a:extLst>
+          </p:cNvPr>
+          <p:cNvGrpSpPr/>
+          <p:nvPr/>
+        </p:nvGrpSpPr>
+        <p:grpSpPr>
+          <a:xfrm>
+            <a:off x="524797" y="385358"/>
+            <a:ext cx="11208487" cy="141577"/>
+            <a:chOff x="524797" y="385358"/>
+            <a:chExt cx="11208487" cy="141577"/>
+          </a:xfrm>
+        </p:grpSpPr>
+        <p:sp>
+          <p:nvSpPr>
+            <p:cNvPr id="3" name="AutoShape 2">
+              <a:extLst>
+                <a:ext uri="{FF2B5EF4-FFF2-40B4-BE49-F238E27FC236}">
+                  <a16:creationId id="{1B9905FF-442A-A874-54EB-EF8955B48884}"/>
+                </a:ext>
+              </a:extLst>
+            </p:cNvPr>
+            <p:cNvSpPr/>
+            <p:nvPr/>
+          </p:nvSpPr>
+          <p:spPr>
+            <a:xfrm>
+              <a:off x="524797" y="385358"/>
+              <a:ext cx="3077046" cy="141577"/>
+            </a:xfrm>
+            <a:prstGeom prst="rect">
+              <a:avLst/>
+            </a:prstGeom>
+            <a:noFill/>
+            <a:ln w="16933" cap="flat" cmpd="sng">
+              <a:noFill/>
+              <a:prstDash val="solid"/>
+              <a:round/>
+            </a:ln>
+          </p:spPr>
+          <p:txBody>
+            <a:bodyPr vert="horz" wrap="square" lIns="0" tIns="0" rIns="0" bIns="0" rtlCol="0" anchor="t" anchorCtr="0">
+              <a:spAutoFit/>
+            </a:bodyPr>
+            <a:lstStyle/>
+            <a:p>
+              <a:pPr>
+                <a:lnSpc>
+                  <a:spcPct val="125000"/>
+                </a:lnSpc>
+                <a:defRPr/>
+              </a:pPr>
+              <a:r>
+                <a:rPr lang="en-US" sz="800" dirty="0">
+                  <a:solidFill>
+                    <a:srgbClr val="F7F7F5">
+                      <a:alpha val="50000"/>
+                    </a:srgbClr>
+                  </a:solidFill>
+                  <a:latin typeface="MiSans VF Light" pitchFamily="2" charset="-122"/>
+                  <a:ea typeface="MiSans VF Light" pitchFamily="2" charset="-122"/>
+                  <a:cs typeface="MiSans VF Light" pitchFamily="2" charset="-122"/>
+                  <a:sym typeface="JetBrains Mono"/>
+                </a:rPr>
+                <a:t/>
+              </a:r>
+              <a:r>
+                <a:rPr lang="zh-CN" altLang="en-US" sz="800" dirty="0">
+                  <a:solidFill>
+                    <a:srgbClr val="F7F7F5">
+                      <a:alpha val="50000"/>
+                    </a:srgbClr>
+                  </a:solidFill>
+                  <a:latin typeface="MiSans VF Light" pitchFamily="2" charset="-122"/>
+                  <a:ea typeface="MiSans VF Light" pitchFamily="2" charset="-122"/>
+                  <a:cs typeface="MiSans VF Light" pitchFamily="2" charset="-122"/>
+                  <a:sym typeface="JetBrains Mono"/>
+                </a:rPr>
+                <a:t/>
+              </a:r>
+              <a:r>
+                <a:rPr lang="en-US" altLang="zh-CN" sz="800" dirty="0">
+                  <a:solidFill>
+                    <a:srgbClr val="F7F7F5">
+                      <a:alpha val="50000"/>
+                    </a:srgbClr>
+                  </a:solidFill>
+                  <a:latin typeface="MiSans VF Light" pitchFamily="2" charset="-122"/>
+                  <a:ea typeface="MiSans VF Light" pitchFamily="2" charset="-122"/>
+                  <a:cs typeface="MiSans VF Light" pitchFamily="2" charset="-122"/>
+                  <a:sym typeface="JetBrains Mono"/>
+                </a:rPr>
+                <a:t/>
+              </a:r>
+              <a:endParaRPr lang="en-US" sz="800" dirty="0">
+                <a:solidFill>
+                  <a:srgbClr val="F7F7F5">
+                    <a:alpha val="50000"/>
+                  </a:srgbClr>
+                </a:solidFill>
+                <a:latin typeface="MiSans VF Light" pitchFamily="2" charset="-122"/>
+                <a:ea typeface="MiSans VF Light" pitchFamily="2" charset="-122"/>
+                <a:cs typeface="MiSans VF Light" pitchFamily="2" charset="-122"/>
+                <a:sym typeface="JetBrains Mono"/>
+              </a:endParaRPr>
+            </a:p>
+          </p:txBody>
+        </p:sp>
+        <p:sp>
+          <p:nvSpPr>
+            <p:cNvPr id="4" name="AutoShape 2">
+              <a:extLst>
+                <a:ext uri="{FF2B5EF4-FFF2-40B4-BE49-F238E27FC236}">
+                  <a16:creationId id="{4E0A8210-1F5D-A3C2-8882-FAAD17F19456}"/>
+                </a:ext>
+              </a:extLst>
+            </p:cNvPr>
+            <p:cNvSpPr/>
+            <p:nvPr/>
+          </p:nvSpPr>
+          <p:spPr>
+            <a:xfrm>
+              <a:off x="5640314" y="385358"/>
+              <a:ext cx="911371" cy="141577"/>
+            </a:xfrm>
+            <a:prstGeom prst="rect">
+              <a:avLst/>
+            </a:prstGeom>
+            <a:noFill/>
+            <a:ln w="16933" cap="flat" cmpd="sng">
+              <a:noFill/>
+              <a:prstDash val="solid"/>
+              <a:round/>
+            </a:ln>
+          </p:spPr>
+          <p:txBody>
+            <a:bodyPr vert="horz" wrap="square" lIns="0" tIns="0" rIns="0" bIns="0" rtlCol="0" anchor="t" anchorCtr="0">
+              <a:spAutoFit/>
+            </a:bodyPr>
+            <a:lstStyle/>
+            <a:p>
+              <a:pPr algn="ctr">
+                <a:lnSpc>
+                  <a:spcPct val="125000"/>
+                </a:lnSpc>
+                <a:defRPr/>
+              </a:pPr>
+              <a:r>
+                <a:rPr lang="en-US" altLang="zh-CN" sz="800" dirty="0">
+                  <a:solidFill>
+                    <a:srgbClr val="F7F7F5">
+                      <a:alpha val="50000"/>
+                    </a:srgbClr>
+                  </a:solidFill>
+                  <a:latin typeface="MiSans VF Light" pitchFamily="2" charset="-122"/>
+                  <a:ea typeface="MiSans VF Light" pitchFamily="2" charset="-122"/>
+                  <a:cs typeface="MiSans VF Light" pitchFamily="2" charset="-122"/>
+                  <a:sym typeface="JetBrains Mono"/>
+                </a:rPr>
+                <a:t>2026</a:t>
+              </a:r>
+              <a:endParaRPr lang="en-US" sz="800" dirty="0">
+                <a:solidFill>
+                  <a:srgbClr val="F7F7F5">
+                    <a:alpha val="50000"/>
+                  </a:srgbClr>
+                </a:solidFill>
+                <a:latin typeface="MiSans VF Light" pitchFamily="2" charset="-122"/>
+                <a:ea typeface="MiSans VF Light" pitchFamily="2" charset="-122"/>
+                <a:cs typeface="MiSans VF Light" pitchFamily="2" charset="-122"/>
+              </a:endParaRPr>
+            </a:p>
+          </p:txBody>
+        </p:sp>
+        <p:sp>
+          <p:nvSpPr>
+            <p:cNvPr id="7" name="AutoShape 2">
+              <a:extLst>
+                <a:ext uri="{FF2B5EF4-FFF2-40B4-BE49-F238E27FC236}">
+                  <a16:creationId id="{31A8279E-4031-98DF-4AE0-0FD294CB1063}"/>
+                </a:ext>
+              </a:extLst>
+            </p:cNvPr>
+            <p:cNvSpPr/>
+            <p:nvPr/>
+          </p:nvSpPr>
+          <p:spPr>
+            <a:xfrm>
+              <a:off x="8133284" y="385358"/>
+              <a:ext cx="3600000" cy="141577"/>
+            </a:xfrm>
+            <a:prstGeom prst="rect">
+              <a:avLst/>
+            </a:prstGeom>
+            <a:noFill/>
+            <a:ln w="16933" cap="flat" cmpd="sng">
+              <a:noFill/>
+              <a:prstDash val="solid"/>
+              <a:round/>
+            </a:ln>
+          </p:spPr>
+          <p:txBody>
+            <a:bodyPr vert="horz" wrap="square" lIns="0" tIns="0" rIns="0" bIns="0" rtlCol="0" anchor="t" anchorCtr="0">
+              <a:spAutoFit/>
+            </a:bodyPr>
+            <a:lstStyle/>
+            <a:p>
+              <a:pPr algn="r">
+                <a:lnSpc>
+                  <a:spcPct val="125000"/>
+                </a:lnSpc>
+                <a:defRPr/>
+              </a:pPr>
+              <a:r>
+                <a:rPr lang="en-US" sz="800" dirty="0">
+                  <a:solidFill>
+                    <a:srgbClr val="F7F7F5">
+                      <a:alpha val="50000"/>
+                    </a:srgbClr>
+                  </a:solidFill>
+                  <a:latin typeface="MiSans VF Light" pitchFamily="2" charset="-122"/>
+                  <a:ea typeface="MiSans VF Light" pitchFamily="2" charset="-122"/>
+                  <a:cs typeface="MiSans VF Light" pitchFamily="2" charset="-122"/>
+                  <a:sym typeface="JetBrains Mono"/>
+                </a:rPr>
+                <a:t/>
+              </a:r>
+              <a:endParaRPr lang="en-US" sz="800" dirty="0">
+                <a:solidFill>
+                  <a:srgbClr val="F7F7F5">
+                    <a:alpha val="50000"/>
+                  </a:srgbClr>
+                </a:solidFill>
+                <a:latin typeface="MiSans VF Light" pitchFamily="2" charset="-122"/>
+                <a:ea typeface="MiSans VF Light" pitchFamily="2" charset="-122"/>
+                <a:cs typeface="MiSans VF Light" pitchFamily="2" charset="-122"/>
+              </a:endParaRPr>
+            </a:p>
+          </p:txBody>
+        </p:sp>
+      </p:grpSp>
+      <p:sp>
+        <p:nvSpPr>
+          <p:cNvPr id="9" name="AutoShape 2">
+            <a:extLst>
+              <a:ext uri="{FF2B5EF4-FFF2-40B4-BE49-F238E27FC236}">
+                <a16:creationId id="{91770C30-0C43-023C-43F7-CBBF6EB7E9F3}"/>
+              </a:ext>
+            </a:extLst>
+          </p:cNvPr>
+          <p:cNvSpPr/>
+          <p:nvPr/>
+        </p:nvSpPr>
+        <p:spPr>
+          <a:xfrm>
+            <a:off x="524797" y="6295670"/>
+            <a:ext cx="3077046" cy="141577"/>
+          </a:xfrm>
+          <a:prstGeom prst="rect">
+            <a:avLst/>
+          </a:prstGeom>
+          <a:noFill/>
+          <a:ln w="16933" cap="flat" cmpd="sng">
+            <a:noFill/>
+            <a:prstDash val="solid"/>
+            <a:round/>
+          </a:ln>
+        </p:spPr>
+        <p:txBody>
+          <a:bodyPr vert="horz" wrap="square" lIns="0" tIns="0" rIns="0" bIns="0" rtlCol="0" anchor="t" anchorCtr="0">
+            <a:spAutoFit/>
+          </a:bodyPr>
+          <a:lstStyle/>
+          <a:p>
+            <a:pPr>
+              <a:lnSpc>
+                <a:spcPct val="125000"/>
+              </a:lnSpc>
+              <a:defRPr/>
+            </a:pPr>
+            <a:r>
+              <a:rPr lang="en-US" altLang="zh-CN" sz="800" dirty="0">
+                <a:solidFill>
+                  <a:srgbClr val="F7F7F5">
+                    <a:alpha val="50000"/>
+                  </a:srgbClr>
+                </a:solidFill>
+                <a:latin typeface="MiSans VF Light" pitchFamily="2" charset="-122"/>
+                <a:ea typeface="MiSans VF Light" pitchFamily="2" charset="-122"/>
+                <a:cs typeface="MiSans VF Light" pitchFamily="2" charset="-122"/>
+                <a:sym typeface="JetBrains Mono"/>
+              </a:rPr>
+              <a:t/>
+            </a:r>
+            <a:endParaRPr lang="en-US" sz="800" dirty="0">
+              <a:solidFill>
+                <a:srgbClr val="F7F7F5">
+                  <a:alpha val="50000"/>
+                </a:srgbClr>
+              </a:solidFill>
+              <a:latin typeface="MiSans VF Light" pitchFamily="2" charset="-122"/>
+              <a:ea typeface="MiSans VF Light" pitchFamily="2" charset="-122"/>
+              <a:cs typeface="MiSans VF Light" pitchFamily="2" charset="-122"/>
+              <a:sym typeface="JetBrains Mono"/>
+            </a:endParaRPr>
+          </a:p>
+        </p:txBody>
+      </p:sp>
+      <p:sp>
+        <p:nvSpPr>
+          <p:cNvPr id="17" name="文本框 16">
+            <a:extLst>
+              <a:ext uri="{FF2B5EF4-FFF2-40B4-BE49-F238E27FC236}">
+                <a16:creationId id="{7ECCDBCC-DA2E-2003-7153-CB77481A82CB}"/>
+              </a:ext>
+            </a:extLst>
+          </p:cNvPr>
+          <p:cNvSpPr txBox="1"/>
+          <p:nvPr/>
+        </p:nvSpPr>
+        <p:spPr>
+          <a:xfrm>
+            <a:off x="9765793" y="1206343"/>
+            <a:ext cx="1967492" cy="307777"/>
+          </a:xfrm>
+          <a:prstGeom prst="rect">
+            <a:avLst/>
+          </a:prstGeom>
+          <a:noFill/>
+        </p:spPr>
+        <p:txBody>
+          <a:bodyPr wrap="square">
+            <a:spAutoFit/>
+          </a:bodyPr>
+          <a:lstStyle/>
+          <a:p>
+            <a:pPr algn="r">
+              <a:defRPr/>
+            </a:pPr>
+            <a:r>
+              <a:rPr lang="en-US" altLang="zh-CN" b="1" i="1" dirty="0">
+                <a:solidFill>
+                  <a:srgbClr val="FF2B20"/>
+                </a:solidFill>
+                <a:latin typeface="Didot" panose="02000503000000020003" pitchFamily="2" charset="-79"/>
+                <a:ea typeface="MiSans VF Bold" pitchFamily="2" charset="-122"/>
+                <a:cs typeface="Didot" panose="02000503000000020003" pitchFamily="2" charset="-79"/>
+                <a:sym typeface="SimHei"/>
+              </a:rPr>
+              <a:t>FINDING 01</a:t>
+            </a:r>
+            <a:endParaRPr lang="en-US" altLang="zh-CN" sz="1400" b="1" i="1" u="none" strike="noStrike" dirty="0">
+              <a:solidFill>
+                <a:srgbClr val="FF2B20"/>
+              </a:solidFill>
+              <a:latin typeface="Didot" panose="02000503000000020003" pitchFamily="2" charset="-79"/>
+              <a:ea typeface="MiSans VF Bold" pitchFamily="2" charset="-122"/>
+              <a:cs typeface="Didot" panose="02000503000000020003" pitchFamily="2" charset="-79"/>
+              <a:sym typeface="SimHei"/>
+            </a:endParaRPr>
+          </a:p>
+        </p:txBody>
+      </p:sp>
+      <p:sp>
+        <p:nvSpPr>
+          <p:cNvPr id="5" name="AutoShape 5">
+            <a:extLst>
+              <a:ext uri="{FF2B5EF4-FFF2-40B4-BE49-F238E27FC236}">
+                <a16:creationId id="{996F59E9-3AEC-AC0F-24B7-4432260900C8}"/>
+              </a:ext>
+            </a:extLst>
+          </p:cNvPr>
+          <p:cNvSpPr/>
+          <p:nvPr/>
+        </p:nvSpPr>
+        <p:spPr>
+          <a:xfrm>
+            <a:off x="524798" y="1206344"/>
+            <a:ext cx="9083225" cy="615553"/>
+          </a:xfrm>
+          <a:prstGeom prst="rect">
+            <a:avLst/>
+          </a:prstGeom>
+          <a:noFill/>
+          <a:ln w="16933" cap="flat" cmpd="sng">
+            <a:noFill/>
+            <a:prstDash val="solid"/>
+            <a:round/>
+          </a:ln>
+        </p:spPr>
+        <p:txBody>
+          <a:bodyPr vert="horz" wrap="square" lIns="0" tIns="0" rIns="0" bIns="0" rtlCol="0" anchor="t" anchorCtr="0">
+            <a:spAutoFit/>
+          </a:bodyPr>
+          <a:lstStyle/>
+          <a:p>
+            <a:pPr>
+              <a:defRPr/>
+            </a:pPr>
+            <a:r>
+              <a:rPr lang="zh-CN" altLang="en-US" sz="4000" b="1" dirty="0">
+                <a:solidFill>
+                  <a:srgbClr val="F7F7F5"/>
+                </a:solidFill>
+                <a:latin typeface="MiSans VF Bold" pitchFamily="2" charset="-122"/>
+                <a:ea typeface="MiSans VF Bold" pitchFamily="2" charset="-122"/>
+                <a:cs typeface="MiSans VF Bold" pitchFamily="2" charset="-122"/>
+                <a:sym typeface="SimHei"/>
+              </a:rPr>
+              <a:t>关掉全部决策模块</a:t>
+            </a:r>
+            <a:r>
+              <a:rPr lang="zh-CN" altLang="en-US" sz="4000" b="1" dirty="0">
+                <a:solidFill>
+                  <a:srgbClr val="FF2B20"/>
+                </a:solidFill>
+                <a:latin typeface="MiSans VF Bold" pitchFamily="2" charset="-122"/>
+                <a:ea typeface="MiSans VF Bold" pitchFamily="2" charset="-122"/>
+                <a:cs typeface="MiSans VF Bold" pitchFamily="2" charset="-122"/>
+                <a:sym typeface="SimHei"/>
+              </a:rPr>
+              <a:t/>
+            </a:r>
+            <a:endParaRPr lang="en-US" altLang="zh-CN" sz="4000" b="1" dirty="0">
+              <a:solidFill>
+                <a:srgbClr val="FF2B20"/>
+              </a:solidFill>
+              <a:latin typeface="MiSans VF Bold" pitchFamily="2" charset="-122"/>
+              <a:ea typeface="MiSans VF Bold" pitchFamily="2" charset="-122"/>
+              <a:cs typeface="MiSans VF Bold" pitchFamily="2" charset="-122"/>
+              <a:sym typeface="SimHei"/>
+            </a:endParaRPr>
+          </a:p>
+        </p:txBody>
+      </p:sp>
+      <p:cxnSp>
+        <p:nvCxnSpPr>
+          <p:cNvPr id="10" name="直线连接符 9">
+            <a:extLst>
+              <a:ext uri="{FF2B5EF4-FFF2-40B4-BE49-F238E27FC236}">
+                <a16:creationId id="{2B827151-4276-74C6-9148-F54B8FA729DD}"/>
+              </a:ext>
+            </a:extLst>
+          </p:cNvPr>
+          <p:cNvCxnSpPr>
+            <a:cxnSpLocks/>
+          </p:cNvCxnSpPr>
+          <p:nvPr/>
+        </p:nvCxnSpPr>
+        <p:spPr>
+          <a:xfrm>
+            <a:off x="524799" y="2161018"/>
+            <a:ext cx="11208485" cy="0"/>
+          </a:xfrm>
+          <a:prstGeom prst="line">
+            <a:avLst/>
+          </a:prstGeom>
+          <a:ln>
+            <a:solidFill>
+              <a:srgbClr val="F7F7F5">
+                <a:alpha val="10000"/>
+              </a:srgbClr>
+            </a:solidFill>
+          </a:ln>
+        </p:spPr>
+        <p:style>
+          <a:lnRef idx="1">
+            <a:schemeClr val="accent1"/>
+          </a:lnRef>
+          <a:fillRef idx="0">
+            <a:schemeClr val="accent1"/>
+          </a:fillRef>
+          <a:effectRef idx="0">
+            <a:schemeClr val="accent1"/>
+          </a:effectRef>
+          <a:fontRef idx="minor">
+            <a:schemeClr val="tx1"/>
+          </a:fontRef>
+        </p:style>
+      </p:cxnSp>
+      <p:cxnSp>
+        <p:nvCxnSpPr>
+          <p:cNvPr id="13" name="直线连接符 12">
+            <a:extLst>
+              <a:ext uri="{FF2B5EF4-FFF2-40B4-BE49-F238E27FC236}">
+                <a16:creationId id="{06CEF79B-BDA5-B5C4-FDCC-21292344526C}"/>
+              </a:ext>
+            </a:extLst>
+          </p:cNvPr>
+          <p:cNvCxnSpPr>
+            <a:cxnSpLocks/>
+          </p:cNvCxnSpPr>
+          <p:nvPr/>
+        </p:nvCxnSpPr>
+        <p:spPr>
+          <a:xfrm>
+            <a:off x="6095999" y="2161018"/>
+            <a:ext cx="0" cy="3724494"/>
+          </a:xfrm>
+          <a:prstGeom prst="line">
+            <a:avLst/>
+          </a:prstGeom>
+          <a:ln>
+            <a:solidFill>
+              <a:srgbClr val="F7F7F5">
+                <a:alpha val="10000"/>
+              </a:srgbClr>
+            </a:solidFill>
+          </a:ln>
+        </p:spPr>
+        <p:style>
+          <a:lnRef idx="1">
+            <a:schemeClr val="accent1"/>
+          </a:lnRef>
+          <a:fillRef idx="0">
+            <a:schemeClr val="accent1"/>
+          </a:fillRef>
+          <a:effectRef idx="0">
+            <a:schemeClr val="accent1"/>
+          </a:effectRef>
+          <a:fontRef idx="minor">
+            <a:schemeClr val="tx1"/>
+          </a:fontRef>
+        </p:style>
+      </p:cxnSp>
+      <p:sp>
+        <p:nvSpPr>
+          <p:cNvPr id="20" name="AutoShape 5">
+            <a:extLst>
+              <a:ext uri="{FF2B5EF4-FFF2-40B4-BE49-F238E27FC236}">
+                <a16:creationId id="{A1DA29C7-D35A-DCF5-C758-3742317B3C92}"/>
+              </a:ext>
+            </a:extLst>
+          </p:cNvPr>
+          <p:cNvSpPr/>
+          <p:nvPr/>
+        </p:nvSpPr>
+        <p:spPr>
+          <a:xfrm>
+            <a:off x="524799" y="2532397"/>
+            <a:ext cx="4495436" cy="307777"/>
+          </a:xfrm>
+          <a:prstGeom prst="rect">
+            <a:avLst/>
+          </a:prstGeom>
+          <a:noFill/>
+          <a:ln w="16933" cap="flat" cmpd="sng">
+            <a:noFill/>
+            <a:prstDash val="solid"/>
+            <a:round/>
+          </a:ln>
+        </p:spPr>
+        <p:txBody>
+          <a:bodyPr vert="horz" wrap="square" lIns="0" tIns="0" rIns="0" bIns="0" rtlCol="0" anchor="t" anchorCtr="0">
+            <a:spAutoFit/>
+          </a:bodyPr>
+          <a:lstStyle/>
+          <a:p>
+            <a:pPr>
+              <a:defRPr/>
+            </a:pPr>
+            <a:r>
+              <a:rPr lang="zh-CN" altLang="en-US" sz="2000" b="1" dirty="0">
+                <a:solidFill>
+                  <a:srgbClr val="F7F7F5"/>
+                </a:solidFill>
+                <a:latin typeface="MiSans VF Bold" pitchFamily="2" charset="-122"/>
+                <a:ea typeface="MiSans VF Bold" pitchFamily="2" charset="-122"/>
+                <a:cs typeface="MiSans VF Bold" pitchFamily="2" charset="-122"/>
+                <a:sym typeface="SimHei"/>
+              </a:rPr>
+              <a:t>结构是被逼出来的</a:t>
+            </a:r>
+            <a:endParaRPr lang="en-US" altLang="zh-CN" sz="2000" b="1" dirty="0">
+              <a:solidFill>
+                <a:srgbClr val="F7F7F5"/>
+              </a:solidFill>
+              <a:latin typeface="MiSans VF Bold" pitchFamily="2" charset="-122"/>
+              <a:ea typeface="MiSans VF Bold" pitchFamily="2" charset="-122"/>
+              <a:cs typeface="MiSans VF Bold" pitchFamily="2" charset="-122"/>
+              <a:sym typeface="SimHei"/>
+            </a:endParaRPr>
+          </a:p>
+        </p:txBody>
+      </p:sp>
+      <p:sp>
+        <p:nvSpPr>
+          <p:cNvPr id="8" name="文本框 7">
+            <a:extLst>
+              <a:ext uri="{FF2B5EF4-FFF2-40B4-BE49-F238E27FC236}">
+                <a16:creationId id="{6806E61F-5B4C-BBCF-690B-EACCC44F7FD3}"/>
+              </a:ext>
+            </a:extLst>
+          </p:cNvPr>
+          <p:cNvSpPr txBox="1"/>
+          <p:nvPr/>
+        </p:nvSpPr>
+        <p:spPr>
+          <a:xfrm>
+            <a:off x="524798" y="3211552"/>
+            <a:ext cx="5115516" cy="1754326"/>
+          </a:xfrm>
+          <a:prstGeom prst="rect">
+            <a:avLst/>
+          </a:prstGeom>
+          <a:noFill/>
+        </p:spPr>
+        <p:txBody>
+          <a:bodyPr wrap="square" lIns="0" tIns="0" rIns="0" bIns="0" anchor="t" anchorCtr="0">
+            <a:spAutoFit/>
+          </a:bodyPr>
+          <a:lstStyle/>
+          <a:p>
+            <a:pPr>
+              <a:spcBef>
+                <a:spcPts val="1200"/>
+              </a:spcBef>
+              <a:defRPr/>
+            </a:pPr>
+            <a:r>
+              <a:rPr lang="zh-CN" altLang="en-US" sz="1200" dirty="0">
+                <a:solidFill>
+                  <a:srgbClr val="F7F7F5">
+                    <a:alpha val="80000"/>
+                  </a:srgbClr>
+                </a:solidFill>
+                <a:latin typeface="MiSans VF Light" pitchFamily="2" charset="-122"/>
+                <a:ea typeface="MiSans VF Light" pitchFamily="2" charset="-122"/>
+                <a:cs typeface="MiSans VF Light" pitchFamily="2" charset="-122"/>
+                <a:sym typeface="SimHei"/>
+              </a:rPr>
+              <a:t>寻找、显著性、到达预测、外部 KPI 全部保持默认 0，系统中不存在任何决策模块。</a:t>
+            </a:r>
+            <a:endParaRPr lang="en-US" altLang="zh-CN" sz="1200" dirty="0">
+              <a:solidFill>
+                <a:srgbClr val="F7F7F5">
+                  <a:alpha val="80000"/>
+                </a:srgbClr>
+              </a:solidFill>
+              <a:latin typeface="MiSans VF Light" pitchFamily="2" charset="-122"/>
+              <a:ea typeface="MiSans VF Light" pitchFamily="2" charset="-122"/>
+              <a:cs typeface="MiSans VF Light" pitchFamily="2" charset="-122"/>
+              <a:sym typeface="SimHei"/>
+            </a:endParaRPr>
+          </a:p>
+          <a:p>
+            <a:pPr>
+              <a:spcBef>
+                <a:spcPts val="1200"/>
+              </a:spcBef>
+              <a:defRPr/>
+            </a:pPr>
+            <a:r>
+              <a:rPr lang="zh-CN" altLang="en-US" sz="1200" dirty="0">
+                <a:solidFill>
+                  <a:srgbClr val="F7F7F5">
+                    <a:alpha val="80000"/>
+                  </a:srgbClr>
+                </a:solidFill>
+                <a:latin typeface="MiSans VF Light" pitchFamily="2" charset="-122"/>
+                <a:ea typeface="MiSans VF Light" pitchFamily="2" charset="-122"/>
+                <a:cs typeface="MiSans VF Light" pitchFamily="2" charset="-122"/>
+                <a:sym typeface="SimHei"/>
+              </a:rPr>
+              <a:t>前 300 拍分别饿通道 3 与通道 5，此后条件完全相同：饿过它 → 0.00004，没饿过 → 0.1495。</a:t>
+            </a:r>
+          </a:p>
+          <a:p>
+            <a:pPr>
+              <a:spcBef>
+                <a:spcPts val="1200"/>
+              </a:spcBef>
+              <a:defRPr/>
+            </a:pPr>
+            <a:r>
+              <a:rPr lang="zh-CN" altLang="en-US" sz="1200" dirty="0">
+                <a:solidFill>
+                  <a:srgbClr val="F7F7F5">
+                    <a:alpha val="80000"/>
+                  </a:srgbClr>
+                </a:solidFill>
+                <a:latin typeface="MiSans VF Light" pitchFamily="2" charset="-122"/>
+                <a:ea typeface="MiSans VF Light" pitchFamily="2" charset="-122"/>
+                <a:cs typeface="MiSans VF Light" pitchFamily="2" charset="-122"/>
+                <a:sym typeface="SimHei"/>
+              </a:rPr>
+              <a:t>Δ = −0.1494 ± 0.0311，8/8 seeds 符号一致。记忆不在任何模块里，它在不可逆结构容量里。</a:t>
+            </a:r>
+            <a:endParaRPr lang="en-US" altLang="zh-CN" sz="1200" dirty="0">
+              <a:solidFill>
+                <a:srgbClr val="F7F7F5">
+                  <a:alpha val="80000"/>
+                </a:srgbClr>
+              </a:solidFill>
+              <a:latin typeface="MiSans VF Light" pitchFamily="2" charset="-122"/>
+              <a:ea typeface="MiSans VF Light" pitchFamily="2" charset="-122"/>
+              <a:cs typeface="MiSans VF Light" pitchFamily="2" charset="-122"/>
+              <a:sym typeface="SimHei"/>
+            </a:endParaRPr>
+          </a:p>
+          <a:p>
+            <a:pPr>
+              <a:spcBef>
+                <a:spcPts val="1200"/>
+              </a:spcBef>
+              <a:defRPr/>
+            </a:pPr>
+            <a:r>
+              <a:rPr lang="zh-CN" altLang="en-US" sz="1200" dirty="0">
+                <a:solidFill>
+                  <a:srgbClr val="F7F7F5">
+                    <a:alpha val="80000"/>
+                  </a:srgbClr>
+                </a:solidFill>
+                <a:latin typeface="MiSans VF Light" pitchFamily="2" charset="-122"/>
+                <a:ea typeface="MiSans VF Light" pitchFamily="2" charset="-122"/>
+                <a:cs typeface="MiSans VF Light" pitchFamily="2" charset="-122"/>
+                <a:sym typeface="SimHei"/>
+              </a:rPr>
+              <a:t/>
+            </a:r>
+          </a:p>
+        </p:txBody>
+      </p:sp>
       <p:pic>
         <p:nvPicPr>
-          <p:cNvPr id="5" name="图片 4">
+          <p:cNvPr id="6" name="图片 5">
             <a:extLst>
               <a:ext uri="{FF2B5EF4-FFF2-40B4-BE49-F238E27FC236}">
-                <a16:creationId id="{8B48226C-70B1-D951-9444-6D64053EAB47}"/>
+                <a16:creationId id="{897C9662-B38C-B5DE-1E8A-7267CAA45413}"/>
               </a:ext>
             </a:extLst>
           </p:cNvPr>
@@ -27451,350 +27776,25 @@
               </a:ext>
             </a:extLst>
           </a:blip>
-          <a:srcRect t="29311" b="29311"/>
+          <a:srcRect t="20000" b="20000"/>
           <a:stretch>
             <a:fillRect/>
           </a:stretch>
         </p:blipFill>
         <p:spPr>
           <a:xfrm>
-            <a:off x="4365276" y="2302349"/>
-            <a:ext cx="3480320" cy="1928758"/>
+            <a:off x="6387950" y="2432835"/>
+            <a:ext cx="5278739" cy="3167243"/>
           </a:xfrm>
           <a:prstGeom prst="rect">
             <a:avLst/>
           </a:prstGeom>
         </p:spPr>
       </p:pic>
-      <p:pic>
-        <p:nvPicPr>
-          <p:cNvPr id="8" name="图片 7">
-            <a:extLst>
-              <a:ext uri="{FF2B5EF4-FFF2-40B4-BE49-F238E27FC236}">
-                <a16:creationId id="{3ECA195B-4BC4-D7A3-7C98-EBC5CD31CE59}"/>
-              </a:ext>
-            </a:extLst>
-          </p:cNvPr>
-          <p:cNvPicPr>
-            <a:picLocks noChangeAspect="1"/>
-          </p:cNvPicPr>
-          <p:nvPr/>
-        </p:nvPicPr>
-        <p:blipFill>
-          <a:blip r:embed="rId3">
-            <a:extLst>
-              <a:ext uri="{28A0092B-C50C-407E-A947-70E740481C1C}">
-                <a14:useLocalDpi val="0"/>
-              </a:ext>
-            </a:extLst>
-          </a:blip>
-          <a:srcRect t="29311" b="29311"/>
-          <a:stretch>
-            <a:fillRect/>
-          </a:stretch>
-        </p:blipFill>
-        <p:spPr>
-          <a:xfrm>
-            <a:off x="524796" y="2295559"/>
-            <a:ext cx="3480320" cy="1928758"/>
-          </a:xfrm>
-          <a:prstGeom prst="rect">
-            <a:avLst/>
-          </a:prstGeom>
-        </p:spPr>
-      </p:pic>
-      <p:pic>
-        <p:nvPicPr>
-          <p:cNvPr id="10" name="图片 9">
-            <a:extLst>
-              <a:ext uri="{FF2B5EF4-FFF2-40B4-BE49-F238E27FC236}">
-                <a16:creationId id="{CBB63147-B931-9E83-B796-0B4E8993A87D}"/>
-              </a:ext>
-            </a:extLst>
-          </p:cNvPr>
-          <p:cNvPicPr>
-            <a:picLocks noChangeAspect="1"/>
-          </p:cNvPicPr>
-          <p:nvPr/>
-        </p:nvPicPr>
-        <p:blipFill>
-          <a:blip r:embed="rId4">
-            <a:extLst>
-              <a:ext uri="{28A0092B-C50C-407E-A947-70E740481C1C}">
-                <a14:useLocalDpi val="0"/>
-              </a:ext>
-            </a:extLst>
-          </a:blip>
-          <a:srcRect t="29311" b="29311"/>
-          <a:stretch>
-            <a:fillRect/>
-          </a:stretch>
-        </p:blipFill>
-        <p:spPr>
-          <a:xfrm>
-            <a:off x="8205756" y="2302349"/>
-            <a:ext cx="3480320" cy="1928758"/>
-          </a:xfrm>
-          <a:prstGeom prst="rect">
-            <a:avLst/>
-          </a:prstGeom>
-        </p:spPr>
-      </p:pic>
-      <p:sp>
-        <p:nvSpPr>
-          <p:cNvPr id="11" name="文本框 10">
-            <a:extLst>
-              <a:ext uri="{FF2B5EF4-FFF2-40B4-BE49-F238E27FC236}">
-                <a16:creationId id="{9A0EA5EB-556D-1411-995F-178F17A06613}"/>
-              </a:ext>
-            </a:extLst>
-          </p:cNvPr>
-          <p:cNvSpPr txBox="1"/>
-          <p:nvPr/>
-        </p:nvSpPr>
-        <p:spPr>
-          <a:xfrm>
-            <a:off x="524796" y="4908953"/>
-            <a:ext cx="3319001" cy="184666"/>
-          </a:xfrm>
-          <a:prstGeom prst="rect">
-            <a:avLst/>
-          </a:prstGeom>
-          <a:noFill/>
-        </p:spPr>
-        <p:txBody>
-          <a:bodyPr wrap="square" lIns="0" tIns="0" rIns="0" bIns="0">
-            <a:spAutoFit/>
-          </a:bodyPr>
-          <a:lstStyle/>
-          <a:p>
-            <a:pPr>
-              <a:spcBef>
-                <a:spcPts val="1200"/>
-              </a:spcBef>
-              <a:defRPr/>
-            </a:pPr>
-            <a:r>
-              <a:rPr lang="zh-CN" altLang="en-US" sz="1200" dirty="0">
-                <a:solidFill>
-                  <a:srgbClr val="F7F7F5">
-                    <a:alpha val="80000"/>
-                  </a:srgbClr>
-                </a:solidFill>
-                <a:latin typeface="MiSans VF Light" pitchFamily="2" charset="-122"/>
-                <a:ea typeface="MiSans VF Light" pitchFamily="2" charset="-122"/>
-                <a:cs typeface="MiSans VF Light" pitchFamily="2" charset="-122"/>
-                <a:sym typeface="SimHei"/>
-              </a:rPr>
-              <a:t>门在第 400 拍关上</a:t>
-            </a:r>
-          </a:p>
-        </p:txBody>
-      </p:sp>
-      <p:sp>
-        <p:nvSpPr>
-          <p:cNvPr id="12" name="文本框 11">
-            <a:extLst>
-              <a:ext uri="{FF2B5EF4-FFF2-40B4-BE49-F238E27FC236}">
-                <a16:creationId id="{3847B955-84CD-7160-E6F7-E14BF0282D8C}"/>
-              </a:ext>
-            </a:extLst>
-          </p:cNvPr>
-          <p:cNvSpPr txBox="1"/>
-          <p:nvPr/>
-        </p:nvSpPr>
-        <p:spPr>
-          <a:xfrm>
-            <a:off x="4362505" y="4493086"/>
-            <a:ext cx="3319001" cy="246221"/>
-          </a:xfrm>
-          <a:prstGeom prst="rect">
-            <a:avLst/>
-          </a:prstGeom>
-          <a:noFill/>
-        </p:spPr>
-        <p:txBody>
-          <a:bodyPr wrap="square" lIns="0" tIns="0" rIns="0" bIns="0">
-            <a:spAutoFit/>
-          </a:bodyPr>
-          <a:lstStyle/>
-          <a:p>
-            <a:pPr>
-              <a:spcBef>
-                <a:spcPts val="1200"/>
-              </a:spcBef>
-              <a:defRPr/>
-            </a:pPr>
-            <a:r>
-              <a:rPr lang="zh-CN" altLang="en-US" sz="1600" dirty="0">
-                <a:solidFill>
-                  <a:srgbClr val="F7F7F5"/>
-                </a:solidFill>
-                <a:latin typeface="Didot" panose="02000503000000020003" pitchFamily="2" charset="-79"/>
-                <a:ea typeface="MiSans VF Bold" pitchFamily="2" charset="-122"/>
-                <a:cs typeface="Didot" panose="02000503000000020003" pitchFamily="2" charset="-79"/>
-                <a:sym typeface="SimHei"/>
-              </a:rPr>
-              <a:t>H2 · 剂量-反应</a:t>
-            </a:r>
-          </a:p>
-        </p:txBody>
-      </p:sp>
-      <p:sp>
-        <p:nvSpPr>
-          <p:cNvPr id="13" name="文本框 12">
-            <a:extLst>
-              <a:ext uri="{FF2B5EF4-FFF2-40B4-BE49-F238E27FC236}">
-                <a16:creationId id="{829845F5-7CC0-75D4-07A3-A234B1960F32}"/>
-              </a:ext>
-            </a:extLst>
-          </p:cNvPr>
-          <p:cNvSpPr txBox="1"/>
-          <p:nvPr/>
-        </p:nvSpPr>
-        <p:spPr>
-          <a:xfrm>
-            <a:off x="4362505" y="4908953"/>
-            <a:ext cx="3319001" cy="184666"/>
-          </a:xfrm>
-          <a:prstGeom prst="rect">
-            <a:avLst/>
-          </a:prstGeom>
-          <a:noFill/>
-        </p:spPr>
-        <p:txBody>
-          <a:bodyPr wrap="square" lIns="0" tIns="0" rIns="0" bIns="0">
-            <a:spAutoFit/>
-          </a:bodyPr>
-          <a:lstStyle/>
-          <a:p>
-            <a:pPr>
-              <a:spcBef>
-                <a:spcPts val="1200"/>
-              </a:spcBef>
-              <a:defRPr/>
-            </a:pPr>
-            <a:r>
-              <a:rPr lang="zh-CN" altLang="en-US" sz="1200" dirty="0">
-                <a:solidFill>
-                  <a:srgbClr val="F7F7F5">
-                    <a:alpha val="80000"/>
-                  </a:srgbClr>
-                </a:solidFill>
-                <a:latin typeface="MiSans VF Light" pitchFamily="2" charset="-122"/>
-                <a:ea typeface="MiSans VF Light" pitchFamily="2" charset="-122"/>
-                <a:cs typeface="MiSans VF Light" pitchFamily="2" charset="-122"/>
-                <a:sym typeface="SimHei"/>
-              </a:rPr>
-              <a:t>50 拍即达最大效应 89.8%，属阈值型而非线性</a:t>
-            </a:r>
-          </a:p>
-        </p:txBody>
-      </p:sp>
-      <p:sp>
-        <p:nvSpPr>
-          <p:cNvPr id="14" name="文本框 13">
-            <a:extLst>
-              <a:ext uri="{FF2B5EF4-FFF2-40B4-BE49-F238E27FC236}">
-                <a16:creationId id="{B5C380DF-0131-3088-39BF-A168647DFD40}"/>
-              </a:ext>
-            </a:extLst>
-          </p:cNvPr>
-          <p:cNvSpPr txBox="1"/>
-          <p:nvPr/>
-        </p:nvSpPr>
-        <p:spPr>
-          <a:xfrm>
-            <a:off x="8200214" y="4493086"/>
-            <a:ext cx="3319001" cy="246221"/>
-          </a:xfrm>
-          <a:prstGeom prst="rect">
-            <a:avLst/>
-          </a:prstGeom>
-          <a:noFill/>
-        </p:spPr>
-        <p:txBody>
-          <a:bodyPr wrap="square" lIns="0" tIns="0" rIns="0" bIns="0">
-            <a:spAutoFit/>
-          </a:bodyPr>
-          <a:lstStyle/>
-          <a:p>
-            <a:pPr>
-              <a:spcBef>
-                <a:spcPts val="1200"/>
-              </a:spcBef>
-              <a:defRPr/>
-            </a:pPr>
-            <a:r>
-              <a:rPr lang="zh-CN" altLang="en-US" sz="1600" dirty="0">
-                <a:solidFill>
-                  <a:srgbClr val="F7F7F5"/>
-                </a:solidFill>
-                <a:latin typeface="Didot" panose="02000503000000020003" pitchFamily="2" charset="-79"/>
-                <a:ea typeface="MiSans VF Bold" pitchFamily="2" charset="-122"/>
-                <a:cs typeface="Didot" panose="02000503000000020003" pitchFamily="2" charset="-79"/>
-                <a:sym typeface="SimHei"/>
-              </a:rPr>
-              <a:t>H3 · 选择压</a:t>
-            </a:r>
-          </a:p>
-        </p:txBody>
-      </p:sp>
-      <p:sp>
-        <p:nvSpPr>
-          <p:cNvPr id="16" name="文本框 15">
-            <a:extLst>
-              <a:ext uri="{FF2B5EF4-FFF2-40B4-BE49-F238E27FC236}">
-                <a16:creationId id="{59211C5B-AA80-DAEA-AAF7-C4B1E4F95193}"/>
-              </a:ext>
-            </a:extLst>
-          </p:cNvPr>
-          <p:cNvSpPr txBox="1"/>
-          <p:nvPr/>
-        </p:nvSpPr>
-        <p:spPr>
-          <a:xfrm>
-            <a:off x="8200214" y="4908953"/>
-            <a:ext cx="3319001" cy="369332"/>
-          </a:xfrm>
-          <a:prstGeom prst="rect">
-            <a:avLst/>
-          </a:prstGeom>
-          <a:noFill/>
-        </p:spPr>
-        <p:txBody>
-          <a:bodyPr wrap="square" lIns="0" tIns="0" rIns="0" bIns="0">
-            <a:spAutoFit/>
-          </a:bodyPr>
-          <a:lstStyle/>
-          <a:p>
-            <a:pPr>
-              <a:spcBef>
-                <a:spcPts val="1200"/>
-              </a:spcBef>
-              <a:defRPr/>
-            </a:pPr>
-            <a:r>
-              <a:rPr lang="zh-CN" altLang="en-US" sz="1200" dirty="0">
-                <a:solidFill>
-                  <a:srgbClr val="F7F7F5">
-                    <a:alpha val="80000"/>
-                  </a:srgbClr>
-                </a:solidFill>
-                <a:latin typeface="MiSans VF Light" pitchFamily="2" charset="-122"/>
-                <a:ea typeface="MiSans VF Light" pitchFamily="2" charset="-122"/>
-                <a:cs typeface="MiSans VF Light" pitchFamily="2" charset="-122"/>
-                <a:sym typeface="SimHei"/>
-              </a:rPr>
-              <a:t>ratio≥1.0 时结构精确归零：稀缺是开关，不是旋钮</a:t>
-            </a:r>
-          </a:p>
-        </p:txBody>
-      </p:sp>
     </p:spTree>
     <p:extLst>
       <p:ext uri="{BB962C8B-B14F-4D97-AF65-F5344CB8AC3E}">
-        <p14:creationId val="166021927"/>
+        <p14:creationId val="2159064439"/>
       </p:ext>
     </p:extLst>
   </p:cSld>
